--- a/Sunum_KronikKusma/output/KronikKusmaYaklasim.pptx
+++ b/Sunum_KronikKusma/output/KronikKusmaYaklasim.pptx
@@ -155,7 +155,7 @@
   <p:extLst>
     <p:ext uri="{521415D9-36F7-43E2-AB2F-B90AF26B5E84}">
       <p14:sectionLst xmlns:p14="http://schemas.microsoft.com/office/powerpoint/2010/main">
-        <p14:section name="Açılış" id="{2e52441c-90e8-1972-e114-2d809a7c60e5}">
+        <p14:section name="Açılış" id="{48842e05-5f0f-0240-bb43-a19584530941}">
           <p14:sldIdLst>
             <p14:sldId id="256"/>
             <p14:sldId id="257"/>
@@ -163,7 +163,7 @@
             <p14:sldId id="259"/>
           </p14:sldIdLst>
         </p14:section>
-        <p14:section name="1 · Patern ve tanım" id="{54975099-8617-a059-4593-1b6cd62ce4b4}">
+        <p14:section name="1 · Patern ve tanım" id="{1922c246-f5af-c72b-5a17-ef1d784a4699}">
           <p14:sldIdLst>
             <p14:sldId id="260"/>
             <p14:sldId id="261"/>
@@ -172,7 +172,7 @@
             <p14:sldId id="264"/>
           </p14:sldIdLst>
         </p14:section>
-        <p14:section name="2 · Öykü ve muayene" id="{ce15f0d6-0e2c-9c77-b5ab-200e0421d438}">
+        <p14:section name="2 · Öykü ve muayene" id="{86a03a83-e4bb-a1ed-c95d-71ef300d8168}">
           <p14:sldIdLst>
             <p14:sldId id="265"/>
             <p14:sldId id="266"/>
@@ -181,7 +181,7 @@
             <p14:sldId id="269"/>
           </p14:sldIdLst>
         </p14:section>
-        <p14:section name="3 · Organik ayırıcı tanı" id="{a099aacf-01dc-3c28-f8d2-4eac6d4ac828}">
+        <p14:section name="3 · Organik ayırıcı tanı" id="{c505bad5-40a1-dda1-9ce0-85a5d034b872}">
           <p14:sldIdLst>
             <p14:sldId id="270"/>
             <p14:sldId id="271"/>
@@ -192,7 +192,7 @@
             <p14:sldId id="276"/>
           </p14:sldIdLst>
         </p14:section>
-        <p14:section name="4 · Basamaklı tetkik" id="{ce44b8d1-353c-e0db-0abd-94efc25e85a2}">
+        <p14:section name="4 · Basamaklı tetkik" id="{64bf8553-a5a2-4cc2-5275-d253d6c997ef}">
           <p14:sldIdLst>
             <p14:sldId id="277"/>
             <p14:sldId id="278"/>
@@ -204,7 +204,7 @@
             <p14:sldId id="284"/>
           </p14:sldIdLst>
         </p14:section>
-        <p14:section name="5 · Fonksiyonel tanı: Rome V" id="{82c53c56-321f-fd4c-5389-5facdb6c59e8}">
+        <p14:section name="5 · Fonksiyonel tanı: Rome V" id="{8efccf4f-af46-c008-e2cd-489b7d122cd7}">
           <p14:sldIdLst>
             <p14:sldId id="285"/>
             <p14:sldId id="286"/>
@@ -213,7 +213,7 @@
             <p14:sldId id="289"/>
           </p14:sldIdLst>
         </p14:section>
-        <p14:section name="6 · Yönetim" id="{f8d016f1-de10-f30e-2da3-9ed9220379d7}">
+        <p14:section name="6 · Yönetim" id="{79f89d1c-0a29-90d8-a979-e7eeeede00f3}">
           <p14:sldIdLst>
             <p14:sldId id="290"/>
             <p14:sldId id="291"/>
@@ -225,12 +225,12 @@
             <p14:sldId id="297"/>
           </p14:sldIdLst>
         </p14:section>
-        <p14:section name="Kapanış" id="{45200470-0bc9-80f3-bb05-08b80c998963}">
+        <p14:section name="Kapanış" id="{9fa78007-ab35-bece-0182-a5151e9553e0}">
           <p14:sldIdLst>
             <p14:sldId id="298"/>
           </p14:sldIdLst>
         </p14:section>
-        <p14:section name="Kaynaklar" id="{e80ef053-2578-2223-87b1-ae753e52766a}">
+        <p14:section name="Kaynaklar" id="{c1fb4115-8e3f-e936-2696-faa9396e51c6}">
           <p14:sldIdLst>
             <p14:sldId id="299"/>
             <p14:sldId id="300"/>
@@ -5123,7 +5123,7 @@
         </p:nvSpPr>
         <p:spPr>
           <a:xfrm>
-            <a:off x="548640" y="228600"/>
+            <a:off x="548640" y="365760"/>
             <a:ext cx="8229600" cy="292608"/>
           </a:xfrm>
           <a:prstGeom prst="rect">
@@ -5162,7 +5162,7 @@
         </p:nvSpPr>
         <p:spPr>
           <a:xfrm>
-            <a:off x="548640" y="530352"/>
+            <a:off x="548640" y="640080"/>
             <a:ext cx="11091672" cy="914400"/>
           </a:xfrm>
           <a:prstGeom prst="rect">
@@ -5201,7 +5201,7 @@
         </p:nvSpPr>
         <p:spPr>
           <a:xfrm>
-            <a:off x="548640" y="6382512"/>
+            <a:off x="548640" y="6272784"/>
             <a:ext cx="10241280" cy="274320"/>
           </a:xfrm>
           <a:prstGeom prst="rect">
@@ -5215,7 +5215,7 @@
           <a:lstStyle>
             <a:lvl1pPr indent="0" marL="0">
               <a:buNone/>
-              <a:defRPr lang="en-US" sz="1000" dirty="0">
+              <a:defRPr lang="en-US" sz="1100" dirty="0">
                 <a:solidFill>
                   <a:schemeClr val="accent4"/>
                 </a:solidFill>
@@ -5226,7 +5226,7 @@
             <a:pPr indent="0" marL="0">
               <a:buNone/>
             </a:pPr>
-            <a:endParaRPr lang="en-US" sz="1000" dirty="0"/>
+            <a:endParaRPr lang="en-US" sz="1100" dirty="0"/>
           </a:p>
         </p:txBody>
       </p:sp>
@@ -5242,7 +5242,7 @@
         </p:nvSpPr>
         <p:spPr>
           <a:xfrm>
-            <a:off x="11109960" y="6382512"/>
+            <a:off x="11109960" y="6272784"/>
             <a:ext cx="548640" cy="274320"/>
           </a:xfrm>
           <a:prstGeom prst="rect">
@@ -5258,7 +5258,7 @@
           <a:bodyPr/>
           <a:lstStyle>
             <a:lvl1pPr>
-              <a:defRPr sz="1000">
+              <a:defRPr sz="1100">
                 <a:solidFill>
                   <a:srgbClr val="5B6B73"/>
                 </a:solidFill>
@@ -5317,7 +5317,7 @@
         </p:nvSpPr>
         <p:spPr>
           <a:xfrm>
-            <a:off x="548640" y="320040"/>
+            <a:off x="548640" y="640080"/>
             <a:ext cx="11091672" cy="548640"/>
           </a:xfrm>
           <a:prstGeom prst="rect">
@@ -5358,7 +5358,7 @@
         </p:nvSpPr>
         <p:spPr>
           <a:xfrm>
-            <a:off x="11109960" y="6382512"/>
+            <a:off x="11109960" y="6272784"/>
             <a:ext cx="548640" cy="274320"/>
           </a:xfrm>
           <a:prstGeom prst="rect">
@@ -5374,7 +5374,7 @@
           <a:bodyPr/>
           <a:lstStyle>
             <a:lvl1pPr>
-              <a:defRPr sz="1000">
+              <a:defRPr sz="1100">
                 <a:solidFill>
                   <a:srgbClr val="5B6B73"/>
                 </a:solidFill>
@@ -5499,7 +5499,7 @@
         </p:nvSpPr>
         <p:spPr>
           <a:xfrm>
-            <a:off x="11109960" y="6382512"/>
+            <a:off x="11109960" y="6272784"/>
             <a:ext cx="548640" cy="274320"/>
           </a:xfrm>
           <a:prstGeom prst="rect">
@@ -5515,7 +5515,7 @@
           <a:bodyPr/>
           <a:lstStyle>
             <a:lvl1pPr>
-              <a:defRPr sz="1000">
+              <a:defRPr sz="1100">
                 <a:solidFill>
                   <a:srgbClr val="5B6B73"/>
                 </a:solidFill>
@@ -5962,7 +5962,7 @@
         </p:nvSpPr>
         <p:spPr>
           <a:xfrm>
-            <a:off x="548640" y="228600"/>
+            <a:off x="548640" y="365760"/>
             <a:ext cx="8229600" cy="292608"/>
           </a:xfrm>
           <a:prstGeom prst="rect">
@@ -6000,7 +6000,7 @@
         </p:nvSpPr>
         <p:spPr>
           <a:xfrm>
-            <a:off x="548640" y="530352"/>
+            <a:off x="548640" y="640080"/>
             <a:ext cx="11091672" cy="914400"/>
           </a:xfrm>
           <a:prstGeom prst="rect">
@@ -6062,7 +6062,7 @@
                   <a:schemeClr val="tx1"/>
                 </a:solidFill>
               </a:rPr>
-              <a:t>SKS'de ~%90 prodrom; hastaların ~3/4'ünde tetikleyici: stres, enfeksiyon, besin, açlık, uykusuzluk, menstrüasyon</a:t>
+              <a:t>SKS'de ~%90 prodrom; hastaların ~3/4'ünde tetikleyici: stres, enfeksiyon, besin, açlık, uykusuzluk, menstrüasyon</a:t>
             </a:r>
             <a:r>
               <a:rPr lang="en-US" sz="2200" baseline="30000" dirty="0">
@@ -6070,7 +6070,7 @@
                   <a:schemeClr val="accent4"/>
                 </a:solidFill>
               </a:rPr>
-              <a:t>[23]</a:t>
+              <a:t>⁠[23]</a:t>
             </a:r>
             <a:endParaRPr lang="en-US" sz="2200" dirty="0"/>
           </a:p>
@@ -6088,7 +6088,7 @@
                   <a:schemeClr val="tx1"/>
                 </a:solidFill>
               </a:rPr>
-              <a:t>%75'e varanında gece/sabah başlar, sıklıkla safralı → saat ve safra tek başına ayırt etmez</a:t>
+              <a:t>%75'e varanında gece/sabah başlar, sıklıkla safralı → saat ve safra tek başına ayırt etmez</a:t>
             </a:r>
             <a:r>
               <a:rPr lang="en-US" sz="2200" baseline="30000" dirty="0">
@@ -6096,7 +6096,7 @@
                   <a:schemeClr val="accent4"/>
                 </a:solidFill>
               </a:rPr>
-              <a:t>[23]</a:t>
+              <a:t>⁠[23]</a:t>
             </a:r>
             <a:endParaRPr lang="en-US" sz="2200" dirty="0"/>
           </a:p>
@@ -6114,7 +6114,7 @@
                   <a:schemeClr val="tx1"/>
                 </a:solidFill>
               </a:rPr>
-              <a:t>Atakları siklusla eşle; adolesan kannabisi eksik bildirebilir</a:t>
+              <a:t>Atakları siklusla eşle; adolesan kannabisi eksik bildirebilir</a:t>
             </a:r>
             <a:r>
               <a:rPr lang="en-US" sz="2200" baseline="30000" dirty="0">
@@ -6122,7 +6122,7 @@
                   <a:schemeClr val="accent4"/>
                 </a:solidFill>
               </a:rPr>
-              <a:t>[8]</a:t>
+              <a:t>⁠[8]</a:t>
             </a:r>
             <a:endParaRPr lang="en-US" sz="2200" dirty="0"/>
           </a:p>
@@ -6140,7 +6140,7 @@
                   <a:schemeClr val="tx1"/>
                 </a:solidFill>
               </a:rPr>
-              <a:t>İlaç/toksin sor</a:t>
+              <a:t>İlaç/toksin sor</a:t>
             </a:r>
             <a:r>
               <a:rPr lang="en-US" sz="2200" baseline="30000" dirty="0">
@@ -6148,7 +6148,7 @@
                   <a:schemeClr val="accent4"/>
                 </a:solidFill>
               </a:rPr>
-              <a:t>[24]</a:t>
+              <a:t>⁠[24]</a:t>
             </a:r>
             <a:endParaRPr lang="en-US" sz="2200" dirty="0"/>
           </a:p>
@@ -6260,7 +6260,7 @@
         <p:spPr>
           <a:xfrm>
             <a:off x="8001000" y="4114800"/>
-            <a:ext cx="3639312" cy="822960"/>
+            <a:ext cx="3639312" cy="868680"/>
           </a:xfrm>
           <a:prstGeom prst="rect">
             <a:avLst/>
@@ -6271,7 +6271,7 @@
           <a:ln/>
         </p:spPr>
         <p:txBody>
-          <a:bodyPr wrap="square" lIns="76200" tIns="76200" rIns="76200" bIns="76200" rtlCol="0" anchor="t"/>
+          <a:bodyPr wrap="square" lIns="127000" tIns="127000" rIns="127000" bIns="127000" rtlCol="0" anchor="t"/>
           <a:lstStyle/>
           <a:p>
             <a:pPr indent="0" marL="0">
@@ -6299,7 +6299,7 @@
         </p:nvSpPr>
         <p:spPr>
           <a:xfrm>
-            <a:off x="548640" y="6382512"/>
+            <a:off x="548640" y="6272784"/>
             <a:ext cx="10241280" cy="274320"/>
           </a:xfrm>
           <a:prstGeom prst="rect">
@@ -6316,14 +6316,14 @@
               <a:buNone/>
             </a:pPr>
             <a:r>
-              <a:rPr lang="en-US" sz="1000" dirty="0">
+              <a:rPr lang="en-US" sz="1100" dirty="0">
                 <a:solidFill>
                   <a:schemeClr val="accent4"/>
                 </a:solidFill>
               </a:rPr>
               <a:t>Kaynak no: 8,23,24 · tam liste sondaki kaynak slaytlarında</a:t>
             </a:r>
-            <a:endParaRPr lang="en-US" sz="1000" dirty="0"/>
+            <a:endParaRPr lang="en-US" sz="1100" dirty="0"/>
           </a:p>
         </p:txBody>
       </p:sp>
@@ -6339,7 +6339,7 @@
         </p:nvSpPr>
         <p:spPr>
           <a:xfrm>
-            <a:off x="11109960" y="6382512"/>
+            <a:off x="11109960" y="6272784"/>
             <a:ext cx="548640" cy="274320"/>
           </a:xfrm>
           <a:prstGeom prst="rect">
@@ -6355,7 +6355,7 @@
           <a:bodyPr/>
           <a:lstStyle>
             <a:lvl1pPr>
-              <a:defRPr sz="1000">
+              <a:defRPr sz="1100">
                 <a:solidFill>
                   <a:srgbClr val="5B6B73"/>
                 </a:solidFill>
@@ -6407,7 +6407,7 @@
         </p:nvSpPr>
         <p:spPr>
           <a:xfrm>
-            <a:off x="548640" y="228600"/>
+            <a:off x="548640" y="365760"/>
             <a:ext cx="8229600" cy="292608"/>
           </a:xfrm>
           <a:prstGeom prst="rect">
@@ -6445,7 +6445,7 @@
         </p:nvSpPr>
         <p:spPr>
           <a:xfrm>
-            <a:off x="548640" y="530352"/>
+            <a:off x="548640" y="640080"/>
             <a:ext cx="11091672" cy="914400"/>
           </a:xfrm>
           <a:prstGeom prst="rect">
@@ -6507,7 +6507,7 @@
                   <a:schemeClr val="tx1"/>
                 </a:solidFill>
               </a:rPr>
-              <a:t>Beyin tümörlü çocukların yarıdan fazlasında KİBAS bulgusu yok; posterior fossada bulantı-kusma %75; &lt;4 yaşta makrosefali %41</a:t>
+              <a:t>Beyin tümörlü çocukların yarıdan fazlasında KİBAS bulgusu yok; posterior fossada bulantı-kusma %75; &lt;4 yaşta makrosefali %41</a:t>
             </a:r>
             <a:r>
               <a:rPr lang="en-US" sz="2200" baseline="30000" dirty="0">
@@ -6515,7 +6515,7 @@
                   <a:schemeClr val="accent4"/>
                 </a:solidFill>
               </a:rPr>
-              <a:t>[25]</a:t>
+              <a:t>⁠[25]</a:t>
             </a:r>
             <a:endParaRPr lang="en-US" sz="2200" dirty="0"/>
           </a:p>
@@ -6533,7 +6533,7 @@
                   <a:schemeClr val="tx1"/>
                 </a:solidFill>
               </a:rPr>
-              <a:t>Sato varyantı: atakta hipertansiyon, hiponatremi</a:t>
+              <a:t>Sato varyantı: atakta hipertansiyon, hiponatremi</a:t>
             </a:r>
             <a:r>
               <a:rPr lang="en-US" sz="2200" baseline="30000" dirty="0">
@@ -6541,7 +6541,7 @@
                   <a:schemeClr val="accent4"/>
                 </a:solidFill>
               </a:rPr>
-              <a:t>[26]</a:t>
+              <a:t>⁠[26]</a:t>
             </a:r>
             <a:endParaRPr lang="en-US" sz="2200" dirty="0"/>
           </a:p>
@@ -6559,7 +6559,7 @@
                   <a:schemeClr val="tx1"/>
                 </a:solidFill>
               </a:rPr>
-              <a:t>Hiperpigmentasyon: X'e bağlı adrenal hipoplazide %90</a:t>
+              <a:t>Hiperpigmentasyon: X'e bağlı adrenal hipoplazide %90</a:t>
             </a:r>
             <a:r>
               <a:rPr lang="en-US" sz="2200" baseline="30000" dirty="0">
@@ -6567,7 +6567,7 @@
                   <a:schemeClr val="accent4"/>
                 </a:solidFill>
               </a:rPr>
-              <a:t>[27]</a:t>
+              <a:t>⁠[27]</a:t>
             </a:r>
             <a:endParaRPr lang="en-US" sz="2200" dirty="0"/>
           </a:p>
@@ -6585,7 +6585,7 @@
                   <a:schemeClr val="tx1"/>
                 </a:solidFill>
               </a:rPr>
-              <a:t>32 SKS'li çocuğun 12'si organik neden olmadan düşük kilolu</a:t>
+              <a:t>32 SKS'li çocuğun 12'si organik neden olmadan düşük kilolu</a:t>
             </a:r>
             <a:r>
               <a:rPr lang="en-US" sz="2200" baseline="30000" dirty="0">
@@ -6593,7 +6593,7 @@
                   <a:schemeClr val="accent4"/>
                 </a:solidFill>
               </a:rPr>
-              <a:t>[28]</a:t>
+              <a:t>⁠[28]</a:t>
             </a:r>
             <a:endParaRPr lang="en-US" sz="2200" dirty="0"/>
           </a:p>
@@ -6706,7 +6706,7 @@
         </p:nvSpPr>
         <p:spPr>
           <a:xfrm>
-            <a:off x="548640" y="6382512"/>
+            <a:off x="548640" y="6272784"/>
             <a:ext cx="10241280" cy="274320"/>
           </a:xfrm>
           <a:prstGeom prst="rect">
@@ -6723,14 +6723,14 @@
               <a:buNone/>
             </a:pPr>
             <a:r>
-              <a:rPr lang="en-US" sz="1000" dirty="0">
+              <a:rPr lang="en-US" sz="1100" dirty="0">
                 <a:solidFill>
                   <a:schemeClr val="accent4"/>
                 </a:solidFill>
               </a:rPr>
               <a:t>Kaynak no: 25–28 · tam liste sondaki kaynak slaytlarında</a:t>
             </a:r>
-            <a:endParaRPr lang="en-US" sz="1000" dirty="0"/>
+            <a:endParaRPr lang="en-US" sz="1100" dirty="0"/>
           </a:p>
         </p:txBody>
       </p:sp>
@@ -6746,7 +6746,7 @@
         </p:nvSpPr>
         <p:spPr>
           <a:xfrm>
-            <a:off x="11109960" y="6382512"/>
+            <a:off x="11109960" y="6272784"/>
             <a:ext cx="548640" cy="274320"/>
           </a:xfrm>
           <a:prstGeom prst="rect">
@@ -6762,7 +6762,7 @@
           <a:bodyPr/>
           <a:lstStyle>
             <a:lvl1pPr>
-              <a:defRPr sz="1000">
+              <a:defRPr sz="1100">
                 <a:solidFill>
                   <a:srgbClr val="5B6B73"/>
                 </a:solidFill>
@@ -6814,7 +6814,7 @@
         </p:nvSpPr>
         <p:spPr>
           <a:xfrm>
-            <a:off x="548640" y="228600"/>
+            <a:off x="548640" y="365760"/>
             <a:ext cx="8229600" cy="292608"/>
           </a:xfrm>
           <a:prstGeom prst="rect">
@@ -6852,7 +6852,7 @@
         </p:nvSpPr>
         <p:spPr>
           <a:xfrm>
-            <a:off x="548640" y="530352"/>
+            <a:off x="548640" y="640080"/>
             <a:ext cx="11091672" cy="914400"/>
           </a:xfrm>
           <a:prstGeom prst="rect">
@@ -7106,7 +7106,7 @@
                             <a:schemeClr val="tx1"/>
                           </a:solidFill>
                         </a:rPr>
-                        <a:t>NASPGHAN 2008</a:t>
+                        <a:t>NASPGHAN 2008</a:t>
                       </a:r>
                       <a:r>
                         <a:rPr lang="en-US" sz="1900" baseline="30000" dirty="0">
@@ -7114,7 +7114,7 @@
                             <a:schemeClr val="accent4"/>
                           </a:solidFill>
                         </a:rPr>
-                        <a:t>[12]</a:t>
+                        <a:t>⁠[12]</a:t>
                       </a:r>
                       <a:endParaRPr lang="en-US" sz="1200" dirty="0"/>
                     </a:p>
@@ -7238,7 +7238,7 @@
                             <a:schemeClr val="tx1"/>
                           </a:solidFill>
                         </a:rPr>
-                        <a:t>NASPGHAN 2008</a:t>
+                        <a:t>NASPGHAN 2008</a:t>
                       </a:r>
                       <a:r>
                         <a:rPr lang="en-US" sz="1900" baseline="30000" dirty="0">
@@ -7246,7 +7246,7 @@
                             <a:schemeClr val="accent4"/>
                           </a:solidFill>
                         </a:rPr>
-                        <a:t>[12]</a:t>
+                        <a:t>⁠[12]</a:t>
                       </a:r>
                       <a:endParaRPr lang="en-US" sz="1200" dirty="0"/>
                     </a:p>
@@ -7370,7 +7370,7 @@
                             <a:schemeClr val="tx1"/>
                           </a:solidFill>
                         </a:rPr>
-                        <a:t>NASPGHAN 2008</a:t>
+                        <a:t>NASPGHAN 2008</a:t>
                       </a:r>
                       <a:r>
                         <a:rPr lang="en-US" sz="1900" baseline="30000" dirty="0">
@@ -7378,7 +7378,7 @@
                             <a:schemeClr val="accent4"/>
                           </a:solidFill>
                         </a:rPr>
-                        <a:t>[12]</a:t>
+                        <a:t>⁠[12]</a:t>
                       </a:r>
                       <a:endParaRPr lang="en-US" sz="1200" dirty="0"/>
                     </a:p>
@@ -7502,7 +7502,7 @@
                             <a:schemeClr val="tx1"/>
                           </a:solidFill>
                         </a:rPr>
-                        <a:t>NASPGHAN 2008</a:t>
+                        <a:t>NASPGHAN 2008</a:t>
                       </a:r>
                       <a:r>
                         <a:rPr lang="en-US" sz="1900" baseline="30000" dirty="0">
@@ -7510,7 +7510,7 @@
                             <a:schemeClr val="accent4"/>
                           </a:solidFill>
                         </a:rPr>
-                        <a:t>[12]</a:t>
+                        <a:t>⁠[12]</a:t>
                       </a:r>
                       <a:endParaRPr lang="en-US" sz="1200" dirty="0"/>
                     </a:p>
@@ -7573,7 +7573,7 @@
                             <a:schemeClr val="tx1"/>
                           </a:solidFill>
                         </a:rPr>
-                        <a:t>Hepatomegali; 2 ayda standart tedaviye yanıtsızlık</a:t>
+                        <a:t>Hepatomegali; 2 ayda standart tedaviye yanıtsızlık</a:t>
                       </a:r>
                       <a:endParaRPr lang="en-US" sz="1200" dirty="0"/>
                     </a:p>
@@ -7634,7 +7634,7 @@
                             <a:schemeClr val="tx1"/>
                           </a:solidFill>
                         </a:rPr>
-                        <a:t>Rome V</a:t>
+                        <a:t>Rome V</a:t>
                       </a:r>
                       <a:r>
                         <a:rPr lang="en-US" sz="1900" baseline="30000" dirty="0">
@@ -7642,7 +7642,7 @@
                             <a:schemeClr val="accent4"/>
                           </a:solidFill>
                         </a:rPr>
-                        <a:t>[8]</a:t>
+                        <a:t>⁠[8]</a:t>
                       </a:r>
                       <a:endParaRPr lang="en-US" sz="1200" dirty="0"/>
                     </a:p>
@@ -7766,7 +7766,7 @@
                             <a:schemeClr val="tx1"/>
                           </a:solidFill>
                         </a:rPr>
-                        <a:t>Raucci 2020</a:t>
+                        <a:t>Raucci 2020</a:t>
                       </a:r>
                       <a:r>
                         <a:rPr lang="en-US" sz="1900" baseline="30000" dirty="0">
@@ -7774,7 +7774,7 @@
                             <a:schemeClr val="accent4"/>
                           </a:solidFill>
                         </a:rPr>
-                        <a:t>[23]</a:t>
+                        <a:t>⁠[23]</a:t>
                       </a:r>
                       <a:endParaRPr lang="en-US" sz="1200" dirty="0"/>
                     </a:p>
@@ -7856,7 +7856,7 @@
                   <a:schemeClr val="accent4"/>
                 </a:solidFill>
               </a:rPr>
-              <a:t>NASPGHAN 2025 güncel algoritması tam metinden doğrulanmadı.</a:t>
+              <a:t>NASPGHAN 2025 güncel algoritması tam metinden doğrulanmadı.</a:t>
             </a:r>
             <a:endParaRPr lang="en-US" sz="1100" dirty="0"/>
           </a:p>
@@ -7872,7 +7872,7 @@
         </p:nvSpPr>
         <p:spPr>
           <a:xfrm>
-            <a:off x="548640" y="6382512"/>
+            <a:off x="548640" y="6272784"/>
             <a:ext cx="10241280" cy="274320"/>
           </a:xfrm>
           <a:prstGeom prst="rect">
@@ -7889,14 +7889,14 @@
               <a:buNone/>
             </a:pPr>
             <a:r>
-              <a:rPr lang="en-US" sz="1000" dirty="0">
+              <a:rPr lang="en-US" sz="1100" dirty="0">
                 <a:solidFill>
                   <a:schemeClr val="accent4"/>
                 </a:solidFill>
               </a:rPr>
               <a:t>Kaynak no: 8,12,23 · tam liste sondaki kaynak slaytlarında</a:t>
             </a:r>
-            <a:endParaRPr lang="en-US" sz="1000" dirty="0"/>
+            <a:endParaRPr lang="en-US" sz="1100" dirty="0"/>
           </a:p>
         </p:txBody>
       </p:sp>
@@ -7912,7 +7912,7 @@
         </p:nvSpPr>
         <p:spPr>
           <a:xfrm>
-            <a:off x="11109960" y="6382512"/>
+            <a:off x="11109960" y="6272784"/>
             <a:ext cx="548640" cy="274320"/>
           </a:xfrm>
           <a:prstGeom prst="rect">
@@ -7928,7 +7928,7 @@
           <a:bodyPr/>
           <a:lstStyle>
             <a:lvl1pPr>
-              <a:defRPr sz="1000">
+              <a:defRPr sz="1100">
                 <a:solidFill>
                   <a:srgbClr val="5B6B73"/>
                 </a:solidFill>
@@ -7980,7 +7980,7 @@
         </p:nvSpPr>
         <p:spPr>
           <a:xfrm>
-            <a:off x="548640" y="228600"/>
+            <a:off x="548640" y="365760"/>
             <a:ext cx="8229600" cy="292608"/>
           </a:xfrm>
           <a:prstGeom prst="rect">
@@ -8018,7 +8018,7 @@
         </p:nvSpPr>
         <p:spPr>
           <a:xfrm>
-            <a:off x="548640" y="530352"/>
+            <a:off x="548640" y="640080"/>
             <a:ext cx="11091672" cy="914400"/>
           </a:xfrm>
           <a:prstGeom prst="rect">
@@ -8040,7 +8040,21 @@
                   <a:schemeClr val="tx1"/>
                 </a:solidFill>
               </a:rPr>
-              <a:t>Kırmızı bayrak yokluğu güvence değildir; ama bu kanıt kusmaya özgü değil</a:t>
+              <a:t>Kırmızı bayrak yokluğu güvence değildir;</a:t>
+            </a:r>
+            <a:endParaRPr lang="en-US" sz="2600" dirty="0"/>
+          </a:p>
+          <a:p>
+            <a:pPr algn="l" indent="0" marL="0">
+              <a:buNone/>
+            </a:pPr>
+            <a:r>
+              <a:rPr lang="en-US" sz="2600" b="1" dirty="0">
+                <a:solidFill>
+                  <a:schemeClr val="tx1"/>
+                </a:solidFill>
+              </a:rPr>
+              <a:t>ama bu kanıt kusmaya özgü değil</a:t>
             </a:r>
             <a:endParaRPr lang="en-US" sz="2600" dirty="0"/>
           </a:p>
@@ -8080,7 +8094,7 @@
                   <a:schemeClr val="tx1"/>
                 </a:solidFill>
               </a:rPr>
-              <a:t>DGBI şüpheli 500 çocuk (çoğu karın ağrısı/kabızlık): %45'inde bayrak, %19'unda organik tanı (çoğu GÖRH/peptik)</a:t>
+              <a:t>DGBI şüpheli 500 çocuk (çoğu karın ağrısı/kabızlık): %45'inde bayrak, %19'unda organik tanı (çoğu GÖRH/peptik)</a:t>
             </a:r>
             <a:r>
               <a:rPr lang="en-US" sz="2200" baseline="30000" dirty="0">
@@ -8088,7 +8102,7 @@
                   <a:schemeClr val="accent4"/>
                 </a:solidFill>
               </a:rPr>
-              <a:t>[29]</a:t>
+              <a:t>⁠[29]</a:t>
             </a:r>
             <a:endParaRPr lang="en-US" sz="2200" dirty="0"/>
           </a:p>
@@ -8106,7 +8120,7 @@
                   <a:schemeClr val="tx1"/>
                 </a:solidFill>
               </a:rPr>
-              <a:t>Organik tanılıların %38'inde başlangıçta bayrak yoktu</a:t>
+              <a:t>Organik tanılıların %38'inde başlangıçta bayrak yoktu</a:t>
             </a:r>
             <a:r>
               <a:rPr lang="en-US" sz="2200" baseline="30000" dirty="0">
@@ -8114,7 +8128,7 @@
                   <a:schemeClr val="accent4"/>
                 </a:solidFill>
               </a:rPr>
-              <a:t>[29]</a:t>
+              <a:t>⁠[29]</a:t>
             </a:r>
             <a:endParaRPr lang="en-US" sz="2200" dirty="0"/>
           </a:p>
@@ -8132,7 +8146,7 @@
                   <a:schemeClr val="tx1"/>
                 </a:solidFill>
               </a:rPr>
-              <a:t>Hiçbir tek test yeterli değil; en iyi model AUC 0,711</a:t>
+              <a:t>Hiçbir tek test yeterli değil; en iyi model AUC 0,711</a:t>
             </a:r>
             <a:r>
               <a:rPr lang="en-US" sz="2200" baseline="30000" dirty="0">
@@ -8140,7 +8154,7 @@
                   <a:schemeClr val="accent4"/>
                 </a:solidFill>
               </a:rPr>
-              <a:t>[29]</a:t>
+              <a:t>⁠[29]</a:t>
             </a:r>
             <a:endParaRPr lang="en-US" sz="2200" dirty="0"/>
           </a:p>
@@ -8289,7 +8303,7 @@
         </p:nvSpPr>
         <p:spPr>
           <a:xfrm>
-            <a:off x="548640" y="6382512"/>
+            <a:off x="548640" y="6272784"/>
             <a:ext cx="10241280" cy="274320"/>
           </a:xfrm>
           <a:prstGeom prst="rect">
@@ -8306,14 +8320,14 @@
               <a:buNone/>
             </a:pPr>
             <a:r>
-              <a:rPr lang="en-US" sz="1000" dirty="0">
+              <a:rPr lang="en-US" sz="1100" dirty="0">
                 <a:solidFill>
                   <a:schemeClr val="accent4"/>
                 </a:solidFill>
               </a:rPr>
               <a:t>Kaynak no: 29 · tam liste sondaki kaynak slaytlarında</a:t>
             </a:r>
-            <a:endParaRPr lang="en-US" sz="1000" dirty="0"/>
+            <a:endParaRPr lang="en-US" sz="1100" dirty="0"/>
           </a:p>
         </p:txBody>
       </p:sp>
@@ -8329,7 +8343,7 @@
         </p:nvSpPr>
         <p:spPr>
           <a:xfrm>
-            <a:off x="11109960" y="6382512"/>
+            <a:off x="11109960" y="6272784"/>
             <a:ext cx="548640" cy="274320"/>
           </a:xfrm>
           <a:prstGeom prst="rect">
@@ -8345,7 +8359,7 @@
           <a:bodyPr/>
           <a:lstStyle>
             <a:lvl1pPr>
-              <a:defRPr sz="1000">
+              <a:defRPr sz="1100">
                 <a:solidFill>
                   <a:srgbClr val="5B6B73"/>
                 </a:solidFill>
@@ -8397,7 +8411,7 @@
         </p:nvSpPr>
         <p:spPr>
           <a:xfrm>
-            <a:off x="548640" y="228600"/>
+            <a:off x="548640" y="365760"/>
             <a:ext cx="8229600" cy="292608"/>
           </a:xfrm>
           <a:prstGeom prst="rect">
@@ -8435,7 +8449,7 @@
         </p:nvSpPr>
         <p:spPr>
           <a:xfrm>
-            <a:off x="548640" y="530352"/>
+            <a:off x="548640" y="640080"/>
             <a:ext cx="11091672" cy="914400"/>
           </a:xfrm>
           <a:prstGeom prst="rect">
@@ -8457,7 +8471,21 @@
                   <a:schemeClr val="tx1"/>
                 </a:solidFill>
               </a:rPr>
-              <a:t>Psikososyal değerlendirme tanı koydurmaz; hastalık yükünü ve yatışları belirler</a:t>
+              <a:t>Psikososyal değerlendirme tanı koydurmaz;</a:t>
+            </a:r>
+            <a:endParaRPr lang="en-US" sz="2600" dirty="0"/>
+          </a:p>
+          <a:p>
+            <a:pPr algn="l" indent="0" marL="0">
+              <a:buNone/>
+            </a:pPr>
+            <a:r>
+              <a:rPr lang="en-US" sz="2600" b="1" dirty="0">
+                <a:solidFill>
+                  <a:schemeClr val="tx1"/>
+                </a:solidFill>
+              </a:rPr>
+              <a:t>hastalık yükünü ve yatışları belirler</a:t>
             </a:r>
             <a:endParaRPr lang="en-US" sz="2600" dirty="0"/>
           </a:p>
@@ -8497,7 +8525,7 @@
                   <a:schemeClr val="tx1"/>
                 </a:solidFill>
               </a:rPr>
-              <a:t>SKS'de anksiyete %15–59 (ölçüm aracı ve yaşa göre)</a:t>
+              <a:t>SKS'de anksiyete %15–⁠59 (ölçüm aracı ve yaşa göre)</a:t>
             </a:r>
             <a:r>
               <a:rPr lang="en-US" sz="2200" baseline="30000" dirty="0">
@@ -8505,7 +8533,7 @@
                   <a:schemeClr val="accent4"/>
                 </a:solidFill>
               </a:rPr>
-              <a:t>[26,30]</a:t>
+              <a:t>⁠[26,30]</a:t>
             </a:r>
             <a:endParaRPr lang="en-US" sz="2200" dirty="0"/>
           </a:p>
@@ -8523,7 +8551,7 @@
                   <a:schemeClr val="tx1"/>
                 </a:solidFill>
               </a:rPr>
-              <a:t>SKS'li çocukların yaşam kalitesi organik GİS hastalığı olanlardan farksız</a:t>
+              <a:t>SKS'li çocukların yaşam kalitesi organik GİS hastalığı olanlardan farksız</a:t>
             </a:r>
             <a:r>
               <a:rPr lang="en-US" sz="2200" baseline="30000" dirty="0">
@@ -8531,7 +8559,7 @@
                   <a:schemeClr val="accent4"/>
                 </a:solidFill>
               </a:rPr>
-              <a:t>[31]</a:t>
+              <a:t>⁠[31]</a:t>
             </a:r>
             <a:endParaRPr lang="en-US" sz="2200" dirty="0"/>
           </a:p>
@@ -8549,7 +8577,7 @@
                   <a:schemeClr val="tx1"/>
                 </a:solidFill>
               </a:rPr>
-              <a:t>Anksiyete 90 günlük tekrar yatışla ilişkili (n=1370; tekrar yatış %28,5)</a:t>
+              <a:t>Anksiyete 90 günlük tekrar yatışla ilişkili (n=1370; tekrar yatış %28,5)</a:t>
             </a:r>
             <a:r>
               <a:rPr lang="en-US" sz="2200" baseline="30000" dirty="0">
@@ -8557,7 +8585,7 @@
                   <a:schemeClr val="accent4"/>
                 </a:solidFill>
               </a:rPr>
-              <a:t>[32]</a:t>
+              <a:t>⁠[32]</a:t>
             </a:r>
             <a:endParaRPr lang="en-US" sz="2200" dirty="0"/>
           </a:p>
@@ -8575,7 +8603,7 @@
                   <a:schemeClr val="tx1"/>
                 </a:solidFill>
               </a:rPr>
-              <a:t>Psikososyal bulgu organik/fonksiyonel ayırmaz (karın ağrısı verisi)</a:t>
+              <a:t>Psikososyal bulgu organik/fonksiyonel ayırmaz (karın ağrısı verisi)</a:t>
             </a:r>
             <a:r>
               <a:rPr lang="en-US" sz="2200" baseline="30000" dirty="0">
@@ -8583,7 +8611,7 @@
                   <a:schemeClr val="accent4"/>
                 </a:solidFill>
               </a:rPr>
-              <a:t>[33]</a:t>
+              <a:t>⁠[33]</a:t>
             </a:r>
             <a:endParaRPr lang="en-US" sz="2200" dirty="0"/>
           </a:p>
@@ -8696,7 +8724,7 @@
         </p:nvSpPr>
         <p:spPr>
           <a:xfrm>
-            <a:off x="548640" y="6382512"/>
+            <a:off x="548640" y="6272784"/>
             <a:ext cx="10241280" cy="274320"/>
           </a:xfrm>
           <a:prstGeom prst="rect">
@@ -8713,14 +8741,14 @@
               <a:buNone/>
             </a:pPr>
             <a:r>
-              <a:rPr lang="en-US" sz="1000" dirty="0">
+              <a:rPr lang="en-US" sz="1100" dirty="0">
                 <a:solidFill>
                   <a:schemeClr val="accent4"/>
                 </a:solidFill>
               </a:rPr>
               <a:t>Kaynak no: 26,30–33 · tam liste sondaki kaynak slaytlarında</a:t>
             </a:r>
-            <a:endParaRPr lang="en-US" sz="1000" dirty="0"/>
+            <a:endParaRPr lang="en-US" sz="1100" dirty="0"/>
           </a:p>
         </p:txBody>
       </p:sp>
@@ -8736,7 +8764,7 @@
         </p:nvSpPr>
         <p:spPr>
           <a:xfrm>
-            <a:off x="11109960" y="6382512"/>
+            <a:off x="11109960" y="6272784"/>
             <a:ext cx="548640" cy="274320"/>
           </a:xfrm>
           <a:prstGeom prst="rect">
@@ -8752,7 +8780,7 @@
           <a:bodyPr/>
           <a:lstStyle>
             <a:lvl1pPr>
-              <a:defRPr sz="1000">
+              <a:defRPr sz="1100">
                 <a:solidFill>
                   <a:srgbClr val="5B6B73"/>
                 </a:solidFill>
@@ -8804,7 +8832,7 @@
         </p:nvSpPr>
         <p:spPr>
           <a:xfrm>
-            <a:off x="548640" y="228600"/>
+            <a:off x="548640" y="365760"/>
             <a:ext cx="8229600" cy="292608"/>
           </a:xfrm>
           <a:prstGeom prst="rect">
@@ -8842,7 +8870,7 @@
         </p:nvSpPr>
         <p:spPr>
           <a:xfrm>
-            <a:off x="548640" y="530352"/>
+            <a:off x="548640" y="640080"/>
             <a:ext cx="11091672" cy="914400"/>
           </a:xfrm>
           <a:prstGeom prst="rect">
@@ -8864,7 +8892,21 @@
                   <a:schemeClr val="tx1"/>
                 </a:solidFill>
               </a:rPr>
-              <a:t>Safra yokluğu güvence vermez: malrotasyon her yaşta, volvulus her an</a:t>
+              <a:t>Safra yokluğu güvence vermez:</a:t>
+            </a:r>
+            <a:endParaRPr lang="en-US" sz="2600" dirty="0"/>
+          </a:p>
+          <a:p>
+            <a:pPr algn="l" indent="0" marL="0">
+              <a:buNone/>
+            </a:pPr>
+            <a:r>
+              <a:rPr lang="en-US" sz="2600" b="1" dirty="0">
+                <a:solidFill>
+                  <a:schemeClr val="tx1"/>
+                </a:solidFill>
+              </a:rPr>
+              <a:t>malrotasyon her yaşta, volvulus her an</a:t>
             </a:r>
             <a:endParaRPr lang="en-US" sz="2600" dirty="0"/>
           </a:p>
@@ -8904,7 +8946,7 @@
                   <a:schemeClr val="tx1"/>
                 </a:solidFill>
               </a:rPr>
-              <a:t>Safralı kusma her yaşta aksi kanıtlanana dek obstrüksiyondur</a:t>
+              <a:t>Safralı kusma her yaşta aksi kanıtlanana dek obstrüksiyondur</a:t>
             </a:r>
             <a:r>
               <a:rPr lang="en-US" sz="2200" baseline="30000" dirty="0">
@@ -8912,7 +8954,7 @@
                   <a:schemeClr val="accent4"/>
                 </a:solidFill>
               </a:rPr>
-              <a:t>[22]</a:t>
+              <a:t>⁠[22]</a:t>
             </a:r>
             <a:endParaRPr lang="en-US" sz="2200" dirty="0"/>
           </a:p>
@@ -8930,7 +8972,7 @@
                   <a:schemeClr val="tx1"/>
                 </a:solidFill>
               </a:rPr>
-              <a:t>70 malrotasyonlu çocuğun yarısı &gt;2 aylık; büyüklerde aralıklı safrasız kusma; volvulus yaş ve süreden bağımsız</a:t>
+              <a:t>70 malrotasyonlu çocuğun yarısı &gt;2 aylık; büyüklerde aralıklı safrasız kusma; volvulus yaş ve süreden bağımsız</a:t>
             </a:r>
             <a:r>
               <a:rPr lang="en-US" sz="2200" baseline="30000" dirty="0">
@@ -8938,7 +8980,7 @@
                   <a:schemeClr val="accent4"/>
                 </a:solidFill>
               </a:rPr>
-              <a:t>[34]</a:t>
+              <a:t>⁠[34]</a:t>
             </a:r>
             <a:endParaRPr lang="en-US" sz="2200" dirty="0"/>
           </a:p>
@@ -8956,7 +8998,7 @@
                   <a:schemeClr val="tx1"/>
                 </a:solidFill>
               </a:rPr>
-              <a:t>Üst GİS grafisinde rotasyon yalancı pozitif/negatif sonuç verebilir</a:t>
+              <a:t>Üst GİS grafisinde rotasyon yalancı pozitif/negatif sonuç verebilir</a:t>
             </a:r>
             <a:r>
               <a:rPr lang="en-US" sz="2200" baseline="30000" dirty="0">
@@ -8964,7 +9006,7 @@
                   <a:schemeClr val="accent4"/>
                 </a:solidFill>
               </a:rPr>
-              <a:t>[35]</a:t>
+              <a:t>⁠[35]</a:t>
             </a:r>
             <a:endParaRPr lang="en-US" sz="2200" dirty="0"/>
           </a:p>
@@ -9062,7 +9104,7 @@
         </p:nvSpPr>
         <p:spPr>
           <a:xfrm>
-            <a:off x="548640" y="6382512"/>
+            <a:off x="548640" y="6272784"/>
             <a:ext cx="10241280" cy="274320"/>
           </a:xfrm>
           <a:prstGeom prst="rect">
@@ -9079,14 +9121,14 @@
               <a:buNone/>
             </a:pPr>
             <a:r>
-              <a:rPr lang="en-US" sz="1000" dirty="0">
+              <a:rPr lang="en-US" sz="1100" dirty="0">
                 <a:solidFill>
                   <a:schemeClr val="accent4"/>
                 </a:solidFill>
               </a:rPr>
               <a:t>Kaynak no: 22,34,35 · tam liste sondaki kaynak slaytlarında</a:t>
             </a:r>
-            <a:endParaRPr lang="en-US" sz="1000" dirty="0"/>
+            <a:endParaRPr lang="en-US" sz="1100" dirty="0"/>
           </a:p>
         </p:txBody>
       </p:sp>
@@ -9102,7 +9144,7 @@
         </p:nvSpPr>
         <p:spPr>
           <a:xfrm>
-            <a:off x="11109960" y="6382512"/>
+            <a:off x="11109960" y="6272784"/>
             <a:ext cx="548640" cy="274320"/>
           </a:xfrm>
           <a:prstGeom prst="rect">
@@ -9118,7 +9160,7 @@
           <a:bodyPr/>
           <a:lstStyle>
             <a:lvl1pPr>
-              <a:defRPr sz="1000">
+              <a:defRPr sz="1100">
                 <a:solidFill>
                   <a:srgbClr val="5B6B73"/>
                 </a:solidFill>
@@ -9170,7 +9212,7 @@
         </p:nvSpPr>
         <p:spPr>
           <a:xfrm>
-            <a:off x="548640" y="228600"/>
+            <a:off x="548640" y="365760"/>
             <a:ext cx="8229600" cy="292608"/>
           </a:xfrm>
           <a:prstGeom prst="rect">
@@ -9208,7 +9250,7 @@
         </p:nvSpPr>
         <p:spPr>
           <a:xfrm>
-            <a:off x="548640" y="530352"/>
+            <a:off x="548640" y="640080"/>
             <a:ext cx="11091672" cy="914400"/>
           </a:xfrm>
           <a:prstGeom prst="rect">
@@ -9270,7 +9312,7 @@
                   <a:schemeClr val="tx1"/>
                 </a:solidFill>
               </a:rPr>
-              <a:t>SMA sendromu (n=22): kusma %50; kilo kaybı şart değil; tanı %82 üst GİS grafisiyle</a:t>
+              <a:t>SMA sendromu (n=22): kusma %50; kilo kaybı şart değil; tanı %82 üst GİS grafisiyle</a:t>
             </a:r>
             <a:r>
               <a:rPr lang="en-US" sz="2200" baseline="30000" dirty="0">
@@ -9278,7 +9320,7 @@
                   <a:schemeClr val="accent4"/>
                 </a:solidFill>
               </a:rPr>
-              <a:t>[36]</a:t>
+              <a:t>⁠[36]</a:t>
             </a:r>
             <a:endParaRPr lang="en-US" sz="2200" dirty="0"/>
           </a:p>
@@ -9296,7 +9338,7 @@
                   <a:schemeClr val="tx1"/>
                 </a:solidFill>
               </a:rPr>
-              <a:t>Duplikasyon (n=72): ağrı 57/72, bulantı-kusma; USG ile değerlendirilir</a:t>
+              <a:t>Duplikasyon (n=72): ağrı 57/72, bulantı-kusma; USG ile değerlendirilir</a:t>
             </a:r>
             <a:r>
               <a:rPr lang="en-US" sz="2200" baseline="30000" dirty="0">
@@ -9304,7 +9346,7 @@
                   <a:schemeClr val="accent4"/>
                 </a:solidFill>
               </a:rPr>
-              <a:t>[37]</a:t>
+              <a:t>⁠[37]</a:t>
             </a:r>
             <a:endParaRPr lang="en-US" sz="2200" dirty="0"/>
           </a:p>
@@ -9322,7 +9364,7 @@
                   <a:schemeClr val="tx1"/>
                 </a:solidFill>
               </a:rPr>
-              <a:t>Akalazya (n=126): disfaji %73,8, kusma %53,2, kilo kaybı %38,9</a:t>
+              <a:t>Akalazya (n=126): disfaji %73,8, kusma %53,2, kilo kaybı %38,9</a:t>
             </a:r>
             <a:r>
               <a:rPr lang="en-US" sz="2200" baseline="30000" dirty="0">
@@ -9330,7 +9372,7 @@
                   <a:schemeClr val="accent4"/>
                 </a:solidFill>
               </a:rPr>
-              <a:t>[9]</a:t>
+              <a:t>⁠[9]</a:t>
             </a:r>
             <a:endParaRPr lang="en-US" sz="2200" dirty="0"/>
           </a:p>
@@ -9346,7 +9388,7 @@
         </p:nvSpPr>
         <p:spPr>
           <a:xfrm>
-            <a:off x="548640" y="6382512"/>
+            <a:off x="548640" y="6272784"/>
             <a:ext cx="10241280" cy="274320"/>
           </a:xfrm>
           <a:prstGeom prst="rect">
@@ -9363,14 +9405,14 @@
               <a:buNone/>
             </a:pPr>
             <a:r>
-              <a:rPr lang="en-US" sz="1000" dirty="0">
+              <a:rPr lang="en-US" sz="1100" dirty="0">
                 <a:solidFill>
                   <a:schemeClr val="accent4"/>
                 </a:solidFill>
               </a:rPr>
               <a:t>Kaynak no: 9,36,37 · tam liste sondaki kaynak slaytlarında</a:t>
             </a:r>
-            <a:endParaRPr lang="en-US" sz="1000" dirty="0"/>
+            <a:endParaRPr lang="en-US" sz="1100" dirty="0"/>
           </a:p>
         </p:txBody>
       </p:sp>
@@ -9677,7 +9719,7 @@
         </p:nvSpPr>
         <p:spPr>
           <a:xfrm>
-            <a:off x="11109960" y="6382512"/>
+            <a:off x="11109960" y="6272784"/>
             <a:ext cx="548640" cy="274320"/>
           </a:xfrm>
           <a:prstGeom prst="rect">
@@ -9693,7 +9735,7 @@
           <a:bodyPr/>
           <a:lstStyle>
             <a:lvl1pPr>
-              <a:defRPr sz="1000">
+              <a:defRPr sz="1100">
                 <a:solidFill>
                   <a:srgbClr val="5B6B73"/>
                 </a:solidFill>
@@ -9745,7 +9787,7 @@
         </p:nvSpPr>
         <p:spPr>
           <a:xfrm>
-            <a:off x="548640" y="228600"/>
+            <a:off x="548640" y="365760"/>
             <a:ext cx="8229600" cy="292608"/>
           </a:xfrm>
           <a:prstGeom prst="rect">
@@ -9783,7 +9825,7 @@
         </p:nvSpPr>
         <p:spPr>
           <a:xfrm>
-            <a:off x="548640" y="530352"/>
+            <a:off x="548640" y="640080"/>
             <a:ext cx="11091672" cy="914400"/>
           </a:xfrm>
           <a:prstGeom prst="rect">
@@ -9845,7 +9887,7 @@
                   <a:schemeClr val="tx1"/>
                 </a:solidFill>
               </a:rPr>
-              <a:t>EoE: kusmayla başvurabilir; mukoza normal görünse de ≥2 seviyeden çoklu biyopsi</a:t>
+              <a:t>EoE: kusmayla başvurabilir; mukoza normal görünse de ≥2 seviyeden çoklu biyopsi</a:t>
             </a:r>
             <a:r>
               <a:rPr lang="en-US" sz="2200" baseline="30000" dirty="0">
@@ -9853,7 +9895,7 @@
                   <a:schemeClr val="accent4"/>
                 </a:solidFill>
               </a:rPr>
-              <a:t>[38]</a:t>
+              <a:t>⁠[38]</a:t>
             </a:r>
             <a:endParaRPr lang="en-US" sz="2200" dirty="0"/>
           </a:p>
@@ -9871,7 +9913,7 @@
                   <a:schemeClr val="tx1"/>
                 </a:solidFill>
               </a:rPr>
-              <a:t>Çölyak: kusmada seroloji önerisi derleme düzeyinde</a:t>
+              <a:t>Çölyak: kusmada seroloji önerisi derleme düzeyinde</a:t>
             </a:r>
             <a:r>
               <a:rPr lang="en-US" sz="2200" baseline="30000" dirty="0">
@@ -9879,7 +9921,7 @@
                   <a:schemeClr val="accent4"/>
                 </a:solidFill>
               </a:rPr>
-              <a:t>[39]</a:t>
+              <a:t>⁠[39]</a:t>
             </a:r>
             <a:r>
               <a:rPr lang="en-US" sz="2200" dirty="0">
@@ -9887,7 +9929,7 @@
                   <a:schemeClr val="tx1"/>
                 </a:solidFill>
               </a:rPr>
-              <a:t>; total IgA + TGA-IgA</a:t>
+              <a:t>; total IgA + TGA-IgA</a:t>
             </a:r>
             <a:r>
               <a:rPr lang="en-US" sz="2200" baseline="30000" dirty="0">
@@ -9895,7 +9937,7 @@
                   <a:schemeClr val="accent4"/>
                 </a:solidFill>
               </a:rPr>
-              <a:t>[40]</a:t>
+              <a:t>⁠[40]</a:t>
             </a:r>
             <a:endParaRPr lang="en-US" sz="2200" dirty="0"/>
           </a:p>
@@ -9913,7 +9955,7 @@
                   <a:schemeClr val="tx1"/>
                 </a:solidFill>
               </a:rPr>
-              <a:t>H. pylori: tanı duyarlılık testli invaziv yöntemle</a:t>
+              <a:t>H. pylori: tanı duyarlılık testli invaziv yöntemle</a:t>
             </a:r>
             <a:r>
               <a:rPr lang="en-US" sz="2200" baseline="30000" dirty="0">
@@ -9921,7 +9963,7 @@
                   <a:schemeClr val="accent4"/>
                 </a:solidFill>
               </a:rPr>
-              <a:t>[41]</a:t>
+              <a:t>⁠[41]</a:t>
             </a:r>
             <a:endParaRPr lang="en-US" sz="2200" dirty="0"/>
           </a:p>
@@ -9939,7 +9981,7 @@
                   <a:schemeClr val="tx1"/>
                 </a:solidFill>
               </a:rPr>
-              <a:t>Kronik FPIES: büyüme geriliği, kilo kaybı</a:t>
+              <a:t>Kronik FPIES: büyüme geriliği, kilo kaybı</a:t>
             </a:r>
             <a:r>
               <a:rPr lang="en-US" sz="2200" baseline="30000" dirty="0">
@@ -9947,7 +9989,7 @@
                   <a:schemeClr val="accent4"/>
                 </a:solidFill>
               </a:rPr>
-              <a:t>[42]</a:t>
+              <a:t>⁠[42]</a:t>
             </a:r>
             <a:endParaRPr lang="en-US" sz="2200" dirty="0"/>
           </a:p>
@@ -10045,7 +10087,7 @@
         </p:nvSpPr>
         <p:spPr>
           <a:xfrm>
-            <a:off x="548640" y="6382512"/>
+            <a:off x="548640" y="6272784"/>
             <a:ext cx="10241280" cy="274320"/>
           </a:xfrm>
           <a:prstGeom prst="rect">
@@ -10062,14 +10104,14 @@
               <a:buNone/>
             </a:pPr>
             <a:r>
-              <a:rPr lang="en-US" sz="1000" dirty="0">
+              <a:rPr lang="en-US" sz="1100" dirty="0">
                 <a:solidFill>
                   <a:schemeClr val="accent4"/>
                 </a:solidFill>
               </a:rPr>
               <a:t>Kaynak no: 38–42 · tam liste sondaki kaynak slaytlarında</a:t>
             </a:r>
-            <a:endParaRPr lang="en-US" sz="1000" dirty="0"/>
+            <a:endParaRPr lang="en-US" sz="1100" dirty="0"/>
           </a:p>
         </p:txBody>
       </p:sp>
@@ -10085,7 +10127,7 @@
         </p:nvSpPr>
         <p:spPr>
           <a:xfrm>
-            <a:off x="11109960" y="6382512"/>
+            <a:off x="11109960" y="6272784"/>
             <a:ext cx="548640" cy="274320"/>
           </a:xfrm>
           <a:prstGeom prst="rect">
@@ -10101,7 +10143,7 @@
           <a:bodyPr/>
           <a:lstStyle>
             <a:lvl1pPr>
-              <a:defRPr sz="1000">
+              <a:defRPr sz="1100">
                 <a:solidFill>
                   <a:srgbClr val="5B6B73"/>
                 </a:solidFill>
@@ -10153,7 +10195,7 @@
         </p:nvSpPr>
         <p:spPr>
           <a:xfrm>
-            <a:off x="548640" y="228600"/>
+            <a:off x="548640" y="365760"/>
             <a:ext cx="8229600" cy="292608"/>
           </a:xfrm>
           <a:prstGeom prst="rect">
@@ -10191,7 +10233,7 @@
         </p:nvSpPr>
         <p:spPr>
           <a:xfrm>
-            <a:off x="548640" y="530352"/>
+            <a:off x="548640" y="640080"/>
             <a:ext cx="11091672" cy="914400"/>
           </a:xfrm>
           <a:prstGeom prst="rect">
@@ -10253,7 +10295,7 @@
                   <a:schemeClr val="tx1"/>
                 </a:solidFill>
               </a:rPr>
-              <a:t>Posterior fossa tümöründe bulantı-kusma %75</a:t>
+              <a:t>Posterior fossa tümöründe bulantı-kusma %75</a:t>
             </a:r>
             <a:r>
               <a:rPr lang="en-US" sz="2200" baseline="30000" dirty="0">
@@ -10261,7 +10303,7 @@
                   <a:schemeClr val="accent4"/>
                 </a:solidFill>
               </a:rPr>
-              <a:t>[25]</a:t>
+              <a:t>⁠[25]</a:t>
             </a:r>
             <a:endParaRPr lang="en-US" sz="2200" dirty="0"/>
           </a:p>
@@ -10279,7 +10321,7 @@
                   <a:schemeClr val="tx1"/>
                 </a:solidFill>
               </a:rPr>
-              <a:t>&lt;3 yaş beyin tümörlü 21 bebeğin 3'ü kusmayla gelip önce batın görüntülemesi aldı</a:t>
+              <a:t>&lt;3 yaş beyin tümörlü 21 bebeğin 3'ü kusmayla gelip önce batın görüntülemesi aldı</a:t>
             </a:r>
             <a:r>
               <a:rPr lang="en-US" sz="2200" baseline="30000" dirty="0">
@@ -10287,7 +10329,7 @@
                   <a:schemeClr val="accent4"/>
                 </a:solidFill>
               </a:rPr>
-              <a:t>[43]</a:t>
+              <a:t>⁠[43]</a:t>
             </a:r>
             <a:endParaRPr lang="en-US" sz="2200" dirty="0"/>
           </a:p>
@@ -10305,7 +10347,7 @@
                   <a:schemeClr val="tx1"/>
                 </a:solidFill>
               </a:rPr>
-              <a:t>Panayiotopoulos (~3–6 y): iktal kusma, SKS ile karışır; EEG'de çoklu, sıklıkla oksipital odak</a:t>
+              <a:t>Panayiotopoulos (~3–⁠6 y): iktal kusma, SKS ile karışır; EEG'de çoklu, sıklıkla oksipital odak</a:t>
             </a:r>
             <a:r>
               <a:rPr lang="en-US" sz="2200" baseline="30000" dirty="0">
@@ -10313,7 +10355,7 @@
                   <a:schemeClr val="accent4"/>
                 </a:solidFill>
               </a:rPr>
-              <a:t>[19]</a:t>
+              <a:t>⁠[19]</a:t>
             </a:r>
             <a:endParaRPr lang="en-US" sz="2200" dirty="0"/>
           </a:p>
@@ -10331,7 +10373,7 @@
                   <a:schemeClr val="tx1"/>
                 </a:solidFill>
               </a:rPr>
-              <a:t>Şant disfonksiyonu: bulantı-kusma sık</a:t>
+              <a:t>Şant disfonksiyonu: bulantı-kusma sık</a:t>
             </a:r>
             <a:r>
               <a:rPr lang="en-US" sz="2200" baseline="30000" dirty="0">
@@ -10339,7 +10381,7 @@
                   <a:schemeClr val="accent4"/>
                 </a:solidFill>
               </a:rPr>
-              <a:t>[44]</a:t>
+              <a:t>⁠[44]</a:t>
             </a:r>
             <a:endParaRPr lang="en-US" sz="2200" dirty="0"/>
           </a:p>
@@ -10437,7 +10479,7 @@
         </p:nvSpPr>
         <p:spPr>
           <a:xfrm>
-            <a:off x="548640" y="6382512"/>
+            <a:off x="548640" y="6272784"/>
             <a:ext cx="10241280" cy="274320"/>
           </a:xfrm>
           <a:prstGeom prst="rect">
@@ -10454,14 +10496,14 @@
               <a:buNone/>
             </a:pPr>
             <a:r>
-              <a:rPr lang="en-US" sz="1000" dirty="0">
+              <a:rPr lang="en-US" sz="1100" dirty="0">
                 <a:solidFill>
                   <a:schemeClr val="accent4"/>
                 </a:solidFill>
               </a:rPr>
               <a:t>Kaynak no: 19,25,43,44 · tam liste sondaki kaynak slaytlarında</a:t>
             </a:r>
-            <a:endParaRPr lang="en-US" sz="1000" dirty="0"/>
+            <a:endParaRPr lang="en-US" sz="1100" dirty="0"/>
           </a:p>
         </p:txBody>
       </p:sp>
@@ -10477,7 +10519,7 @@
         </p:nvSpPr>
         <p:spPr>
           <a:xfrm>
-            <a:off x="11109960" y="6382512"/>
+            <a:off x="11109960" y="6272784"/>
             <a:ext cx="548640" cy="274320"/>
           </a:xfrm>
           <a:prstGeom prst="rect">
@@ -10493,7 +10535,7 @@
           <a:bodyPr/>
           <a:lstStyle>
             <a:lvl1pPr>
-              <a:defRPr sz="1000">
+              <a:defRPr sz="1100">
                 <a:solidFill>
                   <a:srgbClr val="5B6B73"/>
                 </a:solidFill>
@@ -10545,7 +10587,7 @@
         </p:nvSpPr>
         <p:spPr>
           <a:xfrm>
-            <a:off x="548640" y="228600"/>
+            <a:off x="548640" y="365760"/>
             <a:ext cx="8229600" cy="292608"/>
           </a:xfrm>
           <a:prstGeom prst="rect">
@@ -10583,7 +10625,7 @@
         </p:nvSpPr>
         <p:spPr>
           <a:xfrm>
-            <a:off x="548640" y="530352"/>
+            <a:off x="548640" y="640080"/>
             <a:ext cx="11091672" cy="914400"/>
           </a:xfrm>
           <a:prstGeom prst="rect">
@@ -10645,7 +10687,7 @@
                   <a:schemeClr val="tx1"/>
                 </a:solidFill>
               </a:rPr>
-              <a:t>ÜDB her yaşta akut/kronik; açıklanamayan ensefalopatide amonyak</a:t>
+              <a:t>ÜDB her yaşta akut/kronik; açıklanamayan ensefalopatide amonyak</a:t>
             </a:r>
             <a:r>
               <a:rPr lang="en-US" sz="2200" baseline="30000" dirty="0">
@@ -10653,7 +10695,7 @@
                   <a:schemeClr val="accent4"/>
                 </a:solidFill>
               </a:rPr>
-              <a:t>[45]</a:t>
+              <a:t>⁠[45]</a:t>
             </a:r>
             <a:endParaRPr lang="en-US" sz="2200" dirty="0"/>
           </a:p>
@@ -10671,7 +10713,7 @@
                   <a:schemeClr val="tx1"/>
                 </a:solidFill>
               </a:rPr>
-              <a:t>OTC eksikliğinde heterozigot kızlarda ağırlık değişken</a:t>
+              <a:t>OTC eksikliğinde heterozigot kızlarda ağırlık değişken</a:t>
             </a:r>
             <a:r>
               <a:rPr lang="en-US" sz="2200" baseline="30000" dirty="0">
@@ -10679,7 +10721,7 @@
                   <a:schemeClr val="accent4"/>
                 </a:solidFill>
               </a:rPr>
-              <a:t>[45]</a:t>
+              <a:t>⁠[45]</a:t>
             </a:r>
             <a:endParaRPr lang="en-US" sz="2200" dirty="0"/>
           </a:p>
@@ -10697,7 +10739,7 @@
                   <a:schemeClr val="tx1"/>
                 </a:solidFill>
               </a:rPr>
-              <a:t>Atakta hipoketotik hipoglisemi, asidoz, transaminaz/CK/laktat ↑ → YAOB</a:t>
+              <a:t>Atakta hipoketotik hipoglisemi, asidoz, transaminaz/CK/laktat ↑ → YAOB</a:t>
             </a:r>
             <a:r>
               <a:rPr lang="en-US" sz="2200" baseline="30000" dirty="0">
@@ -10705,7 +10747,7 @@
                   <a:schemeClr val="accent4"/>
                 </a:solidFill>
               </a:rPr>
-              <a:t>[46]</a:t>
+              <a:t>⁠[46]</a:t>
             </a:r>
             <a:endParaRPr lang="en-US" sz="2200" dirty="0"/>
           </a:p>
@@ -10723,7 +10765,7 @@
                   <a:schemeClr val="tx1"/>
                 </a:solidFill>
               </a:rPr>
-              <a:t>Organik asidemilerde en sık yatış nedeni kusma</a:t>
+              <a:t>Organik asidemilerde en sık yatış nedeni kusma</a:t>
             </a:r>
             <a:r>
               <a:rPr lang="en-US" sz="2200" baseline="30000" dirty="0">
@@ -10731,7 +10773,7 @@
                   <a:schemeClr val="accent4"/>
                 </a:solidFill>
               </a:rPr>
-              <a:t>[47]</a:t>
+              <a:t>⁠[47]</a:t>
             </a:r>
             <a:r>
               <a:rPr lang="en-US" sz="2200" dirty="0">
@@ -10739,7 +10781,7 @@
                   <a:schemeClr val="tx1"/>
                 </a:solidFill>
               </a:rPr>
-              <a:t>; adolesanda AİP</a:t>
+              <a:t>; adolesanda AİP</a:t>
             </a:r>
             <a:r>
               <a:rPr lang="en-US" sz="2200" baseline="30000" dirty="0">
@@ -10747,7 +10789,7 @@
                   <a:schemeClr val="accent4"/>
                 </a:solidFill>
               </a:rPr>
-              <a:t>[46]</a:t>
+              <a:t>⁠[46]</a:t>
             </a:r>
             <a:endParaRPr lang="en-US" sz="2200" dirty="0"/>
           </a:p>
@@ -10865,7 +10907,7 @@
                   <a:schemeClr val="accent4"/>
                 </a:solidFill>
               </a:rPr>
-              <a:t>Häberle öneri derecesi C–D; mitokondri için tek sayı verilmedi (biyokimyasal anormallik ≠ tanı).</a:t>
+              <a:t>Häberle öneri derecesi C–D; mitokondri için tek sayı verilmedi (biyokimyasal anormallik tanı değildir).</a:t>
             </a:r>
             <a:endParaRPr lang="en-US" sz="1100" dirty="0"/>
           </a:p>
@@ -10881,7 +10923,7 @@
         </p:nvSpPr>
         <p:spPr>
           <a:xfrm>
-            <a:off x="548640" y="6382512"/>
+            <a:off x="548640" y="6272784"/>
             <a:ext cx="10241280" cy="274320"/>
           </a:xfrm>
           <a:prstGeom prst="rect">
@@ -10898,14 +10940,14 @@
               <a:buNone/>
             </a:pPr>
             <a:r>
-              <a:rPr lang="en-US" sz="1000" dirty="0">
+              <a:rPr lang="en-US" sz="1100" dirty="0">
                 <a:solidFill>
                   <a:schemeClr val="accent4"/>
                 </a:solidFill>
               </a:rPr>
               <a:t>Kaynak no: 45–47 · tam liste sondaki kaynak slaytlarında</a:t>
             </a:r>
-            <a:endParaRPr lang="en-US" sz="1000" dirty="0"/>
+            <a:endParaRPr lang="en-US" sz="1100" dirty="0"/>
           </a:p>
         </p:txBody>
       </p:sp>
@@ -10921,7 +10963,7 @@
         </p:nvSpPr>
         <p:spPr>
           <a:xfrm>
-            <a:off x="11109960" y="6382512"/>
+            <a:off x="11109960" y="6272784"/>
             <a:ext cx="548640" cy="274320"/>
           </a:xfrm>
           <a:prstGeom prst="rect">
@@ -10937,7 +10979,7 @@
           <a:bodyPr/>
           <a:lstStyle>
             <a:lvl1pPr>
-              <a:defRPr sz="1000">
+              <a:defRPr sz="1100">
                 <a:solidFill>
                   <a:srgbClr val="5B6B73"/>
                 </a:solidFill>
@@ -10989,7 +11031,7 @@
         </p:nvSpPr>
         <p:spPr>
           <a:xfrm>
-            <a:off x="548640" y="228600"/>
+            <a:off x="548640" y="365760"/>
             <a:ext cx="8229600" cy="292608"/>
           </a:xfrm>
           <a:prstGeom prst="rect">
@@ -11027,7 +11069,7 @@
         </p:nvSpPr>
         <p:spPr>
           <a:xfrm>
-            <a:off x="548640" y="530352"/>
+            <a:off x="548640" y="640080"/>
             <a:ext cx="11091672" cy="914400"/>
           </a:xfrm>
           <a:prstGeom prst="rect">
@@ -11791,7 +11833,7 @@
         </p:nvSpPr>
         <p:spPr>
           <a:xfrm>
-            <a:off x="548640" y="6382512"/>
+            <a:off x="548640" y="6272784"/>
             <a:ext cx="10241280" cy="274320"/>
           </a:xfrm>
           <a:prstGeom prst="rect">
@@ -11808,14 +11850,14 @@
               <a:buNone/>
             </a:pPr>
             <a:r>
-              <a:rPr lang="en-US" sz="1000" dirty="0">
+              <a:rPr lang="en-US" sz="1100" dirty="0">
                 <a:solidFill>
                   <a:schemeClr val="accent4"/>
                 </a:solidFill>
               </a:rPr>
               <a:t> </a:t>
             </a:r>
-            <a:endParaRPr lang="en-US" sz="1000" dirty="0"/>
+            <a:endParaRPr lang="en-US" sz="1100" dirty="0"/>
           </a:p>
         </p:txBody>
       </p:sp>
@@ -11831,7 +11873,7 @@
         </p:nvSpPr>
         <p:spPr>
           <a:xfrm>
-            <a:off x="11109960" y="6382512"/>
+            <a:off x="11109960" y="6272784"/>
             <a:ext cx="548640" cy="274320"/>
           </a:xfrm>
           <a:prstGeom prst="rect">
@@ -11847,7 +11889,7 @@
           <a:bodyPr/>
           <a:lstStyle>
             <a:lvl1pPr>
-              <a:defRPr sz="1000">
+              <a:defRPr sz="1100">
                 <a:solidFill>
                   <a:srgbClr val="5B6B73"/>
                 </a:solidFill>
@@ -11899,7 +11941,7 @@
         </p:nvSpPr>
         <p:spPr>
           <a:xfrm>
-            <a:off x="548640" y="228600"/>
+            <a:off x="548640" y="365760"/>
             <a:ext cx="8229600" cy="292608"/>
           </a:xfrm>
           <a:prstGeom prst="rect">
@@ -11937,7 +11979,7 @@
         </p:nvSpPr>
         <p:spPr>
           <a:xfrm>
-            <a:off x="548640" y="530352"/>
+            <a:off x="548640" y="640080"/>
             <a:ext cx="11091672" cy="914400"/>
           </a:xfrm>
           <a:prstGeom prst="rect">
@@ -11999,7 +12041,7 @@
                   <a:schemeClr val="tx1"/>
                 </a:solidFill>
               </a:rPr>
-              <a:t>Hiponatremi/hipoglisemide Addison ve YAOB dışla</a:t>
+              <a:t>Hiponatremi/hipoglisemide Addison ve YAOB dışla</a:t>
             </a:r>
             <a:r>
               <a:rPr lang="en-US" sz="2200" baseline="30000" dirty="0">
@@ -12007,7 +12049,7 @@
                   <a:schemeClr val="accent4"/>
                 </a:solidFill>
               </a:rPr>
-              <a:t>[23]</a:t>
+              <a:t>⁠[23]</a:t>
             </a:r>
             <a:r>
               <a:rPr lang="en-US" sz="2200" dirty="0">
@@ -12015,7 +12057,7 @@
                   <a:schemeClr val="tx1"/>
                 </a:solidFill>
               </a:rPr>
-              <a:t>; ACTH + kortizol eşzamanlı</a:t>
+              <a:t>; ACTH + kortizol eşzamanlı</a:t>
             </a:r>
             <a:r>
               <a:rPr lang="en-US" sz="2200" baseline="30000" dirty="0">
@@ -12023,7 +12065,7 @@
                   <a:schemeClr val="accent4"/>
                 </a:solidFill>
               </a:rPr>
-              <a:t>[24]</a:t>
+              <a:t>⁠[24]</a:t>
             </a:r>
             <a:endParaRPr lang="en-US" sz="2200" dirty="0"/>
           </a:p>
@@ -12041,7 +12083,7 @@
                   <a:schemeClr val="tx1"/>
                 </a:solidFill>
               </a:rPr>
-              <a:t>Aralıklı UPJ darlığı: görüntüleme ağrı atağı sırasında</a:t>
+              <a:t>Aralıklı UPJ darlığı: görüntüleme ağrı atağı sırasında</a:t>
             </a:r>
             <a:r>
               <a:rPr lang="en-US" sz="2200" baseline="30000" dirty="0">
@@ -12049,7 +12091,7 @@
                   <a:schemeClr val="accent4"/>
                 </a:solidFill>
               </a:rPr>
-              <a:t>[48]</a:t>
+              <a:t>⁠[48]</a:t>
             </a:r>
             <a:endParaRPr lang="en-US" sz="2200" dirty="0"/>
           </a:p>
@@ -12067,7 +12109,7 @@
                   <a:schemeClr val="tx1"/>
                 </a:solidFill>
               </a:rPr>
-              <a:t>Kaçırılan DKA: serebral ödem ve ölüm riski artar</a:t>
+              <a:t>Kaçırılan DKA: serebral ödem ve ölüm riski artar</a:t>
             </a:r>
             <a:r>
               <a:rPr lang="en-US" sz="2200" baseline="30000" dirty="0">
@@ -12075,7 +12117,7 @@
                   <a:schemeClr val="accent4"/>
                 </a:solidFill>
               </a:rPr>
-              <a:t>[49]</a:t>
+              <a:t>⁠[49]</a:t>
             </a:r>
             <a:endParaRPr lang="en-US" sz="2200" dirty="0"/>
           </a:p>
@@ -12093,7 +12135,7 @@
                   <a:schemeClr val="tx1"/>
                 </a:solidFill>
               </a:rPr>
-              <a:t>Semptom yalnız bakım veren yanında → başkasına yüklenen yapay bozukluk</a:t>
+              <a:t>Semptom yalnız bakım veren yanında → başkasına yüklenen yapay bozukluk</a:t>
             </a:r>
             <a:r>
               <a:rPr lang="en-US" sz="2200" baseline="30000" dirty="0">
@@ -12101,7 +12143,7 @@
                   <a:schemeClr val="accent4"/>
                 </a:solidFill>
               </a:rPr>
-              <a:t>[50,51]</a:t>
+              <a:t>⁠[50,51]</a:t>
             </a:r>
             <a:endParaRPr lang="en-US" sz="2200" dirty="0"/>
           </a:p>
@@ -12198,7 +12240,7 @@
         <p:spPr>
           <a:xfrm>
             <a:off x="8001000" y="4114800"/>
-            <a:ext cx="3639312" cy="822960"/>
+            <a:ext cx="3639312" cy="868680"/>
           </a:xfrm>
           <a:prstGeom prst="rect">
             <a:avLst/>
@@ -12209,7 +12251,7 @@
           <a:ln/>
         </p:spPr>
         <p:txBody>
-          <a:bodyPr wrap="square" lIns="76200" tIns="76200" rIns="76200" bIns="76200" rtlCol="0" anchor="t"/>
+          <a:bodyPr wrap="square" lIns="127000" tIns="127000" rIns="127000" bIns="127000" rtlCol="0" anchor="t"/>
           <a:lstStyle/>
           <a:p>
             <a:pPr indent="0" marL="0">
@@ -12237,7 +12279,7 @@
         </p:nvSpPr>
         <p:spPr>
           <a:xfrm>
-            <a:off x="548640" y="6382512"/>
+            <a:off x="548640" y="6272784"/>
             <a:ext cx="10241280" cy="274320"/>
           </a:xfrm>
           <a:prstGeom prst="rect">
@@ -12254,14 +12296,14 @@
               <a:buNone/>
             </a:pPr>
             <a:r>
-              <a:rPr lang="en-US" sz="1000" dirty="0">
+              <a:rPr lang="en-US" sz="1100" dirty="0">
                 <a:solidFill>
                   <a:schemeClr val="accent4"/>
                 </a:solidFill>
               </a:rPr>
               <a:t>Kaynak no: 23,24,48–51 · tam liste sondaki kaynak slaytlarında</a:t>
             </a:r>
-            <a:endParaRPr lang="en-US" sz="1000" dirty="0"/>
+            <a:endParaRPr lang="en-US" sz="1100" dirty="0"/>
           </a:p>
         </p:txBody>
       </p:sp>
@@ -12277,7 +12319,7 @@
         </p:nvSpPr>
         <p:spPr>
           <a:xfrm>
-            <a:off x="11109960" y="6382512"/>
+            <a:off x="11109960" y="6272784"/>
             <a:ext cx="548640" cy="274320"/>
           </a:xfrm>
           <a:prstGeom prst="rect">
@@ -12293,7 +12335,7 @@
           <a:bodyPr/>
           <a:lstStyle>
             <a:lvl1pPr>
-              <a:defRPr sz="1000">
+              <a:defRPr sz="1100">
                 <a:solidFill>
                   <a:srgbClr val="5B6B73"/>
                 </a:solidFill>
@@ -12345,7 +12387,7 @@
         </p:nvSpPr>
         <p:spPr>
           <a:xfrm>
-            <a:off x="548640" y="228600"/>
+            <a:off x="548640" y="365760"/>
             <a:ext cx="8229600" cy="292608"/>
           </a:xfrm>
           <a:prstGeom prst="rect">
@@ -12383,7 +12425,7 @@
         </p:nvSpPr>
         <p:spPr>
           <a:xfrm>
-            <a:off x="548640" y="530352"/>
+            <a:off x="548640" y="640080"/>
             <a:ext cx="11091672" cy="914400"/>
           </a:xfrm>
           <a:prstGeom prst="rect">
@@ -12445,7 +12487,7 @@
                   <a:schemeClr val="tx1"/>
                 </a:solidFill>
               </a:rPr>
-              <a:t>Siklik kusmalı adolesanda KHS düşünülmeli</a:t>
+              <a:t>Siklik kusmalı adolesanda KHS düşünülmeli</a:t>
             </a:r>
             <a:r>
               <a:rPr lang="en-US" sz="2200" baseline="30000" dirty="0">
@@ -12453,7 +12495,7 @@
                   <a:schemeClr val="accent4"/>
                 </a:solidFill>
               </a:rPr>
-              <a:t>[52]</a:t>
+              <a:t>⁠[52]</a:t>
             </a:r>
             <a:r>
               <a:rPr lang="en-US" sz="2200" dirty="0">
@@ -12461,7 +12503,7 @@
                   <a:schemeClr val="tx1"/>
                 </a:solidFill>
               </a:rPr>
-              <a:t>; idrar THC destekler, yalancı pozitiflik olabilir</a:t>
+              <a:t>; idrar THC destekler, yalancı pozitiflik olabilir</a:t>
             </a:r>
             <a:r>
               <a:rPr lang="en-US" sz="2200" baseline="30000" dirty="0">
@@ -12469,7 +12511,7 @@
                   <a:schemeClr val="accent4"/>
                 </a:solidFill>
               </a:rPr>
-              <a:t>[8]</a:t>
+              <a:t>⁠[8]</a:t>
             </a:r>
             <a:endParaRPr lang="en-US" sz="2200" dirty="0"/>
           </a:p>
@@ -12487,7 +12529,7 @@
                   <a:schemeClr val="tx1"/>
                 </a:solidFill>
               </a:rPr>
-              <a:t>Ruminasyon yeme bozukluğuyla karışır: 6 ruminasyonun 5'inde yeme bozukluğu</a:t>
+              <a:t>Ruminasyon yeme bozukluğuyla karışır: 6 ruminasyonun 5'inde yeme bozukluğu</a:t>
             </a:r>
             <a:r>
               <a:rPr lang="en-US" sz="2200" baseline="30000" dirty="0">
@@ -12495,7 +12537,7 @@
                   <a:schemeClr val="accent4"/>
                 </a:solidFill>
               </a:rPr>
-              <a:t>[21]</a:t>
+              <a:t>⁠[21]</a:t>
             </a:r>
             <a:endParaRPr lang="en-US" sz="2200" dirty="0"/>
           </a:p>
@@ -12513,7 +12555,7 @@
                   <a:schemeClr val="tx1"/>
                 </a:solidFill>
               </a:rPr>
-              <a:t>Gastroparezi/FD'li çocukların %48,5–66,7'sinde ARFID taraması pozitif</a:t>
+              <a:t>Gastroparezi/FD'li çocukların %48,5–⁠66,7'sinde ARFID taraması pozitif</a:t>
             </a:r>
             <a:r>
               <a:rPr lang="en-US" sz="2200" baseline="30000" dirty="0">
@@ -12521,7 +12563,7 @@
                   <a:schemeClr val="accent4"/>
                 </a:solidFill>
               </a:rPr>
-              <a:t>[53]</a:t>
+              <a:t>⁠[53]</a:t>
             </a:r>
             <a:endParaRPr lang="en-US" sz="2200" dirty="0"/>
           </a:p>
@@ -12539,7 +12581,7 @@
                   <a:schemeClr val="tx1"/>
                 </a:solidFill>
               </a:rPr>
-              <a:t>Gebelik testi: eşik düşük</a:t>
+              <a:t>Gebelik testi: eşik düşük</a:t>
             </a:r>
             <a:r>
               <a:rPr lang="en-US" sz="2200" baseline="30000" dirty="0">
@@ -12547,7 +12589,7 @@
                   <a:schemeClr val="accent4"/>
                 </a:solidFill>
               </a:rPr>
-              <a:t>[54]</a:t>
+              <a:t>⁠[54]</a:t>
             </a:r>
             <a:endParaRPr lang="en-US" sz="2200" dirty="0"/>
           </a:p>
@@ -12659,7 +12701,7 @@
         <p:spPr>
           <a:xfrm>
             <a:off x="8001000" y="4114800"/>
-            <a:ext cx="3639312" cy="822960"/>
+            <a:ext cx="3639312" cy="868680"/>
           </a:xfrm>
           <a:prstGeom prst="rect">
             <a:avLst/>
@@ -12670,7 +12712,7 @@
           <a:ln/>
         </p:spPr>
         <p:txBody>
-          <a:bodyPr wrap="square" lIns="76200" tIns="76200" rIns="76200" bIns="76200" rtlCol="0" anchor="t"/>
+          <a:bodyPr wrap="square" lIns="127000" tIns="127000" rIns="127000" bIns="127000" rtlCol="0" anchor="t"/>
           <a:lstStyle/>
           <a:p>
             <a:pPr indent="0" marL="0">
@@ -12698,7 +12740,7 @@
         </p:nvSpPr>
         <p:spPr>
           <a:xfrm>
-            <a:off x="548640" y="6382512"/>
+            <a:off x="548640" y="6272784"/>
             <a:ext cx="10241280" cy="274320"/>
           </a:xfrm>
           <a:prstGeom prst="rect">
@@ -12715,14 +12757,14 @@
               <a:buNone/>
             </a:pPr>
             <a:r>
-              <a:rPr lang="en-US" sz="1000" dirty="0">
+              <a:rPr lang="en-US" sz="1100" dirty="0">
                 <a:solidFill>
                   <a:schemeClr val="accent4"/>
                 </a:solidFill>
               </a:rPr>
               <a:t>Kaynak no: 8,21,52–54 · tam liste sondaki kaynak slaytlarında</a:t>
             </a:r>
-            <a:endParaRPr lang="en-US" sz="1000" dirty="0"/>
+            <a:endParaRPr lang="en-US" sz="1100" dirty="0"/>
           </a:p>
         </p:txBody>
       </p:sp>
@@ -12738,7 +12780,7 @@
         </p:nvSpPr>
         <p:spPr>
           <a:xfrm>
-            <a:off x="11109960" y="6382512"/>
+            <a:off x="11109960" y="6272784"/>
             <a:ext cx="548640" cy="274320"/>
           </a:xfrm>
           <a:prstGeom prst="rect">
@@ -12754,7 +12796,7 @@
           <a:bodyPr/>
           <a:lstStyle>
             <a:lvl1pPr>
-              <a:defRPr sz="1000">
+              <a:defRPr sz="1100">
                 <a:solidFill>
                   <a:srgbClr val="5B6B73"/>
                 </a:solidFill>
@@ -12806,7 +12848,7 @@
         </p:nvSpPr>
         <p:spPr>
           <a:xfrm>
-            <a:off x="548640" y="228600"/>
+            <a:off x="548640" y="365760"/>
             <a:ext cx="8229600" cy="292608"/>
           </a:xfrm>
           <a:prstGeom prst="rect">
@@ -12844,7 +12886,7 @@
         </p:nvSpPr>
         <p:spPr>
           <a:xfrm>
-            <a:off x="548640" y="530352"/>
+            <a:off x="548640" y="640080"/>
             <a:ext cx="11091672" cy="914400"/>
           </a:xfrm>
           <a:prstGeom prst="rect">
@@ -12965,10 +13007,10 @@
             <a:r>
               <a:rPr lang="en-US" sz="1800" b="1" dirty="0">
                 <a:solidFill>
-                  <a:schemeClr val="accent2"/>
-                </a:solidFill>
-              </a:rPr>
-              <a:t>Acil üst GİS grafisi, çocuk cerrahisi</a:t>
+                  <a:schemeClr val="tx1"/>
+                </a:solidFill>
+              </a:rPr>
+              <a:t>Acil üst GİS grafisi, çocuk cerrahisi</a:t>
             </a:r>
             <a:r>
               <a:rPr lang="en-US" sz="1800" baseline="30000" dirty="0">
@@ -12976,7 +13018,7 @@
                   <a:schemeClr val="accent4"/>
                 </a:solidFill>
               </a:rPr>
-              <a:t>[22,34]</a:t>
+              <a:t>⁠[22,34]</a:t>
             </a:r>
             <a:endParaRPr lang="en-US" sz="1800" dirty="0"/>
           </a:p>
@@ -13075,10 +13117,10 @@
             <a:r>
               <a:rPr lang="en-US" sz="1800" b="1" dirty="0">
                 <a:solidFill>
-                  <a:schemeClr val="accent2"/>
-                </a:solidFill>
-              </a:rPr>
-              <a:t>Glukoz, kan gazı, amonyak (buzda)</a:t>
+                  <a:schemeClr val="tx1"/>
+                </a:solidFill>
+              </a:rPr>
+              <a:t>Glukoz, kan gazı, amonyak (buzda)</a:t>
             </a:r>
             <a:r>
               <a:rPr lang="en-US" sz="1800" baseline="30000" dirty="0">
@@ -13086,7 +13128,7 @@
                   <a:schemeClr val="accent4"/>
                 </a:solidFill>
               </a:rPr>
-              <a:t>[45,46]</a:t>
+              <a:t>⁠[45,46]</a:t>
             </a:r>
             <a:endParaRPr lang="en-US" sz="1800" dirty="0"/>
           </a:p>
@@ -13185,10 +13227,10 @@
             <a:r>
               <a:rPr lang="en-US" sz="1800" b="1" dirty="0">
                 <a:solidFill>
-                  <a:schemeClr val="accent2"/>
-                </a:solidFill>
-              </a:rPr>
-              <a:t>ACTH + kortizol</a:t>
+                  <a:schemeClr val="tx1"/>
+                </a:solidFill>
+              </a:rPr>
+              <a:t>ACTH + kortizol</a:t>
             </a:r>
             <a:r>
               <a:rPr lang="en-US" sz="1800" baseline="30000" dirty="0">
@@ -13196,7 +13238,7 @@
                   <a:schemeClr val="accent4"/>
                 </a:solidFill>
               </a:rPr>
-              <a:t>[23,24]</a:t>
+              <a:t>⁠[23,24]</a:t>
             </a:r>
             <a:endParaRPr lang="en-US" sz="1800" dirty="0"/>
           </a:p>
@@ -13295,10 +13337,10 @@
             <a:r>
               <a:rPr lang="en-US" sz="1800" b="1" dirty="0">
                 <a:solidFill>
-                  <a:schemeClr val="accent2"/>
-                </a:solidFill>
-              </a:rPr>
-              <a:t>Beyin MR</a:t>
+                  <a:schemeClr val="tx1"/>
+                </a:solidFill>
+              </a:rPr>
+              <a:t>Beyin MR</a:t>
             </a:r>
             <a:r>
               <a:rPr lang="en-US" sz="1800" baseline="30000" dirty="0">
@@ -13306,7 +13348,7 @@
                   <a:schemeClr val="accent4"/>
                 </a:solidFill>
               </a:rPr>
-              <a:t>[23]</a:t>
+              <a:t>⁠[23]</a:t>
             </a:r>
             <a:endParaRPr lang="en-US" sz="1800" dirty="0"/>
           </a:p>
@@ -13358,7 +13400,7 @@
         </p:nvSpPr>
         <p:spPr>
           <a:xfrm>
-            <a:off x="548640" y="6382512"/>
+            <a:off x="548640" y="6272784"/>
             <a:ext cx="10241280" cy="274320"/>
           </a:xfrm>
           <a:prstGeom prst="rect">
@@ -13375,14 +13417,14 @@
               <a:buNone/>
             </a:pPr>
             <a:r>
-              <a:rPr lang="en-US" sz="1000" dirty="0">
+              <a:rPr lang="en-US" sz="1100" dirty="0">
                 <a:solidFill>
                   <a:schemeClr val="accent4"/>
                 </a:solidFill>
               </a:rPr>
               <a:t>Kaynak no: 22–24,34,45,46 · tam liste sondaki kaynak slaytlarında</a:t>
             </a:r>
-            <a:endParaRPr lang="en-US" sz="1000" dirty="0"/>
+            <a:endParaRPr lang="en-US" sz="1100" dirty="0"/>
           </a:p>
         </p:txBody>
       </p:sp>
@@ -13398,7 +13440,7 @@
         </p:nvSpPr>
         <p:spPr>
           <a:xfrm>
-            <a:off x="11109960" y="6382512"/>
+            <a:off x="11109960" y="6272784"/>
             <a:ext cx="548640" cy="274320"/>
           </a:xfrm>
           <a:prstGeom prst="rect">
@@ -13414,7 +13456,7 @@
           <a:bodyPr/>
           <a:lstStyle>
             <a:lvl1pPr>
-              <a:defRPr sz="1000">
+              <a:defRPr sz="1100">
                 <a:solidFill>
                   <a:srgbClr val="5B6B73"/>
                 </a:solidFill>
@@ -13466,7 +13508,7 @@
         </p:nvSpPr>
         <p:spPr>
           <a:xfrm>
-            <a:off x="548640" y="228600"/>
+            <a:off x="548640" y="365760"/>
             <a:ext cx="8229600" cy="292608"/>
           </a:xfrm>
           <a:prstGeom prst="rect">
@@ -13504,7 +13546,7 @@
         </p:nvSpPr>
         <p:spPr>
           <a:xfrm>
-            <a:off x="548640" y="530352"/>
+            <a:off x="548640" y="640080"/>
             <a:ext cx="11091672" cy="914400"/>
           </a:xfrm>
           <a:prstGeom prst="rect">
@@ -13881,7 +13923,7 @@
                             <a:schemeClr val="tx1"/>
                           </a:solidFill>
                         </a:rPr>
-                        <a:t>NASPGHAN 2025</a:t>
+                        <a:t>NASPGHAN 2025</a:t>
                       </a:r>
                       <a:r>
                         <a:rPr lang="en-US" sz="1800" baseline="30000" dirty="0">
@@ -13889,7 +13931,7 @@
                             <a:schemeClr val="accent4"/>
                           </a:solidFill>
                         </a:rPr>
-                        <a:t>[55]</a:t>
+                        <a:t>⁠[55]</a:t>
                       </a:r>
                       <a:endParaRPr lang="en-US" sz="1200" dirty="0"/>
                     </a:p>
@@ -14082,7 +14124,7 @@
                             <a:schemeClr val="accent4"/>
                           </a:solidFill>
                         </a:rPr>
-                        <a:t>[3,56]</a:t>
+                        <a:t>⁠[3,56]</a:t>
                       </a:r>
                       <a:endParaRPr lang="en-US" sz="1200" dirty="0"/>
                     </a:p>
@@ -14267,7 +14309,7 @@
                             <a:schemeClr val="tx1"/>
                           </a:solidFill>
                         </a:rPr>
-                        <a:t>Rome V</a:t>
+                        <a:t>Rome V</a:t>
                       </a:r>
                       <a:r>
                         <a:rPr lang="en-US" sz="1800" baseline="30000" dirty="0">
@@ -14275,7 +14317,7 @@
                             <a:schemeClr val="accent4"/>
                           </a:solidFill>
                         </a:rPr>
-                        <a:t>[8]</a:t>
+                        <a:t>⁠[8]</a:t>
                       </a:r>
                       <a:endParaRPr lang="en-US" sz="1200" dirty="0"/>
                     </a:p>
@@ -14460,7 +14502,7 @@
                             <a:schemeClr val="tx1"/>
                           </a:solidFill>
                         </a:rPr>
-                        <a:t>Rome V</a:t>
+                        <a:t>Rome V</a:t>
                       </a:r>
                       <a:r>
                         <a:rPr lang="en-US" sz="1800" baseline="30000" dirty="0">
@@ -14468,7 +14510,7 @@
                             <a:schemeClr val="accent4"/>
                           </a:solidFill>
                         </a:rPr>
-                        <a:t>[8]</a:t>
+                        <a:t>⁠[8]</a:t>
                       </a:r>
                       <a:r>
                         <a:rPr lang="en-US" sz="1800" dirty="0">
@@ -14476,7 +14518,7 @@
                             <a:schemeClr val="tx1"/>
                           </a:solidFill>
                         </a:rPr>
-                        <a:t>; DOLAYLI</a:t>
+                        <a:t>; DOLAYLI</a:t>
                       </a:r>
                       <a:r>
                         <a:rPr lang="en-US" sz="1800" baseline="30000" dirty="0">
@@ -14484,7 +14526,7 @@
                             <a:schemeClr val="accent4"/>
                           </a:solidFill>
                         </a:rPr>
-                        <a:t>[54]</a:t>
+                        <a:t>⁠[54]</a:t>
                       </a:r>
                       <a:endParaRPr lang="en-US" sz="1200" dirty="0"/>
                     </a:p>
@@ -14566,7 +14608,7 @@
                   <a:schemeClr val="accent4"/>
                 </a:solidFill>
               </a:rPr>
-              <a:t>Batın US: çocukta hidronefroz için önerilir</a:t>
+              <a:t>Batın US: çocukta hidronefroz için önerilir</a:t>
             </a:r>
             <a:r>
               <a:rPr lang="en-US" sz="1100" i="1" baseline="30000" dirty="0">
@@ -14574,7 +14616,7 @@
                   <a:schemeClr val="accent4"/>
                 </a:solidFill>
               </a:rPr>
-              <a:t>[57]</a:t>
+              <a:t>⁠[57]</a:t>
             </a:r>
             <a:r>
               <a:rPr lang="en-US" sz="1100" i="1" dirty="0">
@@ -14598,7 +14640,7 @@
         </p:nvSpPr>
         <p:spPr>
           <a:xfrm>
-            <a:off x="548640" y="6382512"/>
+            <a:off x="548640" y="6272784"/>
             <a:ext cx="10241280" cy="274320"/>
           </a:xfrm>
           <a:prstGeom prst="rect">
@@ -14615,14 +14657,14 @@
               <a:buNone/>
             </a:pPr>
             <a:r>
-              <a:rPr lang="en-US" sz="1000" dirty="0">
+              <a:rPr lang="en-US" sz="1100" dirty="0">
                 <a:solidFill>
                   <a:schemeClr val="accent4"/>
                 </a:solidFill>
               </a:rPr>
               <a:t>Kaynak no: 3,8,54–57 · tam liste sondaki kaynak slaytlarında</a:t>
             </a:r>
-            <a:endParaRPr lang="en-US" sz="1000" dirty="0"/>
+            <a:endParaRPr lang="en-US" sz="1100" dirty="0"/>
           </a:p>
         </p:txBody>
       </p:sp>
@@ -14638,7 +14680,7 @@
         </p:nvSpPr>
         <p:spPr>
           <a:xfrm>
-            <a:off x="11109960" y="6382512"/>
+            <a:off x="11109960" y="6272784"/>
             <a:ext cx="548640" cy="274320"/>
           </a:xfrm>
           <a:prstGeom prst="rect">
@@ -14654,7 +14696,7 @@
           <a:bodyPr/>
           <a:lstStyle>
             <a:lvl1pPr>
-              <a:defRPr sz="1000">
+              <a:defRPr sz="1100">
                 <a:solidFill>
                   <a:srgbClr val="5B6B73"/>
                 </a:solidFill>
@@ -14706,7 +14748,7 @@
         </p:nvSpPr>
         <p:spPr>
           <a:xfrm>
-            <a:off x="548640" y="228600"/>
+            <a:off x="548640" y="365760"/>
             <a:ext cx="8229600" cy="292608"/>
           </a:xfrm>
           <a:prstGeom prst="rect">
@@ -14744,7 +14786,7 @@
         </p:nvSpPr>
         <p:spPr>
           <a:xfrm>
-            <a:off x="548640" y="530352"/>
+            <a:off x="548640" y="640080"/>
             <a:ext cx="11091672" cy="914400"/>
           </a:xfrm>
           <a:prstGeom prst="rect">
@@ -14863,7 +14905,7 @@
                   <a:schemeClr val="tx1"/>
                 </a:solidFill>
               </a:rPr>
-              <a:t>Açlık/protein/araya giren hastalık tetiklemesi, &lt;2 yaş başlangıç, ensefalopati</a:t>
+              <a:t>Açlık/protein/araya giren hastalık tetiklemesi, &lt;2 yaş başlangıç, ensefalopati</a:t>
             </a:r>
             <a:r>
               <a:rPr lang="en-US" sz="1900" baseline="30000" dirty="0">
@@ -14871,7 +14913,7 @@
                   <a:schemeClr val="accent4"/>
                 </a:solidFill>
               </a:rPr>
-              <a:t>[8,23]</a:t>
+              <a:t>⁠[8,23]</a:t>
             </a:r>
             <a:endParaRPr lang="en-US" sz="1900" dirty="0"/>
           </a:p>
@@ -14968,7 +15010,7 @@
                   <a:schemeClr val="tx1"/>
                 </a:solidFill>
               </a:rPr>
-              <a:t>Glukoz, kan gazı + elektrolit (anyon açığı), laktat, amonyak, aminoasit, açilkarnitin; Na↓/glukoz↓'de ACTH + kortizol</a:t>
+              <a:t>Glukoz, kan gazı + elektrolit (anyon açığı), laktat, amonyak, aminoasit, açilkarnitin; Na↓/glukoz↓'de ACTH + kortizol</a:t>
             </a:r>
             <a:r>
               <a:rPr lang="en-US" sz="1900" baseline="30000" dirty="0">
@@ -14976,7 +15018,7 @@
                   <a:schemeClr val="accent4"/>
                 </a:solidFill>
               </a:rPr>
-              <a:t>[23,24]</a:t>
+              <a:t>⁠[23,24]</a:t>
             </a:r>
             <a:endParaRPr lang="en-US" sz="1900" dirty="0"/>
           </a:p>
@@ -15073,7 +15115,7 @@
                   <a:schemeClr val="tx1"/>
                 </a:solidFill>
               </a:rPr>
-              <a:t>Keton, organik asit, ALA/PBG; fazla plazma-idrar dondur</a:t>
+              <a:t>Keton, organik asit, ALA/PBG; fazla plazma-idrar dondur</a:t>
             </a:r>
             <a:r>
               <a:rPr lang="en-US" sz="1900" baseline="30000" dirty="0">
@@ -15081,7 +15123,7 @@
                   <a:schemeClr val="accent4"/>
                 </a:solidFill>
               </a:rPr>
-              <a:t>[23]</a:t>
+              <a:t>⁠[23]</a:t>
             </a:r>
             <a:endParaRPr lang="en-US" sz="1900" dirty="0"/>
           </a:p>
@@ -15109,7 +15151,7 @@
           <a:ln/>
         </p:spPr>
         <p:txBody>
-          <a:bodyPr wrap="square" lIns="50800" tIns="177800" rIns="177800" bIns="50800" rtlCol="0" anchor="ctr"/>
+          <a:bodyPr wrap="square" lIns="177800" tIns="50800" rIns="177800" bIns="50800" rtlCol="0" anchor="ctr"/>
           <a:lstStyle/>
           <a:p>
             <a:pPr indent="0" marL="0">
@@ -15121,7 +15163,7 @@
                   <a:schemeClr val="bg1"/>
                 </a:solidFill>
               </a:rPr>
-              <a:t>Ardından %10 dekstroz, idamenin 1,5 katı</a:t>
+              <a:t>Ardından %10 dekstroz, idamenin 1,5 katı</a:t>
             </a:r>
             <a:r>
               <a:rPr lang="en-US" sz="1800" baseline="30000" dirty="0">
@@ -15129,7 +15171,7 @@
                   <a:schemeClr val="bg1"/>
                 </a:solidFill>
               </a:rPr>
-              <a:t>[23]</a:t>
+              <a:t>⁠[23]</a:t>
             </a:r>
             <a:endParaRPr lang="en-US" sz="1800" dirty="0"/>
           </a:p>
@@ -15205,7 +15247,7 @@
                   <a:schemeClr val="accent4"/>
                 </a:solidFill>
               </a:rPr>
-              <a:t>"Dekstroz tanı için geciktirilmez"</a:t>
+              <a:t>"Dekstroz tanı için geciktirilmez"</a:t>
             </a:r>
             <a:r>
               <a:rPr lang="en-US" sz="1100" i="1" baseline="30000" dirty="0">
@@ -15213,7 +15255,7 @@
                   <a:schemeClr val="accent4"/>
                 </a:solidFill>
               </a:rPr>
-              <a:t>[46]</a:t>
+              <a:t>⁠[46]</a:t>
             </a:r>
             <a:r>
               <a:rPr lang="en-US" sz="1100" i="1" dirty="0">
@@ -15237,7 +15279,7 @@
         </p:nvSpPr>
         <p:spPr>
           <a:xfrm>
-            <a:off x="548640" y="6382512"/>
+            <a:off x="548640" y="6272784"/>
             <a:ext cx="10241280" cy="274320"/>
           </a:xfrm>
           <a:prstGeom prst="rect">
@@ -15254,14 +15296,14 @@
               <a:buNone/>
             </a:pPr>
             <a:r>
-              <a:rPr lang="en-US" sz="1000" dirty="0">
+              <a:rPr lang="en-US" sz="1100" dirty="0">
                 <a:solidFill>
                   <a:schemeClr val="accent4"/>
                 </a:solidFill>
               </a:rPr>
               <a:t>Kaynak no: 8,23,24,46 · tam liste sondaki kaynak slaytlarında</a:t>
             </a:r>
-            <a:endParaRPr lang="en-US" sz="1000" dirty="0"/>
+            <a:endParaRPr lang="en-US" sz="1100" dirty="0"/>
           </a:p>
         </p:txBody>
       </p:sp>
@@ -15277,7 +15319,7 @@
         </p:nvSpPr>
         <p:spPr>
           <a:xfrm>
-            <a:off x="11109960" y="6382512"/>
+            <a:off x="11109960" y="6272784"/>
             <a:ext cx="548640" cy="274320"/>
           </a:xfrm>
           <a:prstGeom prst="rect">
@@ -15293,7 +15335,7 @@
           <a:bodyPr/>
           <a:lstStyle>
             <a:lvl1pPr>
-              <a:defRPr sz="1000">
+              <a:defRPr sz="1100">
                 <a:solidFill>
                   <a:srgbClr val="5B6B73"/>
                 </a:solidFill>
@@ -15345,7 +15387,7 @@
         </p:nvSpPr>
         <p:spPr>
           <a:xfrm>
-            <a:off x="548640" y="228600"/>
+            <a:off x="548640" y="365760"/>
             <a:ext cx="8229600" cy="292608"/>
           </a:xfrm>
           <a:prstGeom prst="rect">
@@ -15383,7 +15425,7 @@
         </p:nvSpPr>
         <p:spPr>
           <a:xfrm>
-            <a:off x="548640" y="530352"/>
+            <a:off x="548640" y="640080"/>
             <a:ext cx="11091672" cy="914400"/>
           </a:xfrm>
           <a:prstGeom prst="rect">
@@ -15445,7 +15487,7 @@
                   <a:schemeClr val="tx1"/>
                 </a:solidFill>
               </a:rPr>
-              <a:t>Üst GİS grafisi: malrotasyon; doğru pozisyonlama</a:t>
+              <a:t>Üst GİS grafisi: malrotasyon; doğru pozisyonlama</a:t>
             </a:r>
             <a:r>
               <a:rPr lang="en-US" sz="2200" baseline="30000" dirty="0">
@@ -15453,7 +15495,7 @@
                   <a:schemeClr val="accent4"/>
                 </a:solidFill>
               </a:rPr>
-              <a:t>[35]</a:t>
+              <a:t>⁠[35]</a:t>
             </a:r>
             <a:endParaRPr lang="en-US" sz="2200" dirty="0"/>
           </a:p>
@@ -15471,7 +15513,7 @@
                   <a:schemeClr val="tx1"/>
                 </a:solidFill>
               </a:rPr>
-              <a:t>Batın US: aralıklı UPJ darlığında atak sırasında</a:t>
+              <a:t>Batın US: aralıklı UPJ darlığında atak sırasında</a:t>
             </a:r>
             <a:r>
               <a:rPr lang="en-US" sz="2200" baseline="30000" dirty="0">
@@ -15479,7 +15521,7 @@
                   <a:schemeClr val="accent4"/>
                 </a:solidFill>
               </a:rPr>
-              <a:t>[48]</a:t>
+              <a:t>⁠[48]</a:t>
             </a:r>
             <a:endParaRPr lang="en-US" sz="2200" dirty="0"/>
           </a:p>
@@ -15497,7 +15539,7 @@
                   <a:schemeClr val="tx1"/>
                 </a:solidFill>
               </a:rPr>
-              <a:t>Beyin MR: anormal nörolojik muayenede</a:t>
+              <a:t>Beyin MR: anormal nörolojik muayenede</a:t>
             </a:r>
             <a:r>
               <a:rPr lang="en-US" sz="2200" baseline="30000" dirty="0">
@@ -15505,7 +15547,7 @@
                   <a:schemeClr val="accent4"/>
                 </a:solidFill>
               </a:rPr>
-              <a:t>[23]</a:t>
+              <a:t>⁠[23]</a:t>
             </a:r>
             <a:r>
               <a:rPr lang="en-US" sz="2200" dirty="0">
@@ -15513,7 +15555,7 @@
                   <a:schemeClr val="tx1"/>
                 </a:solidFill>
               </a:rPr>
-              <a:t>; süt çocuğunda bulgu olmasa da düşün</a:t>
+              <a:t>; süt çocuğunda bulgu olmasa da düşün</a:t>
             </a:r>
             <a:r>
               <a:rPr lang="en-US" sz="2200" baseline="30000" dirty="0">
@@ -15521,7 +15563,7 @@
                   <a:schemeClr val="accent4"/>
                 </a:solidFill>
               </a:rPr>
-              <a:t>[43]</a:t>
+              <a:t>⁠[43]</a:t>
             </a:r>
             <a:endParaRPr lang="en-US" sz="2200" dirty="0"/>
           </a:p>
@@ -15539,7 +15581,7 @@
                   <a:schemeClr val="tx1"/>
                 </a:solidFill>
               </a:rPr>
-              <a:t>106 SKS'li çocuk: nörogörüntüleme &lt;%10 yeni bulgu (hiçbiri kusmayı açıklamadı); 61 grafi normal</a:t>
+              <a:t>106 SKS'li çocuk: nörogörüntüleme &lt;%10 yeni bulgu (hiçbiri kusmayı açıklamadı); 61 grafi normal</a:t>
             </a:r>
             <a:r>
               <a:rPr lang="en-US" sz="2200" baseline="30000" dirty="0">
@@ -15547,7 +15589,7 @@
                   <a:schemeClr val="accent4"/>
                 </a:solidFill>
               </a:rPr>
-              <a:t>[58]</a:t>
+              <a:t>⁠[58]</a:t>
             </a:r>
             <a:endParaRPr lang="en-US" sz="2200" dirty="0"/>
           </a:p>
@@ -15645,7 +15687,7 @@
         </p:nvSpPr>
         <p:spPr>
           <a:xfrm>
-            <a:off x="548640" y="6382512"/>
+            <a:off x="548640" y="6272784"/>
             <a:ext cx="10241280" cy="274320"/>
           </a:xfrm>
           <a:prstGeom prst="rect">
@@ -15662,14 +15704,14 @@
               <a:buNone/>
             </a:pPr>
             <a:r>
-              <a:rPr lang="en-US" sz="1000" dirty="0">
+              <a:rPr lang="en-US" sz="1100" dirty="0">
                 <a:solidFill>
                   <a:schemeClr val="accent4"/>
                 </a:solidFill>
               </a:rPr>
               <a:t>Kaynak no: 23,35,43,48,58 · tam liste sondaki kaynak slaytlarında</a:t>
             </a:r>
-            <a:endParaRPr lang="en-US" sz="1000" dirty="0"/>
+            <a:endParaRPr lang="en-US" sz="1100" dirty="0"/>
           </a:p>
         </p:txBody>
       </p:sp>
@@ -15685,7 +15727,7 @@
         </p:nvSpPr>
         <p:spPr>
           <a:xfrm>
-            <a:off x="11109960" y="6382512"/>
+            <a:off x="11109960" y="6272784"/>
             <a:ext cx="548640" cy="274320"/>
           </a:xfrm>
           <a:prstGeom prst="rect">
@@ -15701,7 +15743,7 @@
           <a:bodyPr/>
           <a:lstStyle>
             <a:lvl1pPr>
-              <a:defRPr sz="1000">
+              <a:defRPr sz="1100">
                 <a:solidFill>
                   <a:srgbClr val="5B6B73"/>
                 </a:solidFill>
@@ -15753,7 +15795,7 @@
         </p:nvSpPr>
         <p:spPr>
           <a:xfrm>
-            <a:off x="548640" y="228600"/>
+            <a:off x="548640" y="365760"/>
             <a:ext cx="8229600" cy="292608"/>
           </a:xfrm>
           <a:prstGeom prst="rect">
@@ -15791,7 +15833,7 @@
         </p:nvSpPr>
         <p:spPr>
           <a:xfrm>
-            <a:off x="548640" y="530352"/>
+            <a:off x="548640" y="640080"/>
             <a:ext cx="11091672" cy="914400"/>
           </a:xfrm>
           <a:prstGeom prst="rect">
@@ -15813,7 +15855,21 @@
                   <a:schemeClr val="tx1"/>
                 </a:solidFill>
               </a:rPr>
-              <a:t>Endoskopi: SKS'de rutin değil; günlük kusmada ve ataklar arası semptomda</a:t>
+              <a:t>Endoskopi: SKS'de rutin değil;</a:t>
+            </a:r>
+            <a:endParaRPr lang="en-US" sz="2600" dirty="0"/>
+          </a:p>
+          <a:p>
+            <a:pPr algn="l" indent="0" marL="0">
+              <a:buNone/>
+            </a:pPr>
+            <a:r>
+              <a:rPr lang="en-US" sz="2600" b="1" dirty="0">
+                <a:solidFill>
+                  <a:schemeClr val="tx1"/>
+                </a:solidFill>
+              </a:rPr>
+              <a:t>günlük kusmada ve ataklar arası semptomda</a:t>
             </a:r>
             <a:endParaRPr lang="en-US" sz="2600" dirty="0"/>
           </a:p>
@@ -15853,7 +15909,7 @@
                   <a:schemeClr val="tx1"/>
                 </a:solidFill>
               </a:rPr>
-              <a:t>Çocuk SKS'de kronik GİS semptomu yoksa gerekmez (erişkinde önerilir)</a:t>
+              <a:t>Çocuk SKS'de kronik GİS semptomu yoksa gerekmez (erişkinde önerilir)</a:t>
             </a:r>
             <a:r>
               <a:rPr lang="en-US" sz="2200" baseline="30000" dirty="0">
@@ -15861,7 +15917,7 @@
                   <a:schemeClr val="accent4"/>
                 </a:solidFill>
               </a:rPr>
-              <a:t>[57]</a:t>
+              <a:t>⁠[57]</a:t>
             </a:r>
             <a:endParaRPr lang="en-US" sz="2200" dirty="0"/>
           </a:p>
@@ -15879,7 +15935,7 @@
                   <a:schemeClr val="tx1"/>
                 </a:solidFill>
               </a:rPr>
-              <a:t>Ataklar arası süren üst GİS yakınmasında endoskopi düşünülür</a:t>
+              <a:t>Ataklar arası süren üst GİS yakınmasında endoskopi düşünülür</a:t>
             </a:r>
             <a:r>
               <a:rPr lang="en-US" sz="2200" baseline="30000" dirty="0">
@@ -15887,7 +15943,7 @@
                   <a:schemeClr val="accent4"/>
                 </a:solidFill>
               </a:rPr>
-              <a:t>[23]</a:t>
+              <a:t>⁠[23]</a:t>
             </a:r>
             <a:endParaRPr lang="en-US" sz="2200" dirty="0"/>
           </a:p>
@@ -15905,7 +15961,7 @@
                   <a:schemeClr val="tx1"/>
                 </a:solidFill>
               </a:rPr>
-              <a:t>Alarm bulgusuz 287 çocukta EGD yönetimi %7,0'de değiştirdi</a:t>
+              <a:t>Alarm bulgusuz 287 çocukta EGD yönetimi %7,0'de değiştirdi</a:t>
             </a:r>
             <a:r>
               <a:rPr lang="en-US" sz="2200" baseline="30000" dirty="0">
@@ -15913,7 +15969,7 @@
                   <a:schemeClr val="accent4"/>
                 </a:solidFill>
               </a:rPr>
-              <a:t>[59]</a:t>
+              <a:t>⁠[59]</a:t>
             </a:r>
             <a:endParaRPr lang="en-US" sz="2200" dirty="0"/>
           </a:p>
@@ -15931,7 +15987,7 @@
                   <a:schemeClr val="tx1"/>
                 </a:solidFill>
               </a:rPr>
-              <a:t>FD'de alarm yoksa EGD rutin değil</a:t>
+              <a:t>FD'de alarm yoksa EGD rutin değil</a:t>
             </a:r>
             <a:r>
               <a:rPr lang="en-US" sz="2200" baseline="30000" dirty="0">
@@ -15939,7 +15995,7 @@
                   <a:schemeClr val="accent4"/>
                 </a:solidFill>
               </a:rPr>
-              <a:t>[8]</a:t>
+              <a:t>⁠[8]</a:t>
             </a:r>
             <a:endParaRPr lang="en-US" sz="2200" dirty="0"/>
           </a:p>
@@ -16052,7 +16108,7 @@
         </p:nvSpPr>
         <p:spPr>
           <a:xfrm>
-            <a:off x="548640" y="6382512"/>
+            <a:off x="548640" y="6272784"/>
             <a:ext cx="10241280" cy="274320"/>
           </a:xfrm>
           <a:prstGeom prst="rect">
@@ -16069,14 +16125,14 @@
               <a:buNone/>
             </a:pPr>
             <a:r>
-              <a:rPr lang="en-US" sz="1000" dirty="0">
+              <a:rPr lang="en-US" sz="1100" dirty="0">
                 <a:solidFill>
                   <a:schemeClr val="accent4"/>
                 </a:solidFill>
               </a:rPr>
               <a:t>Kaynak no: 8,23,57,59 · tam liste sondaki kaynak slaytlarında</a:t>
             </a:r>
-            <a:endParaRPr lang="en-US" sz="1000" dirty="0"/>
+            <a:endParaRPr lang="en-US" sz="1100" dirty="0"/>
           </a:p>
         </p:txBody>
       </p:sp>
@@ -16092,7 +16148,7 @@
         </p:nvSpPr>
         <p:spPr>
           <a:xfrm>
-            <a:off x="11109960" y="6382512"/>
+            <a:off x="11109960" y="6272784"/>
             <a:ext cx="548640" cy="274320"/>
           </a:xfrm>
           <a:prstGeom prst="rect">
@@ -16108,7 +16164,7 @@
           <a:bodyPr/>
           <a:lstStyle>
             <a:lvl1pPr>
-              <a:defRPr sz="1000">
+              <a:defRPr sz="1100">
                 <a:solidFill>
                   <a:srgbClr val="5B6B73"/>
                 </a:solidFill>
@@ -16160,7 +16216,7 @@
         </p:nvSpPr>
         <p:spPr>
           <a:xfrm>
-            <a:off x="548640" y="228600"/>
+            <a:off x="548640" y="365760"/>
             <a:ext cx="8229600" cy="292608"/>
           </a:xfrm>
           <a:prstGeom prst="rect">
@@ -16198,7 +16254,7 @@
         </p:nvSpPr>
         <p:spPr>
           <a:xfrm>
-            <a:off x="548640" y="530352"/>
+            <a:off x="548640" y="640080"/>
             <a:ext cx="11091672" cy="914400"/>
           </a:xfrm>
           <a:prstGeom prst="rect">
@@ -16260,7 +16316,7 @@
                   <a:schemeClr val="tx1"/>
                 </a:solidFill>
               </a:rPr>
-              <a:t>Ruminasyon: HRIM-empedans; test öğünü + 30–60 dk kayıt</a:t>
+              <a:t>Ruminasyon: HRIM-empedans; test öğünü + 30–⁠60 dk kayıt</a:t>
             </a:r>
             <a:r>
               <a:rPr lang="en-US" sz="2200" baseline="30000" dirty="0">
@@ -16268,7 +16324,7 @@
                   <a:schemeClr val="accent4"/>
                 </a:solidFill>
               </a:rPr>
-              <a:t>[60]</a:t>
+              <a:t>⁠[60]</a:t>
             </a:r>
             <a:endParaRPr lang="en-US" sz="2200" dirty="0"/>
           </a:p>
@@ -16286,7 +16342,7 @@
                   <a:schemeClr val="tx1"/>
                 </a:solidFill>
               </a:rPr>
-              <a:t>HRIM ile ruminasyon saptananların %47'si klinik kriterleri karşılamıyordu</a:t>
+              <a:t>HRIM ile ruminasyon saptananların %47'si klinik kriterleri karşılamıyordu</a:t>
             </a:r>
             <a:r>
               <a:rPr lang="en-US" sz="2200" baseline="30000" dirty="0">
@@ -16294,7 +16350,7 @@
                   <a:schemeClr val="accent4"/>
                 </a:solidFill>
               </a:rPr>
-              <a:t>[61]</a:t>
+              <a:t>⁠[61]</a:t>
             </a:r>
             <a:endParaRPr lang="en-US" sz="2200" dirty="0"/>
           </a:p>
@@ -16312,7 +16368,7 @@
                   <a:schemeClr val="tx1"/>
                 </a:solidFill>
               </a:rPr>
-              <a:t>Mide boşalma: pediatrik 4. saat retansiyon 95. persentili %22</a:t>
+              <a:t>Mide boşalma: pediatrik 4. saat retansiyon 95. persentili %22</a:t>
             </a:r>
             <a:r>
               <a:rPr lang="en-US" sz="2200" baseline="30000" dirty="0">
@@ -16320,7 +16376,7 @@
                   <a:schemeClr val="accent4"/>
                 </a:solidFill>
               </a:rPr>
-              <a:t>[62]</a:t>
+              <a:t>⁠[62]</a:t>
             </a:r>
             <a:r>
               <a:rPr lang="en-US" sz="2200" dirty="0">
@@ -16328,7 +16384,7 @@
                   <a:schemeClr val="tx1"/>
                 </a:solidFill>
               </a:rPr>
-              <a:t>; erişkin eşiğiyle çocukların %26'sı "gecikmiş"</a:t>
+              <a:t>; erişkin eşiğiyle çocukların %26'sı "gecikmiş"</a:t>
             </a:r>
             <a:r>
               <a:rPr lang="en-US" sz="2200" baseline="30000" dirty="0">
@@ -16336,7 +16392,7 @@
                   <a:schemeClr val="accent4"/>
                 </a:solidFill>
               </a:rPr>
-              <a:t>[63]</a:t>
+              <a:t>⁠[63]</a:t>
             </a:r>
             <a:endParaRPr lang="en-US" sz="2200" dirty="0"/>
           </a:p>
@@ -16354,7 +16410,7 @@
                   <a:schemeClr val="tx1"/>
                 </a:solidFill>
               </a:rPr>
-              <a:t>Ruminasyonlu çocukların %36'sında gecikmiş boşalma</a:t>
+              <a:t>Ruminasyonlu çocukların %36'sında gecikmiş boşalma</a:t>
             </a:r>
             <a:r>
               <a:rPr lang="en-US" sz="2200" baseline="30000" dirty="0">
@@ -16362,7 +16418,7 @@
                   <a:schemeClr val="accent4"/>
                 </a:solidFill>
               </a:rPr>
-              <a:t>[64]</a:t>
+              <a:t>⁠[64]</a:t>
             </a:r>
             <a:endParaRPr lang="en-US" sz="2200" dirty="0"/>
           </a:p>
@@ -16511,7 +16567,7 @@
         </p:nvSpPr>
         <p:spPr>
           <a:xfrm>
-            <a:off x="548640" y="6382512"/>
+            <a:off x="548640" y="6272784"/>
             <a:ext cx="10241280" cy="274320"/>
           </a:xfrm>
           <a:prstGeom prst="rect">
@@ -16528,14 +16584,14 @@
               <a:buNone/>
             </a:pPr>
             <a:r>
-              <a:rPr lang="en-US" sz="1000" dirty="0">
+              <a:rPr lang="en-US" sz="1100" dirty="0">
                 <a:solidFill>
                   <a:schemeClr val="accent4"/>
                 </a:solidFill>
               </a:rPr>
               <a:t>Kaynak no: 60–64 · tam liste sondaki kaynak slaytlarında</a:t>
             </a:r>
-            <a:endParaRPr lang="en-US" sz="1000" dirty="0"/>
+            <a:endParaRPr lang="en-US" sz="1100" dirty="0"/>
           </a:p>
         </p:txBody>
       </p:sp>
@@ -16551,7 +16607,7 @@
         </p:nvSpPr>
         <p:spPr>
           <a:xfrm>
-            <a:off x="11109960" y="6382512"/>
+            <a:off x="11109960" y="6272784"/>
             <a:ext cx="548640" cy="274320"/>
           </a:xfrm>
           <a:prstGeom prst="rect">
@@ -16567,7 +16623,7 @@
           <a:bodyPr/>
           <a:lstStyle>
             <a:lvl1pPr>
-              <a:defRPr sz="1000">
+              <a:defRPr sz="1100">
                 <a:solidFill>
                   <a:srgbClr val="5B6B73"/>
                 </a:solidFill>
@@ -16619,7 +16675,7 @@
         </p:nvSpPr>
         <p:spPr>
           <a:xfrm>
-            <a:off x="548640" y="228600"/>
+            <a:off x="548640" y="365760"/>
             <a:ext cx="8229600" cy="292608"/>
           </a:xfrm>
           <a:prstGeom prst="rect">
@@ -16657,7 +16713,7 @@
         </p:nvSpPr>
         <p:spPr>
           <a:xfrm>
-            <a:off x="548640" y="530352"/>
+            <a:off x="548640" y="640080"/>
             <a:ext cx="11091672" cy="914400"/>
           </a:xfrm>
           <a:prstGeom prst="rect">
@@ -16693,12 +16749,12 @@
         </p:nvSpPr>
         <p:spPr>
           <a:xfrm>
-            <a:off x="548640" y="1463040"/>
-            <a:ext cx="11091672" cy="777240"/>
+            <a:off x="548640" y="1371600"/>
+            <a:ext cx="11091672" cy="914400"/>
           </a:xfrm>
           <a:prstGeom prst="roundRect">
             <a:avLst>
-              <a:gd name="adj" fmla="val 11765"/>
+              <a:gd name="adj" fmla="val 10000"/>
             </a:avLst>
           </a:prstGeom>
           <a:solidFill>
@@ -16715,8 +16771,8 @@
         </p:nvSpPr>
         <p:spPr>
           <a:xfrm>
-            <a:off x="685800" y="1536192"/>
-            <a:ext cx="10817352" cy="630936"/>
+            <a:off x="685800" y="1444752"/>
+            <a:ext cx="10817352" cy="768096"/>
           </a:xfrm>
           <a:prstGeom prst="rect">
             <a:avLst/>
@@ -16732,21 +16788,21 @@
               <a:buNone/>
             </a:pPr>
             <a:r>
-              <a:rPr lang="en-US" sz="1500" b="1" dirty="0">
-                <a:solidFill>
-                  <a:schemeClr val="accent2"/>
+              <a:rPr lang="en-US" sz="1600" b="1" dirty="0">
+                <a:solidFill>
+                  <a:schemeClr val="tx2"/>
                 </a:solidFill>
               </a:rPr>
               <a:t>Basamak 0 · Acil (aynı saat)</a:t>
             </a:r>
-            <a:endParaRPr lang="en-US" sz="1500" dirty="0"/>
+            <a:endParaRPr lang="en-US" sz="1600" dirty="0"/>
           </a:p>
           <a:p>
             <a:pPr indent="0" marL="0">
               <a:buNone/>
             </a:pPr>
             <a:r>
-              <a:rPr lang="en-US" sz="1400" dirty="0">
+              <a:rPr lang="en-US" sz="1500" dirty="0">
                 <a:solidFill>
                   <a:schemeClr val="tx1"/>
                 </a:solidFill>
@@ -16754,14 +16810,14 @@
               <a:t>Safralı kusma + karın bulgusu → acil grafi + cerrahi · Ensefalopati → glukoz, kan gazı, amonyak · Na↓/glukoz↓ → ACTH + kortizol · Nörolojik bulgu → beyin MR</a:t>
             </a:r>
             <a:r>
-              <a:rPr lang="en-US" sz="1400" baseline="30000" dirty="0">
+              <a:rPr lang="en-US" sz="1500" baseline="30000" dirty="0">
                 <a:solidFill>
                   <a:schemeClr val="accent4"/>
                 </a:solidFill>
               </a:rPr>
-              <a:t> [22–24,34,45,46]</a:t>
-            </a:r>
-            <a:endParaRPr lang="en-US" sz="1500" dirty="0"/>
+              <a:t> [22–24,34,45,46]</a:t>
+            </a:r>
+            <a:endParaRPr lang="en-US" sz="1600" dirty="0"/>
           </a:p>
         </p:txBody>
       </p:sp>
@@ -16773,8 +16829,8 @@
         </p:nvSpPr>
         <p:spPr>
           <a:xfrm>
-            <a:off x="6094476" y="2240280"/>
-            <a:ext cx="0" cy="182880"/>
+            <a:off x="6094476" y="2286000"/>
+            <a:ext cx="0" cy="137160"/>
           </a:xfrm>
           <a:prstGeom prst="line">
             <a:avLst/>
@@ -16798,11 +16854,11 @@
         <p:spPr>
           <a:xfrm>
             <a:off x="548640" y="2423160"/>
-            <a:ext cx="3575304" cy="1005840"/>
+            <a:ext cx="3575304" cy="1143000"/>
           </a:xfrm>
           <a:prstGeom prst="roundRect">
             <a:avLst>
-              <a:gd name="adj" fmla="val 9091"/>
+              <a:gd name="adj" fmla="val 8000"/>
             </a:avLst>
           </a:prstGeom>
           <a:solidFill>
@@ -16820,7 +16876,7 @@
         <p:spPr>
           <a:xfrm>
             <a:off x="685800" y="2496312"/>
-            <a:ext cx="3300984" cy="859536"/>
+            <a:ext cx="3300984" cy="996696"/>
           </a:xfrm>
           <a:prstGeom prst="rect">
             <a:avLst/>
@@ -16836,21 +16892,21 @@
               <a:buNone/>
             </a:pPr>
             <a:r>
-              <a:rPr lang="en-US" sz="1500" b="1" dirty="0">
+              <a:rPr lang="en-US" sz="1600" b="1" dirty="0">
                 <a:solidFill>
                   <a:schemeClr val="tx2"/>
                 </a:solidFill>
               </a:rPr>
               <a:t>Basamak 1 · Siklik patern</a:t>
             </a:r>
-            <a:endParaRPr lang="en-US" sz="1500" dirty="0"/>
+            <a:endParaRPr lang="en-US" sz="1600" dirty="0"/>
           </a:p>
           <a:p>
             <a:pPr indent="0" marL="0">
               <a:buNone/>
             </a:pPr>
             <a:r>
-              <a:rPr lang="en-US" sz="1400" dirty="0">
+              <a:rPr lang="en-US" sz="1500" dirty="0">
                 <a:solidFill>
                   <a:schemeClr val="tx1"/>
                 </a:solidFill>
@@ -16858,14 +16914,14 @@
               <a:t>Kan + idrar tarama, üst GİS pasaj grafisi</a:t>
             </a:r>
             <a:r>
-              <a:rPr lang="en-US" sz="1400" baseline="30000" dirty="0">
+              <a:rPr lang="en-US" sz="1500" baseline="30000" dirty="0">
                 <a:solidFill>
                   <a:schemeClr val="accent4"/>
                 </a:solidFill>
               </a:rPr>
-              <a:t> [55]</a:t>
-            </a:r>
-            <a:endParaRPr lang="en-US" sz="1500" dirty="0"/>
+              <a:t> [55]</a:t>
+            </a:r>
+            <a:endParaRPr lang="en-US" sz="1600" dirty="0"/>
           </a:p>
         </p:txBody>
       </p:sp>
@@ -16878,11 +16934,11 @@
         <p:spPr>
           <a:xfrm>
             <a:off x="4306824" y="2423160"/>
-            <a:ext cx="3575304" cy="1005840"/>
+            <a:ext cx="3575304" cy="1143000"/>
           </a:xfrm>
           <a:prstGeom prst="roundRect">
             <a:avLst>
-              <a:gd name="adj" fmla="val 9091"/>
+              <a:gd name="adj" fmla="val 8000"/>
             </a:avLst>
           </a:prstGeom>
           <a:solidFill>
@@ -16905,7 +16961,7 @@
         <p:spPr>
           <a:xfrm>
             <a:off x="4443984" y="2496312"/>
-            <a:ext cx="3300984" cy="859536"/>
+            <a:ext cx="3300984" cy="996696"/>
           </a:xfrm>
           <a:prstGeom prst="rect">
             <a:avLst/>
@@ -16921,21 +16977,21 @@
               <a:buNone/>
             </a:pPr>
             <a:r>
-              <a:rPr lang="en-US" sz="1500" b="1" dirty="0">
+              <a:rPr lang="en-US" sz="1600" b="1" dirty="0">
                 <a:solidFill>
                   <a:schemeClr val="tx2"/>
                 </a:solidFill>
               </a:rPr>
               <a:t>Basamak 1 · Kronik günlük (ÇIKARIM)</a:t>
             </a:r>
-            <a:endParaRPr lang="en-US" sz="1500" dirty="0"/>
+            <a:endParaRPr lang="en-US" sz="1600" dirty="0"/>
           </a:p>
           <a:p>
             <a:pPr indent="0" marL="0">
               <a:buNone/>
             </a:pPr>
             <a:r>
-              <a:rPr lang="en-US" sz="1400" dirty="0">
+              <a:rPr lang="en-US" sz="1500" dirty="0">
                 <a:solidFill>
                   <a:schemeClr val="tx1"/>
                 </a:solidFill>
@@ -16943,14 +16999,14 @@
               <a:t>Endoskopi + biyopsi öncelikli; anatomi için grafi</a:t>
             </a:r>
             <a:r>
-              <a:rPr lang="en-US" sz="1400" baseline="30000" dirty="0">
+              <a:rPr lang="en-US" sz="1500" baseline="30000" dirty="0">
                 <a:solidFill>
                   <a:schemeClr val="accent4"/>
                 </a:solidFill>
               </a:rPr>
-              <a:t> [3,56]</a:t>
-            </a:r>
-            <a:endParaRPr lang="en-US" sz="1500" dirty="0"/>
+              <a:t> [3,56]</a:t>
+            </a:r>
+            <a:endParaRPr lang="en-US" sz="1600" dirty="0"/>
           </a:p>
         </p:txBody>
       </p:sp>
@@ -16963,11 +17019,11 @@
         <p:spPr>
           <a:xfrm>
             <a:off x="8065008" y="2423160"/>
-            <a:ext cx="3575304" cy="1005840"/>
+            <a:ext cx="3575304" cy="1143000"/>
           </a:xfrm>
           <a:prstGeom prst="roundRect">
             <a:avLst>
-              <a:gd name="adj" fmla="val 9091"/>
+              <a:gd name="adj" fmla="val 8000"/>
             </a:avLst>
           </a:prstGeom>
           <a:solidFill>
@@ -16985,7 +17041,7 @@
         <p:spPr>
           <a:xfrm>
             <a:off x="8202168" y="2496312"/>
-            <a:ext cx="3300984" cy="859536"/>
+            <a:ext cx="3300984" cy="996696"/>
           </a:xfrm>
           <a:prstGeom prst="rect">
             <a:avLst/>
@@ -17001,21 +17057,21 @@
               <a:buNone/>
             </a:pPr>
             <a:r>
-              <a:rPr lang="en-US" sz="1500" b="1" dirty="0">
+              <a:rPr lang="en-US" sz="1600" b="1" dirty="0">
                 <a:solidFill>
                   <a:schemeClr val="tx2"/>
                 </a:solidFill>
               </a:rPr>
               <a:t>Basamak 1 · Eforsuz regürjitasyon</a:t>
             </a:r>
-            <a:endParaRPr lang="en-US" sz="1500" dirty="0"/>
+            <a:endParaRPr lang="en-US" sz="1600" dirty="0"/>
           </a:p>
           <a:p>
             <a:pPr indent="0" marL="0">
               <a:buNone/>
             </a:pPr>
             <a:r>
-              <a:rPr lang="en-US" sz="1400" dirty="0">
+              <a:rPr lang="en-US" sz="1500" dirty="0">
                 <a:solidFill>
                   <a:schemeClr val="tx1"/>
                 </a:solidFill>
@@ -17023,14 +17079,14 @@
               <a:t>Öğün sonrası gözlem; atipikse HRIM-empedans</a:t>
             </a:r>
             <a:r>
-              <a:rPr lang="en-US" sz="1400" baseline="30000" dirty="0">
+              <a:rPr lang="en-US" sz="1500" baseline="30000" dirty="0">
                 <a:solidFill>
                   <a:schemeClr val="accent4"/>
                 </a:solidFill>
               </a:rPr>
-              <a:t> [8]</a:t>
-            </a:r>
-            <a:endParaRPr lang="en-US" sz="1500" dirty="0"/>
+              <a:t> [8]</a:t>
+            </a:r>
+            <a:endParaRPr lang="en-US" sz="1600" dirty="0"/>
           </a:p>
         </p:txBody>
       </p:sp>
@@ -17042,8 +17098,8 @@
         </p:nvSpPr>
         <p:spPr>
           <a:xfrm>
-            <a:off x="6094476" y="3429000"/>
-            <a:ext cx="0" cy="182880"/>
+            <a:off x="6094476" y="3566160"/>
+            <a:ext cx="0" cy="137160"/>
           </a:xfrm>
           <a:prstGeom prst="line">
             <a:avLst/>
@@ -17066,12 +17122,12 @@
         </p:nvSpPr>
         <p:spPr>
           <a:xfrm>
-            <a:off x="548640" y="3611880"/>
-            <a:ext cx="11091672" cy="777240"/>
+            <a:off x="548640" y="3703320"/>
+            <a:ext cx="11091672" cy="868680"/>
           </a:xfrm>
           <a:prstGeom prst="roundRect">
             <a:avLst>
-              <a:gd name="adj" fmla="val 11765"/>
+              <a:gd name="adj" fmla="val 10526"/>
             </a:avLst>
           </a:prstGeom>
           <a:solidFill>
@@ -17088,8 +17144,8 @@
         </p:nvSpPr>
         <p:spPr>
           <a:xfrm>
-            <a:off x="685800" y="3685032"/>
-            <a:ext cx="10817352" cy="630936"/>
+            <a:off x="685800" y="3776472"/>
+            <a:ext cx="10817352" cy="722376"/>
           </a:xfrm>
           <a:prstGeom prst="rect">
             <a:avLst/>
@@ -17105,21 +17161,21 @@
               <a:buNone/>
             </a:pPr>
             <a:r>
-              <a:rPr lang="en-US" sz="1500" b="1" dirty="0">
+              <a:rPr lang="en-US" sz="1600" b="1" dirty="0">
                 <a:solidFill>
                   <a:schemeClr val="tx2"/>
                 </a:solidFill>
               </a:rPr>
               <a:t>Basamak 2 · Bayrağa göre hedefe yönelik</a:t>
             </a:r>
-            <a:endParaRPr lang="en-US" sz="1500" dirty="0"/>
+            <a:endParaRPr lang="en-US" sz="1600" dirty="0"/>
           </a:p>
           <a:p>
             <a:pPr indent="0" marL="0">
               <a:buNone/>
             </a:pPr>
             <a:r>
-              <a:rPr lang="en-US" sz="1400" dirty="0">
+              <a:rPr lang="en-US" sz="1500" dirty="0">
                 <a:solidFill>
                   <a:schemeClr val="tx1"/>
                 </a:solidFill>
@@ -17127,14 +17183,14 @@
               <a:t>Metabolik bayrak → atakta kritik örnek (dekstrozu geciktirmeden) · Ataklar arası üst GİS yakınması → endoskopi · Aralıklı UPJ şüphesi → atak sırasında US</a:t>
             </a:r>
             <a:r>
-              <a:rPr lang="en-US" sz="1400" baseline="30000" dirty="0">
+              <a:rPr lang="en-US" sz="1500" baseline="30000" dirty="0">
                 <a:solidFill>
                   <a:schemeClr val="accent4"/>
                 </a:solidFill>
               </a:rPr>
-              <a:t> [8,23,46,48]</a:t>
-            </a:r>
-            <a:endParaRPr lang="en-US" sz="1500" dirty="0"/>
+              <a:t> [8,23,46,48]</a:t>
+            </a:r>
+            <a:endParaRPr lang="en-US" sz="1600" dirty="0"/>
           </a:p>
         </p:txBody>
       </p:sp>
@@ -17146,8 +17202,8 @@
         </p:nvSpPr>
         <p:spPr>
           <a:xfrm>
-            <a:off x="6094476" y="4389120"/>
-            <a:ext cx="0" cy="182880"/>
+            <a:off x="6094476" y="4572000"/>
+            <a:ext cx="0" cy="109728"/>
           </a:xfrm>
           <a:prstGeom prst="line">
             <a:avLst/>
@@ -17170,12 +17226,12 @@
         </p:nvSpPr>
         <p:spPr>
           <a:xfrm>
-            <a:off x="548640" y="4572000"/>
-            <a:ext cx="11091672" cy="548640"/>
+            <a:off x="548640" y="4681728"/>
+            <a:ext cx="11091672" cy="566928"/>
           </a:xfrm>
           <a:prstGeom prst="roundRect">
             <a:avLst>
-              <a:gd name="adj" fmla="val 16667"/>
+              <a:gd name="adj" fmla="val 16129"/>
             </a:avLst>
           </a:prstGeom>
           <a:solidFill>
@@ -17192,8 +17248,8 @@
         </p:nvSpPr>
         <p:spPr>
           <a:xfrm>
-            <a:off x="685800" y="4645152"/>
-            <a:ext cx="10817352" cy="402336"/>
+            <a:off x="685800" y="4754880"/>
+            <a:ext cx="10817352" cy="420624"/>
           </a:xfrm>
           <a:prstGeom prst="rect">
             <a:avLst/>
@@ -17209,36 +17265,28 @@
               <a:buNone/>
             </a:pPr>
             <a:r>
-              <a:rPr lang="en-US" sz="1500" b="1" dirty="0">
+              <a:rPr lang="en-US" sz="1600" b="1" dirty="0">
                 <a:solidFill>
                   <a:schemeClr val="tx2"/>
                 </a:solidFill>
               </a:rPr>
-              <a:t>Basamak 3 · Bayrak ya da 2 ayda yanıtsızlık (SKS)</a:t>
-            </a:r>
-            <a:endParaRPr lang="en-US" sz="1500" dirty="0"/>
+              <a:t>Basamak 3 · Bayrak ya da 2 ayda yanıtsızlık (SKS): tanıyı testlerle destekle</a:t>
+            </a:r>
+            <a:endParaRPr lang="en-US" sz="1600" dirty="0"/>
           </a:p>
           <a:p>
             <a:pPr indent="0" marL="0">
               <a:buNone/>
             </a:pPr>
             <a:r>
-              <a:rPr lang="en-US" sz="1400" dirty="0">
-                <a:solidFill>
-                  <a:schemeClr val="tx1"/>
-                </a:solidFill>
-              </a:rPr>
-              <a:t>  Tanıyı testlerle destekle</a:t>
-            </a:r>
-            <a:r>
-              <a:rPr lang="en-US" sz="1400" baseline="30000" dirty="0">
+              <a:rPr lang="en-US" sz="1500" baseline="30000" dirty="0">
                 <a:solidFill>
                   <a:schemeClr val="accent4"/>
                 </a:solidFill>
               </a:rPr>
-              <a:t> [8]</a:t>
-            </a:r>
-            <a:endParaRPr lang="en-US" sz="1500" dirty="0"/>
+              <a:t> [8]</a:t>
+            </a:r>
+            <a:endParaRPr lang="en-US" sz="1600" dirty="0"/>
           </a:p>
         </p:txBody>
       </p:sp>
@@ -17250,8 +17298,8 @@
         </p:nvSpPr>
         <p:spPr>
           <a:xfrm>
-            <a:off x="3321558" y="5120640"/>
-            <a:ext cx="0" cy="182880"/>
+            <a:off x="3321558" y="5248656"/>
+            <a:ext cx="0" cy="109728"/>
           </a:xfrm>
           <a:prstGeom prst="line">
             <a:avLst/>
@@ -17274,8 +17322,8 @@
         </p:nvSpPr>
         <p:spPr>
           <a:xfrm>
-            <a:off x="8867394" y="5120640"/>
-            <a:ext cx="0" cy="182880"/>
+            <a:off x="8867394" y="5248656"/>
+            <a:ext cx="0" cy="109728"/>
           </a:xfrm>
           <a:prstGeom prst="line">
             <a:avLst/>
@@ -17298,12 +17346,12 @@
         </p:nvSpPr>
         <p:spPr>
           <a:xfrm>
-            <a:off x="548640" y="5303520"/>
-            <a:ext cx="5454396" cy="868680"/>
+            <a:off x="548640" y="5358384"/>
+            <a:ext cx="5454396" cy="822960"/>
           </a:xfrm>
           <a:prstGeom prst="roundRect">
             <a:avLst>
-              <a:gd name="adj" fmla="val 10526"/>
+              <a:gd name="adj" fmla="val 11111"/>
             </a:avLst>
           </a:prstGeom>
           <a:solidFill>
@@ -17320,8 +17368,8 @@
         </p:nvSpPr>
         <p:spPr>
           <a:xfrm>
-            <a:off x="685800" y="5376672"/>
-            <a:ext cx="5180076" cy="722376"/>
+            <a:off x="685800" y="5431536"/>
+            <a:ext cx="5180076" cy="676656"/>
           </a:xfrm>
           <a:prstGeom prst="rect">
             <a:avLst/>
@@ -17337,21 +17385,21 @@
               <a:buNone/>
             </a:pPr>
             <a:r>
-              <a:rPr lang="en-US" sz="1500" b="1" dirty="0">
+              <a:rPr lang="en-US" sz="1600" b="1" dirty="0">
                 <a:solidFill>
                   <a:schemeClr val="tx2"/>
                 </a:solidFill>
               </a:rPr>
               <a:t>Rome V pozitif tanı</a:t>
             </a:r>
-            <a:endParaRPr lang="en-US" sz="1500" dirty="0"/>
+            <a:endParaRPr lang="en-US" sz="1600" dirty="0"/>
           </a:p>
           <a:p>
             <a:pPr indent="0" marL="0">
               <a:buNone/>
             </a:pPr>
             <a:r>
-              <a:rPr lang="en-US" sz="1400" dirty="0">
+              <a:rPr lang="en-US" sz="1500" dirty="0">
                 <a:solidFill>
                   <a:schemeClr val="tx1"/>
                 </a:solidFill>
@@ -17359,14 +17407,14 @@
               <a:t>SKS · ruminasyon · KBS · FD</a:t>
             </a:r>
             <a:r>
-              <a:rPr lang="en-US" sz="1400" baseline="30000" dirty="0">
+              <a:rPr lang="en-US" sz="1500" baseline="30000" dirty="0">
                 <a:solidFill>
                   <a:schemeClr val="accent4"/>
                 </a:solidFill>
               </a:rPr>
-              <a:t> [8]</a:t>
-            </a:r>
-            <a:endParaRPr lang="en-US" sz="1500" dirty="0"/>
+              <a:t> [8]</a:t>
+            </a:r>
+            <a:endParaRPr lang="en-US" sz="1600" dirty="0"/>
           </a:p>
         </p:txBody>
       </p:sp>
@@ -17378,12 +17426,12 @@
         </p:nvSpPr>
         <p:spPr>
           <a:xfrm>
-            <a:off x="6185916" y="5303520"/>
-            <a:ext cx="5454396" cy="868680"/>
+            <a:off x="6185916" y="5358384"/>
+            <a:ext cx="5454396" cy="822960"/>
           </a:xfrm>
           <a:prstGeom prst="roundRect">
             <a:avLst>
-              <a:gd name="adj" fmla="val 10526"/>
+              <a:gd name="adj" fmla="val 11111"/>
             </a:avLst>
           </a:prstGeom>
           <a:solidFill>
@@ -17405,8 +17453,8 @@
         </p:nvSpPr>
         <p:spPr>
           <a:xfrm>
-            <a:off x="6323076" y="5376672"/>
-            <a:ext cx="5180076" cy="722376"/>
+            <a:off x="6323076" y="5431536"/>
+            <a:ext cx="5180076" cy="676656"/>
           </a:xfrm>
           <a:prstGeom prst="rect">
             <a:avLst/>
@@ -17422,21 +17470,21 @@
               <a:buNone/>
             </a:pPr>
             <a:r>
-              <a:rPr lang="en-US" sz="1500" b="1" dirty="0">
+              <a:rPr lang="en-US" sz="1600" b="1" dirty="0">
                 <a:solidFill>
                   <a:schemeClr val="tx2"/>
                 </a:solidFill>
               </a:rPr>
               <a:t>Kronik günlük kusma (ÇIKARIM)</a:t>
             </a:r>
-            <a:endParaRPr lang="en-US" sz="1500" dirty="0"/>
+            <a:endParaRPr lang="en-US" sz="1600" dirty="0"/>
           </a:p>
           <a:p>
             <a:pPr indent="0" marL="0">
               <a:buNone/>
             </a:pPr>
             <a:r>
-              <a:rPr lang="en-US" sz="1400" dirty="0">
+              <a:rPr lang="en-US" sz="1500" dirty="0">
                 <a:solidFill>
                   <a:schemeClr val="tx1"/>
                 </a:solidFill>
@@ -17444,14 +17492,14 @@
               <a:t>Rome V pediatrikte karşılığı yok → araştırmayı sürdür</a:t>
             </a:r>
             <a:r>
-              <a:rPr lang="en-US" sz="1400" baseline="30000" dirty="0">
+              <a:rPr lang="en-US" sz="1500" baseline="30000" dirty="0">
                 <a:solidFill>
                   <a:schemeClr val="accent4"/>
                 </a:solidFill>
               </a:rPr>
-              <a:t> [8]</a:t>
-            </a:r>
-            <a:endParaRPr lang="en-US" sz="1500" dirty="0"/>
+              <a:t> [8]</a:t>
+            </a:r>
+            <a:endParaRPr lang="en-US" sz="1600" dirty="0"/>
           </a:p>
         </p:txBody>
       </p:sp>
@@ -17465,7 +17513,7 @@
         </p:nvSpPr>
         <p:spPr>
           <a:xfrm>
-            <a:off x="548640" y="6382512"/>
+            <a:off x="548640" y="6272784"/>
             <a:ext cx="10241280" cy="274320"/>
           </a:xfrm>
           <a:prstGeom prst="rect">
@@ -17482,14 +17530,14 @@
               <a:buNone/>
             </a:pPr>
             <a:r>
-              <a:rPr lang="en-US" sz="1000" dirty="0">
+              <a:rPr lang="en-US" sz="1100" dirty="0">
                 <a:solidFill>
                   <a:schemeClr val="accent4"/>
                 </a:solidFill>
               </a:rPr>
               <a:t>Kaynak no: 3,8,22–24,34,45,46,48,55,56 · tam liste sondaki kaynak slaytlarında</a:t>
             </a:r>
-            <a:endParaRPr lang="en-US" sz="1000" dirty="0"/>
+            <a:endParaRPr lang="en-US" sz="1100" dirty="0"/>
           </a:p>
         </p:txBody>
       </p:sp>
@@ -17505,7 +17553,7 @@
         </p:nvSpPr>
         <p:spPr>
           <a:xfrm>
-            <a:off x="11109960" y="6382512"/>
+            <a:off x="11109960" y="6272784"/>
             <a:ext cx="548640" cy="274320"/>
           </a:xfrm>
           <a:prstGeom prst="rect">
@@ -17521,7 +17569,7 @@
           <a:bodyPr/>
           <a:lstStyle>
             <a:lvl1pPr>
-              <a:defRPr sz="1000">
+              <a:defRPr sz="1100">
                 <a:solidFill>
                   <a:srgbClr val="5B6B73"/>
                 </a:solidFill>
@@ -17573,7 +17621,7 @@
         </p:nvSpPr>
         <p:spPr>
           <a:xfrm>
-            <a:off x="548640" y="228600"/>
+            <a:off x="548640" y="365760"/>
             <a:ext cx="8229600" cy="292608"/>
           </a:xfrm>
           <a:prstGeom prst="rect">
@@ -17611,7 +17659,7 @@
         </p:nvSpPr>
         <p:spPr>
           <a:xfrm>
-            <a:off x="548640" y="530352"/>
+            <a:off x="548640" y="640080"/>
             <a:ext cx="11091672" cy="914400"/>
           </a:xfrm>
           <a:prstGeom prst="rect">
@@ -17673,7 +17721,7 @@
                   <a:schemeClr val="tx1"/>
                 </a:solidFill>
               </a:rPr>
-              <a:t>135 SKS'li çocukta tetkikler 6'sında (%4,4) yönetimi değiştirdi; hasta başı ortalama fatura 6125 $ (2015, 3. basamak)</a:t>
+              <a:t>135 SKS'li çocukta tetkikler 6'sında (%4,4) yönetimi değiştirdi; hasta başı ortalama fatura 6125 $ (2015, 3. basamak)</a:t>
             </a:r>
             <a:r>
               <a:rPr lang="en-US" sz="2200" baseline="30000" dirty="0">
@@ -17681,7 +17729,7 @@
                   <a:schemeClr val="accent4"/>
                 </a:solidFill>
               </a:rPr>
-              <a:t>[65]</a:t>
+              <a:t>⁠[65]</a:t>
             </a:r>
             <a:endParaRPr lang="en-US" sz="2200" dirty="0"/>
           </a:p>
@@ -17699,7 +17747,7 @@
                   <a:schemeClr val="tx1"/>
                 </a:solidFill>
               </a:rPr>
-              <a:t>Fonksiyonel bulantılı 63 çocuk: 96 endoskopi, 199 radyolojik test, 4 kolesistektomi; çoğu tanısız</a:t>
+              <a:t>Fonksiyonel bulantılı 63 çocuk: 96 endoskopi, 199 radyolojik test, 4 kolesistektomi; çoğu tanısız</a:t>
             </a:r>
             <a:r>
               <a:rPr lang="en-US" sz="2200" baseline="30000" dirty="0">
@@ -17707,7 +17755,7 @@
                   <a:schemeClr val="accent4"/>
                 </a:solidFill>
               </a:rPr>
-              <a:t>[66]</a:t>
+              <a:t>⁠[66]</a:t>
             </a:r>
             <a:endParaRPr lang="en-US" sz="2200" dirty="0"/>
           </a:p>
@@ -17725,7 +17773,7 @@
                   <a:schemeClr val="tx1"/>
                 </a:solidFill>
               </a:rPr>
-              <a:t>Metabolik tetkik: 2/135 tanı değişikliği</a:t>
+              <a:t>Metabolik tetkik: 2/135 tanı değişikliği</a:t>
             </a:r>
             <a:r>
               <a:rPr lang="en-US" sz="2200" baseline="30000" dirty="0">
@@ -17733,7 +17781,7 @@
                   <a:schemeClr val="accent4"/>
                 </a:solidFill>
               </a:rPr>
-              <a:t>[65]</a:t>
+              <a:t>⁠[65]</a:t>
             </a:r>
             <a:endParaRPr lang="en-US" sz="2200" dirty="0"/>
           </a:p>
@@ -17846,7 +17894,7 @@
         </p:nvSpPr>
         <p:spPr>
           <a:xfrm>
-            <a:off x="548640" y="6382512"/>
+            <a:off x="548640" y="6272784"/>
             <a:ext cx="10241280" cy="274320"/>
           </a:xfrm>
           <a:prstGeom prst="rect">
@@ -17863,14 +17911,14 @@
               <a:buNone/>
             </a:pPr>
             <a:r>
-              <a:rPr lang="en-US" sz="1000" dirty="0">
+              <a:rPr lang="en-US" sz="1100" dirty="0">
                 <a:solidFill>
                   <a:schemeClr val="accent4"/>
                 </a:solidFill>
               </a:rPr>
               <a:t>Kaynak no: 65,66 · tam liste sondaki kaynak slaytlarında</a:t>
             </a:r>
-            <a:endParaRPr lang="en-US" sz="1000" dirty="0"/>
+            <a:endParaRPr lang="en-US" sz="1100" dirty="0"/>
           </a:p>
         </p:txBody>
       </p:sp>
@@ -17886,7 +17934,7 @@
         </p:nvSpPr>
         <p:spPr>
           <a:xfrm>
-            <a:off x="11109960" y="6382512"/>
+            <a:off x="11109960" y="6272784"/>
             <a:ext cx="548640" cy="274320"/>
           </a:xfrm>
           <a:prstGeom prst="rect">
@@ -17902,7 +17950,7 @@
           <a:bodyPr/>
           <a:lstStyle>
             <a:lvl1pPr>
-              <a:defRPr sz="1000">
+              <a:defRPr sz="1100">
                 <a:solidFill>
                   <a:srgbClr val="5B6B73"/>
                 </a:solidFill>
@@ -17954,7 +18002,7 @@
         </p:nvSpPr>
         <p:spPr>
           <a:xfrm>
-            <a:off x="548640" y="228600"/>
+            <a:off x="548640" y="365760"/>
             <a:ext cx="8229600" cy="292608"/>
           </a:xfrm>
           <a:prstGeom prst="rect">
@@ -17992,7 +18040,7 @@
         </p:nvSpPr>
         <p:spPr>
           <a:xfrm>
-            <a:off x="548640" y="530352"/>
+            <a:off x="548640" y="640080"/>
             <a:ext cx="11091672" cy="914400"/>
           </a:xfrm>
           <a:prstGeom prst="rect">
@@ -18014,7 +18062,21 @@
                   <a:schemeClr val="tx1"/>
                 </a:solidFill>
               </a:rPr>
-              <a:t>Kronik kusma bir tanı değil, bir paterndir; çocukta standart süre tanımı yok</a:t>
+              <a:t>Kronik kusma bir tanı değil, bir paterndir;</a:t>
+            </a:r>
+            <a:endParaRPr lang="en-US" sz="2600" dirty="0"/>
+          </a:p>
+          <a:p>
+            <a:pPr algn="l" indent="0" marL="0">
+              <a:buNone/>
+            </a:pPr>
+            <a:r>
+              <a:rPr lang="en-US" sz="2600" b="1" dirty="0">
+                <a:solidFill>
+                  <a:schemeClr val="tx1"/>
+                </a:solidFill>
+              </a:rPr>
+              <a:t>çocukta standart süre tanımı yok</a:t>
             </a:r>
             <a:endParaRPr lang="en-US" sz="2600" dirty="0"/>
           </a:p>
@@ -18054,7 +18116,7 @@
                   <a:schemeClr val="tx1"/>
                 </a:solidFill>
               </a:rPr>
-              <a:t>"Persistan kusma" literatürde tanımsız; 15 çalışmalık sistematik derleme ortak tanım bulamadı</a:t>
+              <a:t>"Persistan kusma" literatürde tanımsız; 15 çalışmalık sistematik derleme ortak tanım bulamadı</a:t>
             </a:r>
             <a:r>
               <a:rPr lang="en-US" sz="2200" baseline="30000" dirty="0">
@@ -18062,7 +18124,7 @@
                   <a:schemeClr val="accent4"/>
                 </a:solidFill>
               </a:rPr>
-              <a:t>[1]</a:t>
+              <a:t>⁠[1]</a:t>
             </a:r>
             <a:endParaRPr lang="en-US" sz="2200" dirty="0"/>
           </a:p>
@@ -18080,7 +18142,7 @@
                   <a:schemeClr val="tx1"/>
                 </a:solidFill>
               </a:rPr>
-              <a:t>UEG/ESNM 2025: &gt;4 hafta = kronik; pediatriye özgü değil</a:t>
+              <a:t>UEG/ESNM 2025: &gt;4 hafta = kronik; pediatriye özgü değil</a:t>
             </a:r>
             <a:r>
               <a:rPr lang="en-US" sz="2200" baseline="30000" dirty="0">
@@ -18088,7 +18150,7 @@
                   <a:schemeClr val="accent4"/>
                 </a:solidFill>
               </a:rPr>
-              <a:t>[2]</a:t>
+              <a:t>⁠[2]</a:t>
             </a:r>
             <a:endParaRPr lang="en-US" sz="2200" dirty="0"/>
           </a:p>
@@ -18106,7 +18168,7 @@
                   <a:schemeClr val="tx1"/>
                 </a:solidFill>
               </a:rPr>
-              <a:t>Araştırma tanımı örneği: 3 ayda 3 kusma epizodu</a:t>
+              <a:t>Araştırma tanımı örneği: 3 ayda 3 kusma epizodu</a:t>
             </a:r>
             <a:r>
               <a:rPr lang="en-US" sz="2200" baseline="30000" dirty="0">
@@ -18114,7 +18176,7 @@
                   <a:schemeClr val="accent4"/>
                 </a:solidFill>
               </a:rPr>
-              <a:t>[3]</a:t>
+              <a:t>⁠[3]</a:t>
             </a:r>
             <a:endParaRPr lang="en-US" sz="2200" dirty="0"/>
           </a:p>
@@ -18227,7 +18289,7 @@
         </p:nvSpPr>
         <p:spPr>
           <a:xfrm>
-            <a:off x="548640" y="6382512"/>
+            <a:off x="548640" y="6272784"/>
             <a:ext cx="10241280" cy="274320"/>
           </a:xfrm>
           <a:prstGeom prst="rect">
@@ -18244,14 +18306,14 @@
               <a:buNone/>
             </a:pPr>
             <a:r>
-              <a:rPr lang="en-US" sz="1000" dirty="0">
+              <a:rPr lang="en-US" sz="1100" dirty="0">
                 <a:solidFill>
                   <a:schemeClr val="accent4"/>
                 </a:solidFill>
               </a:rPr>
               <a:t>Kaynak no: 1–3 · tam liste sondaki kaynak slaytlarında</a:t>
             </a:r>
-            <a:endParaRPr lang="en-US" sz="1000" dirty="0"/>
+            <a:endParaRPr lang="en-US" sz="1100" dirty="0"/>
           </a:p>
         </p:txBody>
       </p:sp>
@@ -18267,7 +18329,7 @@
         </p:nvSpPr>
         <p:spPr>
           <a:xfrm>
-            <a:off x="11109960" y="6382512"/>
+            <a:off x="11109960" y="6272784"/>
             <a:ext cx="548640" cy="274320"/>
           </a:xfrm>
           <a:prstGeom prst="rect">
@@ -18283,7 +18345,7 @@
           <a:bodyPr/>
           <a:lstStyle>
             <a:lvl1pPr>
-              <a:defRPr sz="1000">
+              <a:defRPr sz="1100">
                 <a:solidFill>
                   <a:srgbClr val="5B6B73"/>
                 </a:solidFill>
@@ -18335,7 +18397,7 @@
         </p:nvSpPr>
         <p:spPr>
           <a:xfrm>
-            <a:off x="548640" y="228600"/>
+            <a:off x="548640" y="365760"/>
             <a:ext cx="8229600" cy="292608"/>
           </a:xfrm>
           <a:prstGeom prst="rect">
@@ -18373,7 +18435,7 @@
         </p:nvSpPr>
         <p:spPr>
           <a:xfrm>
-            <a:off x="548640" y="530352"/>
+            <a:off x="548640" y="640080"/>
             <a:ext cx="11091672" cy="914400"/>
           </a:xfrm>
           <a:prstGeom prst="rect">
@@ -18395,7 +18457,21 @@
                   <a:schemeClr val="tx1"/>
                 </a:solidFill>
               </a:rPr>
-              <a:t>Rome V: pozitif tanı, anatomik sınıflama; DGBI organik hastalıkla birlikte bulunabilir</a:t>
+              <a:t>Rome V: pozitif tanı, anatomik sınıflama;</a:t>
+            </a:r>
+            <a:endParaRPr lang="en-US" sz="2600" dirty="0"/>
+          </a:p>
+          <a:p>
+            <a:pPr algn="l" indent="0" marL="0">
+              <a:buNone/>
+            </a:pPr>
+            <a:r>
+              <a:rPr lang="en-US" sz="2600" b="1" dirty="0">
+                <a:solidFill>
+                  <a:schemeClr val="tx1"/>
+                </a:solidFill>
+              </a:rPr>
+              <a:t>DGBI organik hastalıkla birlikte bulunabilir</a:t>
             </a:r>
             <a:endParaRPr lang="en-US" sz="2600" dirty="0"/>
           </a:p>
@@ -18435,7 +18511,7 @@
                   <a:schemeClr val="tx1"/>
                 </a:solidFill>
               </a:rPr>
-              <a:t>Sınıflama yaş yerine anatomik bölge ve patofizyolojiye dayanıyor</a:t>
+              <a:t>Sınıflama yaş yerine anatomik bölge ve patofizyolojiye dayanıyor</a:t>
             </a:r>
             <a:r>
               <a:rPr lang="en-US" sz="2200" baseline="30000" dirty="0">
@@ -18443,7 +18519,7 @@
                   <a:schemeClr val="accent4"/>
                 </a:solidFill>
               </a:rPr>
-              <a:t>[67]</a:t>
+              <a:t>⁠[67]</a:t>
             </a:r>
             <a:endParaRPr lang="en-US" sz="2200" dirty="0"/>
           </a:p>
@@ -18461,7 +18537,7 @@
                   <a:schemeClr val="tx1"/>
                 </a:solidFill>
               </a:rPr>
-              <a:t>Testler kriterlerin birçoğunda daha büyük rol oynuyor (HRM, empedans)</a:t>
+              <a:t>Testler kriterlerin birçoğunda daha büyük rol oynuyor (HRM, empedans)</a:t>
             </a:r>
             <a:r>
               <a:rPr lang="en-US" sz="2200" baseline="30000" dirty="0">
@@ -18469,7 +18545,7 @@
                   <a:schemeClr val="accent4"/>
                 </a:solidFill>
               </a:rPr>
-              <a:t>[8]</a:t>
+              <a:t>⁠[8]</a:t>
             </a:r>
             <a:endParaRPr lang="en-US" sz="2200" dirty="0"/>
           </a:p>
@@ -18487,7 +18563,7 @@
                   <a:schemeClr val="tx1"/>
                 </a:solidFill>
               </a:rPr>
-              <a:t>DGBI, GİS semptomu yapan hastalıklarla birlikte bulunabilir</a:t>
+              <a:t>DGBI, GİS semptomu yapan hastalıklarla birlikte bulunabilir</a:t>
             </a:r>
             <a:r>
               <a:rPr lang="en-US" sz="2200" baseline="30000" dirty="0">
@@ -18495,7 +18571,7 @@
                   <a:schemeClr val="accent4"/>
                 </a:solidFill>
               </a:rPr>
-              <a:t>[68]</a:t>
+              <a:t>⁠[68]</a:t>
             </a:r>
             <a:endParaRPr lang="en-US" sz="2200" dirty="0"/>
           </a:p>
@@ -18513,7 +18589,7 @@
                   <a:schemeClr val="tx1"/>
                 </a:solidFill>
               </a:rPr>
-              <a:t>Çölyakta GFD'ye uyumlu 191 çocuğun %43'ünde DGBI</a:t>
+              <a:t>Çölyakta GFD'ye uyumlu 191 çocuğun %43'ünde DGBI</a:t>
             </a:r>
             <a:r>
               <a:rPr lang="en-US" sz="2200" baseline="30000" dirty="0">
@@ -18521,7 +18597,7 @@
                   <a:schemeClr val="accent4"/>
                 </a:solidFill>
               </a:rPr>
-              <a:t>[69]</a:t>
+              <a:t>⁠[69]</a:t>
             </a:r>
             <a:endParaRPr lang="en-US" sz="2200" dirty="0"/>
           </a:p>
@@ -18634,7 +18710,7 @@
         </p:nvSpPr>
         <p:spPr>
           <a:xfrm>
-            <a:off x="548640" y="6382512"/>
+            <a:off x="548640" y="6272784"/>
             <a:ext cx="10241280" cy="274320"/>
           </a:xfrm>
           <a:prstGeom prst="rect">
@@ -18651,14 +18727,14 @@
               <a:buNone/>
             </a:pPr>
             <a:r>
-              <a:rPr lang="en-US" sz="1000" dirty="0">
+              <a:rPr lang="en-US" sz="1100" dirty="0">
                 <a:solidFill>
                   <a:schemeClr val="accent4"/>
                 </a:solidFill>
               </a:rPr>
               <a:t>Kaynak no: 8,67–69 · tam liste sondaki kaynak slaytlarında</a:t>
             </a:r>
-            <a:endParaRPr lang="en-US" sz="1000" dirty="0"/>
+            <a:endParaRPr lang="en-US" sz="1100" dirty="0"/>
           </a:p>
         </p:txBody>
       </p:sp>
@@ -18674,7 +18750,7 @@
         </p:nvSpPr>
         <p:spPr>
           <a:xfrm>
-            <a:off x="11109960" y="6382512"/>
+            <a:off x="11109960" y="6272784"/>
             <a:ext cx="548640" cy="274320"/>
           </a:xfrm>
           <a:prstGeom prst="rect">
@@ -18690,7 +18766,7 @@
           <a:bodyPr/>
           <a:lstStyle>
             <a:lvl1pPr>
-              <a:defRPr sz="1000">
+              <a:defRPr sz="1100">
                 <a:solidFill>
                   <a:srgbClr val="5B6B73"/>
                 </a:solidFill>
@@ -18742,7 +18818,7 @@
         </p:nvSpPr>
         <p:spPr>
           <a:xfrm>
-            <a:off x="548640" y="228600"/>
+            <a:off x="548640" y="365760"/>
             <a:ext cx="8229600" cy="292608"/>
           </a:xfrm>
           <a:prstGeom prst="rect">
@@ -18780,7 +18856,7 @@
         </p:nvSpPr>
         <p:spPr>
           <a:xfrm>
-            <a:off x="548640" y="530352"/>
+            <a:off x="548640" y="640080"/>
             <a:ext cx="11091672" cy="914400"/>
           </a:xfrm>
           <a:prstGeom prst="rect">
@@ -18802,7 +18878,7 @@
                   <a:schemeClr val="tx1"/>
                 </a:solidFill>
               </a:rPr>
-              <a:t>Kusma alanında Rome IV → V: beş değişiklik</a:t>
+              <a:t>Kusma alanında Rome IV'ten Rome V'e: beş değişiklik</a:t>
             </a:r>
             <a:endParaRPr lang="en-US" sz="2600" dirty="0"/>
           </a:p>
@@ -19034,7 +19110,7 @@
                             <a:schemeClr val="tx1"/>
                           </a:solidFill>
                         </a:rPr>
-                        <a:t>Kronik bulantı sendromu; kriterler benzer, kusma tanım dışı</a:t>
+                        <a:t>Kronik bulantı sendromu; kriterler benzer, kusma tanım dışı</a:t>
                       </a:r>
                       <a:r>
                         <a:rPr lang="en-US" sz="1800" baseline="30000" dirty="0">
@@ -19042,7 +19118,7 @@
                             <a:schemeClr val="accent4"/>
                           </a:solidFill>
                         </a:rPr>
-                        <a:t>[8]</a:t>
+                        <a:t>⁠[8]</a:t>
                       </a:r>
                       <a:endParaRPr lang="en-US" sz="1200" dirty="0"/>
                     </a:p>
@@ -19166,7 +19242,7 @@
                             <a:schemeClr val="tx1"/>
                           </a:solidFill>
                         </a:rPr>
-                        <a:t>KHS, SKS'nin alt grubu</a:t>
+                        <a:t>KHS, SKS'nin alt grubu</a:t>
                       </a:r>
                       <a:r>
                         <a:rPr lang="en-US" sz="1800" baseline="30000" dirty="0">
@@ -19174,7 +19250,7 @@
                             <a:schemeClr val="accent4"/>
                           </a:solidFill>
                         </a:rPr>
-                        <a:t>[8]</a:t>
+                        <a:t>⁠[8]</a:t>
                       </a:r>
                       <a:endParaRPr lang="en-US" sz="1200" dirty="0"/>
                     </a:p>
@@ -19298,7 +19374,7 @@
                             <a:schemeClr val="tx1"/>
                           </a:solidFill>
                         </a:rPr>
-                        <a:t>Tek set; sıvı sonrası eklendi, öğürme dışlaması kalktı, GÖRH tedavisine yanıtsızlık</a:t>
+                        <a:t>Tek set; sıvı sonrası eklendi, öğürme dışlaması kalktı, GÖRH tedavisine yanıtsızlık</a:t>
                       </a:r>
                       <a:r>
                         <a:rPr lang="en-US" sz="1800" baseline="30000" dirty="0">
@@ -19306,7 +19382,7 @@
                             <a:schemeClr val="accent4"/>
                           </a:solidFill>
                         </a:rPr>
-                        <a:t>[8]</a:t>
+                        <a:t>⁠[8]</a:t>
                       </a:r>
                       <a:endParaRPr lang="en-US" sz="1200" dirty="0"/>
                     </a:p>
@@ -19369,7 +19445,7 @@
                             <a:schemeClr val="tx1"/>
                           </a:solidFill>
                         </a:rPr>
-                        <a:t>PDS haftada 1 gün</a:t>
+                        <a:t>PDS haftada 1 gün</a:t>
                       </a:r>
                       <a:endParaRPr lang="en-US" sz="1200" dirty="0"/>
                     </a:p>
@@ -19430,7 +19506,7 @@
                             <a:schemeClr val="tx1"/>
                           </a:solidFill>
                         </a:rPr>
-                        <a:t>Haftada 3 gün; postprandiyal = 2 saat içinde</a:t>
+                        <a:t>Haftada 3 gün; postprandiyal = 2 saat içinde</a:t>
                       </a:r>
                       <a:r>
                         <a:rPr lang="en-US" sz="1800" baseline="30000" dirty="0">
@@ -19438,7 +19514,7 @@
                             <a:schemeClr val="accent4"/>
                           </a:solidFill>
                         </a:rPr>
-                        <a:t>[8]</a:t>
+                        <a:t>⁠[8]</a:t>
                       </a:r>
                       <a:endParaRPr lang="en-US" sz="1200" dirty="0"/>
                     </a:p>
@@ -19562,7 +19638,7 @@
                             <a:schemeClr val="tx1"/>
                           </a:solidFill>
                         </a:rPr>
-                        <a:t>Kaldırıldı (İKİNCİL)</a:t>
+                        <a:t>Kaldırıldı (İKİNCİL)</a:t>
                       </a:r>
                       <a:r>
                         <a:rPr lang="en-US" sz="1800" baseline="30000" dirty="0">
@@ -19570,7 +19646,7 @@
                             <a:schemeClr val="accent4"/>
                           </a:solidFill>
                         </a:rPr>
-                        <a:t>[4]</a:t>
+                        <a:t>⁠[4]</a:t>
                       </a:r>
                       <a:endParaRPr lang="en-US" sz="1200" dirty="0"/>
                     </a:p>
@@ -19668,7 +19744,7 @@
         </p:nvSpPr>
         <p:spPr>
           <a:xfrm>
-            <a:off x="548640" y="6382512"/>
+            <a:off x="548640" y="6272784"/>
             <a:ext cx="10241280" cy="274320"/>
           </a:xfrm>
           <a:prstGeom prst="rect">
@@ -19685,14 +19761,14 @@
               <a:buNone/>
             </a:pPr>
             <a:r>
-              <a:rPr lang="en-US" sz="1000" dirty="0">
+              <a:rPr lang="en-US" sz="1100" dirty="0">
                 <a:solidFill>
                   <a:schemeClr val="accent4"/>
                 </a:solidFill>
               </a:rPr>
               <a:t>Kaynak no: 4,8 · tam liste sondaki kaynak slaytlarında</a:t>
             </a:r>
-            <a:endParaRPr lang="en-US" sz="1000" dirty="0"/>
+            <a:endParaRPr lang="en-US" sz="1100" dirty="0"/>
           </a:p>
         </p:txBody>
       </p:sp>
@@ -19708,7 +19784,7 @@
         </p:nvSpPr>
         <p:spPr>
           <a:xfrm>
-            <a:off x="11109960" y="6382512"/>
+            <a:off x="11109960" y="6272784"/>
             <a:ext cx="548640" cy="274320"/>
           </a:xfrm>
           <a:prstGeom prst="rect">
@@ -19724,7 +19800,7 @@
           <a:bodyPr/>
           <a:lstStyle>
             <a:lvl1pPr>
-              <a:defRPr sz="1000">
+              <a:defRPr sz="1100">
                 <a:solidFill>
                   <a:srgbClr val="5B6B73"/>
                 </a:solidFill>
@@ -19776,7 +19852,7 @@
         </p:nvSpPr>
         <p:spPr>
           <a:xfrm>
-            <a:off x="548640" y="228600"/>
+            <a:off x="548640" y="365760"/>
             <a:ext cx="8229600" cy="292608"/>
           </a:xfrm>
           <a:prstGeom prst="rect">
@@ -19814,7 +19890,7 @@
         </p:nvSpPr>
         <p:spPr>
           <a:xfrm>
-            <a:off x="548640" y="530352"/>
+            <a:off x="548640" y="640080"/>
             <a:ext cx="11091672" cy="914400"/>
           </a:xfrm>
           <a:prstGeom prst="rect">
@@ -19896,7 +19972,7 @@
                   <a:schemeClr val="tx1"/>
                 </a:solidFill>
               </a:rPr>
-              <a:t>Son 12 ayda 2 saat–7 gün süren ≥4 ayrı atak</a:t>
+              <a:t>Son 12 ayda 2 saat–7 gün süren ≥4 ayrı atak</a:t>
             </a:r>
             <a:endParaRPr lang="en-US" sz="1700" dirty="0"/>
           </a:p>
@@ -19915,7 +19991,7 @@
                   <a:schemeClr val="tx1"/>
                 </a:solidFill>
               </a:rPr>
-              <a:t>Ataklar arası en az 1 hafta</a:t>
+              <a:t>Ataklar arası en az 1 hafta</a:t>
             </a:r>
             <a:endParaRPr lang="en-US" sz="1700" dirty="0"/>
           </a:p>
@@ -19969,7 +20045,7 @@
                   <a:schemeClr val="tx1"/>
                 </a:solidFill>
               </a:rPr>
-              <a:t> açıklanamaz</a:t>
+              <a:t> açıklanamaz</a:t>
             </a:r>
             <a:r>
               <a:rPr lang="en-US" sz="1700" baseline="30000" dirty="0">
@@ -19977,7 +20053,7 @@
                   <a:schemeClr val="accent4"/>
                 </a:solidFill>
               </a:rPr>
-              <a:t>[8]</a:t>
+              <a:t>⁠[8]</a:t>
             </a:r>
             <a:endParaRPr lang="en-US" sz="1700" dirty="0"/>
           </a:p>
@@ -20029,7 +20105,7 @@
           <a:ln/>
         </p:spPr>
         <p:txBody>
-          <a:bodyPr wrap="square" lIns="76200" tIns="152400" rIns="152400" bIns="76200" rtlCol="0" anchor="t"/>
+          <a:bodyPr wrap="square" lIns="152400" tIns="76200" rIns="152400" bIns="76200" rtlCol="0" anchor="t"/>
           <a:lstStyle/>
           <a:p>
             <a:pPr indent="0" marL="0">
@@ -20041,7 +20117,7 @@
                   <a:schemeClr val="tx2"/>
                 </a:solidFill>
               </a:rPr>
-              <a:t>Eşlik eden özellikler (kutu başlığı doğrulanmadı): </a:t>
+              <a:t>Kutudaki ikinci liste (statüsü tam metinde belirtilmemiş): </a:t>
             </a:r>
             <a:r>
               <a:rPr lang="en-US" sz="1400" dirty="0">
@@ -20065,7 +20141,7 @@
         </p:nvSpPr>
         <p:spPr>
           <a:xfrm>
-            <a:off x="548640" y="6382512"/>
+            <a:off x="548640" y="6272784"/>
             <a:ext cx="10241280" cy="274320"/>
           </a:xfrm>
           <a:prstGeom prst="rect">
@@ -20082,14 +20158,14 @@
               <a:buNone/>
             </a:pPr>
             <a:r>
-              <a:rPr lang="en-US" sz="1000" dirty="0">
+              <a:rPr lang="en-US" sz="1100" dirty="0">
                 <a:solidFill>
                   <a:schemeClr val="accent4"/>
                 </a:solidFill>
               </a:rPr>
               <a:t>Kaynak no: 8 · tam liste sondaki kaynak slaytlarında</a:t>
             </a:r>
-            <a:endParaRPr lang="en-US" sz="1000" dirty="0"/>
+            <a:endParaRPr lang="en-US" sz="1100" dirty="0"/>
           </a:p>
         </p:txBody>
       </p:sp>
@@ -20105,7 +20181,7 @@
         </p:nvSpPr>
         <p:spPr>
           <a:xfrm>
-            <a:off x="11109960" y="6382512"/>
+            <a:off x="11109960" y="6272784"/>
             <a:ext cx="548640" cy="274320"/>
           </a:xfrm>
           <a:prstGeom prst="rect">
@@ -20121,7 +20197,7 @@
           <a:bodyPr/>
           <a:lstStyle>
             <a:lvl1pPr>
-              <a:defRPr sz="1000">
+              <a:defRPr sz="1100">
                 <a:solidFill>
                   <a:srgbClr val="5B6B73"/>
                 </a:solidFill>
@@ -20173,7 +20249,7 @@
         </p:nvSpPr>
         <p:spPr>
           <a:xfrm>
-            <a:off x="548640" y="228600"/>
+            <a:off x="548640" y="365760"/>
             <a:ext cx="8229600" cy="292608"/>
           </a:xfrm>
           <a:prstGeom prst="rect">
@@ -20211,7 +20287,7 @@
         </p:nvSpPr>
         <p:spPr>
           <a:xfrm>
-            <a:off x="548640" y="530352"/>
+            <a:off x="548640" y="640080"/>
             <a:ext cx="11091672" cy="914400"/>
           </a:xfrm>
           <a:prstGeom prst="rect">
@@ -20334,7 +20410,7 @@
                   <a:schemeClr val="tx1"/>
                 </a:solidFill>
               </a:rPr>
-              <a:t>≥2 ay, 3 aylıktan sonra</a:t>
+              <a:t>≥2 ay, 3 aylıktan sonra</a:t>
             </a:r>
             <a:endParaRPr lang="en-US" sz="1700" dirty="0"/>
           </a:p>
@@ -20406,7 +20482,7 @@
                   <a:schemeClr val="tx1"/>
                 </a:solidFill>
               </a:rPr>
-              <a:t>Yeme bozukluğu dışlanmalı</a:t>
+              <a:t>Yeme bozukluğu dışlanmalı</a:t>
             </a:r>
             <a:r>
               <a:rPr lang="en-US" sz="1700" baseline="30000" dirty="0">
@@ -20414,7 +20490,7 @@
                   <a:schemeClr val="accent4"/>
                 </a:solidFill>
               </a:rPr>
-              <a:t>[8]</a:t>
+              <a:t>⁠[8]</a:t>
             </a:r>
             <a:endParaRPr lang="en-US" sz="1700" dirty="0"/>
           </a:p>
@@ -20551,7 +20627,7 @@
                   <a:schemeClr val="tx1"/>
                 </a:solidFill>
               </a:rPr>
-              <a:t>≥2 ay</a:t>
+              <a:t>≥2 ay</a:t>
             </a:r>
             <a:r>
               <a:rPr lang="en-US" sz="1700" baseline="30000" dirty="0">
@@ -20559,7 +20635,7 @@
                   <a:schemeClr val="accent4"/>
                 </a:solidFill>
               </a:rPr>
-              <a:t>[8]</a:t>
+              <a:t>⁠[8]</a:t>
             </a:r>
             <a:endParaRPr lang="en-US" sz="1700" dirty="0"/>
           </a:p>
@@ -20678,7 +20754,7 @@
                   <a:schemeClr val="tx1"/>
                 </a:solidFill>
               </a:rPr>
-              <a:t>≥2 ay</a:t>
+              <a:t>≥2 ay</a:t>
             </a:r>
             <a:endParaRPr lang="en-US" sz="1700" dirty="0"/>
           </a:p>
@@ -20696,7 +20772,7 @@
                   <a:schemeClr val="tx1"/>
                 </a:solidFill>
               </a:rPr>
-              <a:t>PDS ≥3 gün/hafta, EPS ≥1 gün/hafta</a:t>
+              <a:t>PDS ≥3 gün/hafta, EPS ≥1 gün/hafta</a:t>
             </a:r>
             <a:r>
               <a:rPr lang="en-US" sz="1700" baseline="30000" dirty="0">
@@ -20704,7 +20780,7 @@
                   <a:schemeClr val="accent4"/>
                 </a:solidFill>
               </a:rPr>
-              <a:t>[8]</a:t>
+              <a:t>⁠[8]</a:t>
             </a:r>
             <a:endParaRPr lang="en-US" sz="1700" dirty="0"/>
           </a:p>
@@ -20737,7 +20813,7 @@
           </a:ln>
         </p:spPr>
         <p:txBody>
-          <a:bodyPr wrap="square" lIns="50800" tIns="177800" rIns="177800" bIns="50800" rtlCol="0" anchor="ctr"/>
+          <a:bodyPr wrap="square" lIns="177800" tIns="50800" rIns="177800" bIns="50800" rtlCol="0" anchor="ctr"/>
           <a:lstStyle/>
           <a:p>
             <a:pPr indent="0" marL="0">
@@ -20809,7 +20885,7 @@
         </p:nvSpPr>
         <p:spPr>
           <a:xfrm>
-            <a:off x="548640" y="6382512"/>
+            <a:off x="548640" y="6272784"/>
             <a:ext cx="10241280" cy="274320"/>
           </a:xfrm>
           <a:prstGeom prst="rect">
@@ -20826,14 +20902,14 @@
               <a:buNone/>
             </a:pPr>
             <a:r>
-              <a:rPr lang="en-US" sz="1000" dirty="0">
+              <a:rPr lang="en-US" sz="1100" dirty="0">
                 <a:solidFill>
                   <a:schemeClr val="accent4"/>
                 </a:solidFill>
               </a:rPr>
               <a:t>Kaynak no: 8 · tam liste sondaki kaynak slaytlarında</a:t>
             </a:r>
-            <a:endParaRPr lang="en-US" sz="1000" dirty="0"/>
+            <a:endParaRPr lang="en-US" sz="1100" dirty="0"/>
           </a:p>
         </p:txBody>
       </p:sp>
@@ -20849,7 +20925,7 @@
         </p:nvSpPr>
         <p:spPr>
           <a:xfrm>
-            <a:off x="11109960" y="6382512"/>
+            <a:off x="11109960" y="6272784"/>
             <a:ext cx="548640" cy="274320"/>
           </a:xfrm>
           <a:prstGeom prst="rect">
@@ -20865,7 +20941,7 @@
           <a:bodyPr/>
           <a:lstStyle>
             <a:lvl1pPr>
-              <a:defRPr sz="1000">
+              <a:defRPr sz="1100">
                 <a:solidFill>
                   <a:srgbClr val="5B6B73"/>
                 </a:solidFill>
@@ -20917,7 +20993,7 @@
         </p:nvSpPr>
         <p:spPr>
           <a:xfrm>
-            <a:off x="548640" y="228600"/>
+            <a:off x="548640" y="365760"/>
             <a:ext cx="8229600" cy="292608"/>
           </a:xfrm>
           <a:prstGeom prst="rect">
@@ -20955,7 +21031,7 @@
         </p:nvSpPr>
         <p:spPr>
           <a:xfrm>
-            <a:off x="548640" y="530352"/>
+            <a:off x="548640" y="640080"/>
             <a:ext cx="11091672" cy="914400"/>
           </a:xfrm>
           <a:prstGeom prst="rect">
@@ -21017,7 +21093,7 @@
                   <a:schemeClr val="tx1"/>
                 </a:solidFill>
               </a:rPr>
-              <a:t>Rome V: SKS benzeri ataklar; uzun (ör. 1–2 yıl), neredeyse günlük kullanım; ≥6 ay bırakmayla düzelme</a:t>
+              <a:t>Rome V: SKS benzeri ataklar; uzun (ör. 1–⁠2 yıl), neredeyse günlük kullanım; ≥6 ay bırakmayla düzelme</a:t>
             </a:r>
             <a:r>
               <a:rPr lang="en-US" sz="2200" baseline="30000" dirty="0">
@@ -21025,7 +21101,7 @@
                   <a:schemeClr val="accent4"/>
                 </a:solidFill>
               </a:rPr>
-              <a:t>[8]</a:t>
+              <a:t>⁠[8]</a:t>
             </a:r>
             <a:endParaRPr lang="en-US" sz="2200" dirty="0"/>
           </a:p>
@@ -21043,7 +21119,7 @@
                   <a:schemeClr val="tx1"/>
                 </a:solidFill>
               </a:rPr>
-              <a:t>Sıcak banyo SKS'de de görülür</a:t>
+              <a:t>Sıcak banyo SKS'de de görülür</a:t>
             </a:r>
             <a:r>
               <a:rPr lang="en-US" sz="2200" baseline="30000" dirty="0">
@@ -21051,7 +21127,7 @@
                   <a:schemeClr val="accent4"/>
                 </a:solidFill>
               </a:rPr>
-              <a:t>[8]</a:t>
+              <a:t>⁠[8]</a:t>
             </a:r>
             <a:endParaRPr lang="en-US" sz="2200" dirty="0"/>
           </a:p>
@@ -21131,7 +21207,7 @@
                   <a:schemeClr val="bg1"/>
                 </a:solidFill>
               </a:rPr>
-              <a:t>NASPGHAN 2025: ayrı antite</a:t>
+              <a:t>NASPGHAN 2025: ayrı antite</a:t>
             </a:r>
             <a:r>
               <a:rPr lang="en-US" sz="1700" baseline="30000" dirty="0">
@@ -21139,7 +21215,7 @@
                   <a:schemeClr val="bg1"/>
                 </a:solidFill>
               </a:rPr>
-              <a:t>[55]</a:t>
+              <a:t>⁠[55]</a:t>
             </a:r>
             <a:endParaRPr lang="en-US" sz="1700" dirty="0"/>
           </a:p>
@@ -21179,7 +21255,7 @@
                   <a:schemeClr val="bg1"/>
                 </a:solidFill>
               </a:rPr>
-              <a:t>Rome V erişkin: ayrı kod</a:t>
+              <a:t>Rome V erişkin: ayrı kod</a:t>
             </a:r>
             <a:r>
               <a:rPr lang="en-US" sz="1700" baseline="30000" dirty="0">
@@ -21187,7 +21263,7 @@
                   <a:schemeClr val="bg1"/>
                 </a:solidFill>
               </a:rPr>
-              <a:t>[70]</a:t>
+              <a:t>⁠[70]</a:t>
             </a:r>
             <a:endParaRPr lang="en-US" sz="1700" dirty="0"/>
           </a:p>
@@ -21203,7 +21279,7 @@
         </p:nvSpPr>
         <p:spPr>
           <a:xfrm>
-            <a:off x="548640" y="6382512"/>
+            <a:off x="548640" y="6272784"/>
             <a:ext cx="10241280" cy="274320"/>
           </a:xfrm>
           <a:prstGeom prst="rect">
@@ -21220,14 +21296,14 @@
               <a:buNone/>
             </a:pPr>
             <a:r>
-              <a:rPr lang="en-US" sz="1000" dirty="0">
+              <a:rPr lang="en-US" sz="1100" dirty="0">
                 <a:solidFill>
                   <a:schemeClr val="accent4"/>
                 </a:solidFill>
               </a:rPr>
               <a:t>Kaynak no: 8,55,70 · tam liste sondaki kaynak slaytlarında</a:t>
             </a:r>
-            <a:endParaRPr lang="en-US" sz="1000" dirty="0"/>
+            <a:endParaRPr lang="en-US" sz="1100" dirty="0"/>
           </a:p>
         </p:txBody>
       </p:sp>
@@ -21243,7 +21319,7 @@
         </p:nvSpPr>
         <p:spPr>
           <a:xfrm>
-            <a:off x="11109960" y="6382512"/>
+            <a:off x="11109960" y="6272784"/>
             <a:ext cx="548640" cy="274320"/>
           </a:xfrm>
           <a:prstGeom prst="rect">
@@ -21259,7 +21335,7 @@
           <a:bodyPr/>
           <a:lstStyle>
             <a:lvl1pPr>
-              <a:defRPr sz="1000">
+              <a:defRPr sz="1100">
                 <a:solidFill>
                   <a:srgbClr val="5B6B73"/>
                 </a:solidFill>
@@ -21311,7 +21387,7 @@
         </p:nvSpPr>
         <p:spPr>
           <a:xfrm>
-            <a:off x="548640" y="228600"/>
+            <a:off x="548640" y="365760"/>
             <a:ext cx="8229600" cy="292608"/>
           </a:xfrm>
           <a:prstGeom prst="rect">
@@ -21349,7 +21425,7 @@
         </p:nvSpPr>
         <p:spPr>
           <a:xfrm>
-            <a:off x="548640" y="530352"/>
+            <a:off x="548640" y="640080"/>
             <a:ext cx="11091672" cy="914400"/>
           </a:xfrm>
           <a:prstGeom prst="rect">
@@ -21411,7 +21487,7 @@
                   <a:schemeClr val="tx1"/>
                 </a:solidFill>
               </a:rPr>
-              <a:t>Rome V: atak şiddeti, yeti yitimi ve psikososyal etkiye göre basamaklı, bireysel tedavi</a:t>
+              <a:t>Rome V: atak şiddeti, yeti yitimi ve psikososyal etkiye göre basamaklı, bireysel tedavi</a:t>
             </a:r>
             <a:r>
               <a:rPr lang="en-US" sz="2200" baseline="30000" dirty="0">
@@ -21419,7 +21495,7 @@
                   <a:schemeClr val="accent4"/>
                 </a:solidFill>
               </a:rPr>
-              <a:t>[8]</a:t>
+              <a:t>⁠[8]</a:t>
             </a:r>
             <a:endParaRPr lang="en-US" sz="2200" dirty="0"/>
           </a:p>
@@ -21437,7 +21513,7 @@
                   <a:schemeClr val="tx1"/>
                 </a:solidFill>
               </a:rPr>
-              <a:t>Ebeveynlerin %78'i pozitif tanı ve bilgilendirmenin kusma şiddetini etkilediğini düşündü (n=41)</a:t>
+              <a:t>Ebeveynlerin %78'i pozitif tanı ve bilgilendirmenin kusma şiddetini etkilediğini düşündü (n=41)</a:t>
             </a:r>
             <a:r>
               <a:rPr lang="en-US" sz="2200" baseline="30000" dirty="0">
@@ -21445,7 +21521,7 @@
                   <a:schemeClr val="accent4"/>
                 </a:solidFill>
               </a:rPr>
-              <a:t>[15]</a:t>
+              <a:t>⁠[15]</a:t>
             </a:r>
             <a:endParaRPr lang="en-US" sz="2200" dirty="0"/>
           </a:p>
@@ -21463,7 +21539,7 @@
                   <a:schemeClr val="tx1"/>
                 </a:solidFill>
               </a:rPr>
-              <a:t>Türkiye kohortu (n=119): yaşam tarzı uyumu %73,9 ve başarıyı öngördürüyor</a:t>
+              <a:t>Türkiye kohortu (n=119): yaşam tarzı uyumu %73,9 ve başarıyı öngördürüyor</a:t>
             </a:r>
             <a:r>
               <a:rPr lang="en-US" sz="2200" baseline="30000" dirty="0">
@@ -21471,7 +21547,7 @@
                   <a:schemeClr val="accent4"/>
                 </a:solidFill>
               </a:rPr>
-              <a:t>[71]</a:t>
+              <a:t>⁠[71]</a:t>
             </a:r>
             <a:endParaRPr lang="en-US" sz="2200" dirty="0"/>
           </a:p>
@@ -21620,7 +21696,7 @@
         </p:nvSpPr>
         <p:spPr>
           <a:xfrm>
-            <a:off x="548640" y="6382512"/>
+            <a:off x="548640" y="6272784"/>
             <a:ext cx="10241280" cy="274320"/>
           </a:xfrm>
           <a:prstGeom prst="rect">
@@ -21637,14 +21713,14 @@
               <a:buNone/>
             </a:pPr>
             <a:r>
-              <a:rPr lang="en-US" sz="1000" dirty="0">
+              <a:rPr lang="en-US" sz="1100" dirty="0">
                 <a:solidFill>
                   <a:schemeClr val="accent4"/>
                 </a:solidFill>
               </a:rPr>
               <a:t>Kaynak no: 8,15,71 · tam liste sondaki kaynak slaytlarında</a:t>
             </a:r>
-            <a:endParaRPr lang="en-US" sz="1000" dirty="0"/>
+            <a:endParaRPr lang="en-US" sz="1100" dirty="0"/>
           </a:p>
         </p:txBody>
       </p:sp>
@@ -21660,7 +21736,7 @@
         </p:nvSpPr>
         <p:spPr>
           <a:xfrm>
-            <a:off x="11109960" y="6382512"/>
+            <a:off x="11109960" y="6272784"/>
             <a:ext cx="548640" cy="274320"/>
           </a:xfrm>
           <a:prstGeom prst="rect">
@@ -21676,7 +21752,7 @@
           <a:bodyPr/>
           <a:lstStyle>
             <a:lvl1pPr>
-              <a:defRPr sz="1000">
+              <a:defRPr sz="1100">
                 <a:solidFill>
                   <a:srgbClr val="5B6B73"/>
                 </a:solidFill>
@@ -21728,7 +21804,7 @@
         </p:nvSpPr>
         <p:spPr>
           <a:xfrm>
-            <a:off x="548640" y="228600"/>
+            <a:off x="548640" y="365760"/>
             <a:ext cx="8229600" cy="292608"/>
           </a:xfrm>
           <a:prstGeom prst="rect">
@@ -21766,7 +21842,7 @@
         </p:nvSpPr>
         <p:spPr>
           <a:xfrm>
-            <a:off x="548640" y="530352"/>
+            <a:off x="548640" y="640080"/>
             <a:ext cx="11091672" cy="914400"/>
           </a:xfrm>
           <a:prstGeom prst="rect">
@@ -21844,7 +21920,7 @@
                   <a:schemeClr val="accent4"/>
                 </a:solidFill>
               </a:rPr>
-              <a:t>[72]</a:t>
+              <a:t>⁠[72]</a:t>
             </a:r>
             <a:endParaRPr lang="en-US" sz="2200" dirty="0"/>
           </a:p>
@@ -21862,7 +21938,7 @@
                   <a:schemeClr val="tx1"/>
                 </a:solidFill>
               </a:rPr>
-              <a:t>5-HT3 ve NK-1 antagonistleri; IV gerektiğinde erken başvuru: koşullu öneri</a:t>
+              <a:t>5-HT3 ve NK-1 antagonistleri; IV gerektiğinde erken başvuru: koşullu öneri</a:t>
             </a:r>
             <a:r>
               <a:rPr lang="en-US" sz="2200" baseline="30000" dirty="0">
@@ -21870,7 +21946,7 @@
                   <a:schemeClr val="accent4"/>
                 </a:solidFill>
               </a:rPr>
-              <a:t>[72]</a:t>
+              <a:t>⁠[72]</a:t>
             </a:r>
             <a:endParaRPr lang="en-US" sz="2200" dirty="0"/>
           </a:p>
@@ -21888,7 +21964,7 @@
                   <a:schemeClr val="tx1"/>
                 </a:solidFill>
               </a:rPr>
-              <a:t>Dekstroz: D10 geleneksel (2008); 2025 paneli D10/D5 üstünlüğüne karar veremedi</a:t>
+              <a:t>Dekstroz: D10 geleneksel (2008); 2025 paneli D10/D5 üstünlüğüne karar veremedi</a:t>
             </a:r>
             <a:r>
               <a:rPr lang="en-US" sz="2200" baseline="30000" dirty="0">
@@ -21896,7 +21972,7 @@
                   <a:schemeClr val="accent4"/>
                 </a:solidFill>
               </a:rPr>
-              <a:t>[12,73]</a:t>
+              <a:t>⁠[12,73]</a:t>
             </a:r>
             <a:endParaRPr lang="en-US" sz="2200" dirty="0"/>
           </a:p>
@@ -21914,7 +21990,7 @@
                   <a:schemeClr val="tx1"/>
                 </a:solidFill>
               </a:rPr>
-              <a:t>&gt;24 saat gecikme yatışın en güçlü öngördürücüsü</a:t>
+              <a:t>&gt;24 saat gecikme yatışın en güçlü öngördürücüsü</a:t>
             </a:r>
             <a:r>
               <a:rPr lang="en-US" sz="2200" baseline="30000" dirty="0">
@@ -21922,7 +21998,7 @@
                   <a:schemeClr val="accent4"/>
                 </a:solidFill>
               </a:rPr>
-              <a:t>[73]</a:t>
+              <a:t>⁠[73]</a:t>
             </a:r>
             <a:endParaRPr lang="en-US" sz="2200" dirty="0"/>
           </a:p>
@@ -22034,7 +22110,7 @@
         <p:spPr>
           <a:xfrm>
             <a:off x="8001000" y="4114800"/>
-            <a:ext cx="3639312" cy="822960"/>
+            <a:ext cx="3639312" cy="868680"/>
           </a:xfrm>
           <a:prstGeom prst="rect">
             <a:avLst/>
@@ -22045,7 +22121,7 @@
           <a:ln/>
         </p:spPr>
         <p:txBody>
-          <a:bodyPr wrap="square" lIns="76200" tIns="76200" rIns="76200" bIns="76200" rtlCol="0" anchor="t"/>
+          <a:bodyPr wrap="square" lIns="127000" tIns="127000" rIns="127000" bIns="127000" rtlCol="0" anchor="t"/>
           <a:lstStyle/>
           <a:p>
             <a:pPr indent="0" marL="0">
@@ -22073,7 +22149,7 @@
         </p:nvSpPr>
         <p:spPr>
           <a:xfrm>
-            <a:off x="548640" y="6382512"/>
+            <a:off x="548640" y="6272784"/>
             <a:ext cx="10241280" cy="274320"/>
           </a:xfrm>
           <a:prstGeom prst="rect">
@@ -22090,14 +22166,14 @@
               <a:buNone/>
             </a:pPr>
             <a:r>
-              <a:rPr lang="en-US" sz="1000" dirty="0">
+              <a:rPr lang="en-US" sz="1100" dirty="0">
                 <a:solidFill>
                   <a:schemeClr val="accent4"/>
                 </a:solidFill>
               </a:rPr>
               <a:t>Kaynak no: 12,72,73 · tam liste sondaki kaynak slaytlarında</a:t>
             </a:r>
-            <a:endParaRPr lang="en-US" sz="1000" dirty="0"/>
+            <a:endParaRPr lang="en-US" sz="1100" dirty="0"/>
           </a:p>
         </p:txBody>
       </p:sp>
@@ -22113,7 +22189,7 @@
         </p:nvSpPr>
         <p:spPr>
           <a:xfrm>
-            <a:off x="11109960" y="6382512"/>
+            <a:off x="11109960" y="6272784"/>
             <a:ext cx="548640" cy="274320"/>
           </a:xfrm>
           <a:prstGeom prst="rect">
@@ -22129,7 +22205,7 @@
           <a:bodyPr/>
           <a:lstStyle>
             <a:lvl1pPr>
-              <a:defRPr sz="1000">
+              <a:defRPr sz="1100">
                 <a:solidFill>
                   <a:srgbClr val="5B6B73"/>
                 </a:solidFill>
@@ -22181,7 +22257,7 @@
         </p:nvSpPr>
         <p:spPr>
           <a:xfrm>
-            <a:off x="548640" y="228600"/>
+            <a:off x="548640" y="365760"/>
             <a:ext cx="8229600" cy="292608"/>
           </a:xfrm>
           <a:prstGeom prst="rect">
@@ -22219,7 +22295,7 @@
         </p:nvSpPr>
         <p:spPr>
           <a:xfrm>
-            <a:off x="548640" y="530352"/>
+            <a:off x="548640" y="640080"/>
             <a:ext cx="11091672" cy="914400"/>
           </a:xfrm>
           <a:prstGeom prst="rect">
@@ -22241,7 +22317,21 @@
                   <a:schemeClr val="tx1"/>
                 </a:solidFill>
               </a:rPr>
-              <a:t>SKS profilaksisi: 2025'te dört ilaç sınıfı, 2008 yaş şeması tarihsel</a:t>
+              <a:t>SKS profilaksisi:</a:t>
+            </a:r>
+            <a:endParaRPr lang="en-US" sz="2600" dirty="0"/>
+          </a:p>
+          <a:p>
+            <a:pPr algn="l" indent="0" marL="0">
+              <a:buNone/>
+            </a:pPr>
+            <a:r>
+              <a:rPr lang="en-US" sz="2600" b="1" dirty="0">
+                <a:solidFill>
+                  <a:schemeClr val="tx1"/>
+                </a:solidFill>
+              </a:rPr>
+              <a:t>2025'te dört ilaç sınıfı, 2008 yaş şeması tarihsel</a:t>
             </a:r>
             <a:endParaRPr lang="en-US" sz="2600" dirty="0"/>
           </a:p>
@@ -22281,7 +22371,7 @@
                   <a:schemeClr val="tx1"/>
                 </a:solidFill>
               </a:rPr>
-              <a:t>NASPGHAN 2025: propranolol, siproheptadin, aprepitant, TSA: koşullu; antikonvülzan yalnız refrakterde</a:t>
+              <a:t>NASPGHAN 2025: propranolol, siproheptadin, aprepitant, TSA: koşullu; antikonvülzan yalnız refrakterde</a:t>
             </a:r>
             <a:r>
               <a:rPr lang="en-US" sz="2200" baseline="30000" dirty="0">
@@ -22289,7 +22379,7 @@
                   <a:schemeClr val="accent4"/>
                 </a:solidFill>
               </a:rPr>
-              <a:t>[72,73]</a:t>
+              <a:t>⁠[72,73]</a:t>
             </a:r>
             <a:endParaRPr lang="en-US" sz="2200" dirty="0"/>
           </a:p>
@@ -22307,7 +22397,7 @@
                   <a:schemeClr val="tx1"/>
                 </a:solidFill>
               </a:rPr>
-              <a:t>RCT (n=64, plasebosuz): tam remisyon amitriptilin %65,6 vs siproheptadin %50; yaş etkisi yok</a:t>
+              <a:t>RCT (n=64, plasebosuz): tam remisyon amitriptilin %65,6 vs siproheptadin %50; yaş etkisi yok</a:t>
             </a:r>
             <a:r>
               <a:rPr lang="en-US" sz="2200" baseline="30000" dirty="0">
@@ -22315,7 +22405,7 @@
                   <a:schemeClr val="accent4"/>
                 </a:solidFill>
               </a:rPr>
-              <a:t>[74]</a:t>
+              <a:t>⁠[74]</a:t>
             </a:r>
             <a:endParaRPr lang="en-US" sz="2200" dirty="0"/>
           </a:p>
@@ -22333,7 +22423,7 @@
                   <a:schemeClr val="tx1"/>
                 </a:solidFill>
               </a:rPr>
-              <a:t>Amitriptilin 1,0–1,5 mg/kg/gün (İKİNCİL); düşük dozdan titrasyon, EKG/QTc (UZMAN)</a:t>
+              <a:t>Amitriptilin 1,0–⁠1,5 mg/kg/gün (İKİNCİL); düşük dozdan titrasyon, EKG/QTc (UZMAN)</a:t>
             </a:r>
             <a:r>
               <a:rPr lang="en-US" sz="2200" baseline="30000" dirty="0">
@@ -22341,7 +22431,7 @@
                   <a:schemeClr val="accent4"/>
                 </a:solidFill>
               </a:rPr>
-              <a:t>[26,73]</a:t>
+              <a:t>⁠[26,73]</a:t>
             </a:r>
             <a:endParaRPr lang="en-US" sz="2200" dirty="0"/>
           </a:p>
@@ -22466,7 +22556,7 @@
           <a:ln/>
         </p:spPr>
         <p:txBody>
-          <a:bodyPr wrap="square" lIns="50800" tIns="177800" rIns="177800" bIns="50800" rtlCol="0" anchor="ctr"/>
+          <a:bodyPr wrap="square" lIns="177800" tIns="50800" rIns="177800" bIns="50800" rtlCol="0" anchor="ctr"/>
           <a:lstStyle/>
           <a:p>
             <a:pPr indent="0" marL="0">
@@ -22486,7 +22576,7 @@
                   <a:schemeClr val="accent4"/>
                 </a:solidFill>
               </a:rPr>
-              <a:t>2008: ≤5 yaş siproheptadin, &gt;5 yaş amitriptilin (tarihsel)</a:t>
+              <a:t>2008: ≤5 yaş siproheptadin, &gt;5 yaş amitriptilin (tarihsel)</a:t>
             </a:r>
             <a:r>
               <a:rPr lang="en-US" sz="1500" baseline="30000" dirty="0">
@@ -22494,7 +22584,7 @@
                   <a:schemeClr val="accent4"/>
                 </a:solidFill>
               </a:rPr>
-              <a:t>[12]</a:t>
+              <a:t>⁠[12]</a:t>
             </a:r>
             <a:endParaRPr lang="en-US" sz="1500" dirty="0"/>
           </a:p>
@@ -22510,7 +22600,7 @@
         </p:nvSpPr>
         <p:spPr>
           <a:xfrm>
-            <a:off x="548640" y="6382512"/>
+            <a:off x="548640" y="6272784"/>
             <a:ext cx="10241280" cy="274320"/>
           </a:xfrm>
           <a:prstGeom prst="rect">
@@ -22527,14 +22617,14 @@
               <a:buNone/>
             </a:pPr>
             <a:r>
-              <a:rPr lang="en-US" sz="1000" dirty="0">
+              <a:rPr lang="en-US" sz="1100" dirty="0">
                 <a:solidFill>
                   <a:schemeClr val="accent4"/>
                 </a:solidFill>
               </a:rPr>
               <a:t>Kaynak no: 12,26,72–74 · tam liste sondaki kaynak slaytlarında</a:t>
             </a:r>
-            <a:endParaRPr lang="en-US" sz="1000" dirty="0"/>
+            <a:endParaRPr lang="en-US" sz="1100" dirty="0"/>
           </a:p>
         </p:txBody>
       </p:sp>
@@ -22550,7 +22640,7 @@
         </p:nvSpPr>
         <p:spPr>
           <a:xfrm>
-            <a:off x="11109960" y="6382512"/>
+            <a:off x="11109960" y="6272784"/>
             <a:ext cx="548640" cy="274320"/>
           </a:xfrm>
           <a:prstGeom prst="rect">
@@ -22566,7 +22656,7 @@
           <a:bodyPr/>
           <a:lstStyle>
             <a:lvl1pPr>
-              <a:defRPr sz="1000">
+              <a:defRPr sz="1100">
                 <a:solidFill>
                   <a:srgbClr val="5B6B73"/>
                 </a:solidFill>
@@ -22618,7 +22708,7 @@
         </p:nvSpPr>
         <p:spPr>
           <a:xfrm>
-            <a:off x="548640" y="228600"/>
+            <a:off x="548640" y="365760"/>
             <a:ext cx="8229600" cy="292608"/>
           </a:xfrm>
           <a:prstGeom prst="rect">
@@ -22656,7 +22746,7 @@
         </p:nvSpPr>
         <p:spPr>
           <a:xfrm>
-            <a:off x="548640" y="530352"/>
+            <a:off x="548640" y="640080"/>
             <a:ext cx="11091672" cy="914400"/>
           </a:xfrm>
           <a:prstGeom prst="rect">
@@ -22718,7 +22808,7 @@
                   <a:schemeClr val="tx1"/>
                 </a:solidFill>
               </a:rPr>
-              <a:t>Aprepitant (refrakter, n=41, retrospektif): yanıt %76–81</a:t>
+              <a:t>Aprepitant (refrakter, n=41, retrospektif): yanıt %76–⁠81</a:t>
             </a:r>
             <a:r>
               <a:rPr lang="en-US" sz="2200" baseline="30000" dirty="0">
@@ -22726,7 +22816,7 @@
                   <a:schemeClr val="accent4"/>
                 </a:solidFill>
               </a:rPr>
-              <a:t>[75]</a:t>
+              <a:t>⁠[75]</a:t>
             </a:r>
             <a:r>
               <a:rPr lang="en-US" sz="2200" dirty="0">
@@ -22734,7 +22824,7 @@
                   <a:schemeClr val="tx1"/>
                 </a:solidFill>
               </a:rPr>
-              <a:t>; OKS etkinliğini azaltabilir</a:t>
+              <a:t>; OKS etkinliğini azaltabilir</a:t>
             </a:r>
             <a:r>
               <a:rPr lang="en-US" sz="2200" baseline="30000" dirty="0">
@@ -22742,7 +22832,7 @@
                   <a:schemeClr val="accent4"/>
                 </a:solidFill>
               </a:rPr>
-              <a:t>[73]</a:t>
+              <a:t>⁠[73]</a:t>
             </a:r>
             <a:endParaRPr lang="en-US" sz="2200" dirty="0"/>
           </a:p>
@@ -22760,7 +22850,7 @@
                   <a:schemeClr val="tx1"/>
                 </a:solidFill>
               </a:rPr>
-              <a:t>Topiramat: RCT'de atak kesilmesi %39 (amitriptilin %68)</a:t>
+              <a:t>Topiramat: RCT'de atak kesilmesi %39 (amitriptilin %68)</a:t>
             </a:r>
             <a:r>
               <a:rPr lang="en-US" sz="2200" baseline="30000" dirty="0">
@@ -22768,7 +22858,7 @@
                   <a:schemeClr val="accent4"/>
                 </a:solidFill>
               </a:rPr>
-              <a:t>[76]</a:t>
+              <a:t>⁠[76]</a:t>
             </a:r>
             <a:r>
               <a:rPr lang="en-US" sz="2200" dirty="0">
@@ -22776,7 +22866,7 @@
                   <a:schemeClr val="tx1"/>
                 </a:solidFill>
               </a:rPr>
-              <a:t>; Türkiye serisinde %81</a:t>
+              <a:t>; Türkiye serisinde %81</a:t>
             </a:r>
             <a:r>
               <a:rPr lang="en-US" sz="2200" baseline="30000" dirty="0">
@@ -22784,7 +22874,7 @@
                   <a:schemeClr val="accent4"/>
                 </a:solidFill>
               </a:rPr>
-              <a:t>[77]</a:t>
+              <a:t>⁠[77]</a:t>
             </a:r>
             <a:endParaRPr lang="en-US" sz="2200" dirty="0"/>
           </a:p>
@@ -22802,7 +22892,7 @@
                   <a:schemeClr val="tx1"/>
                 </a:solidFill>
               </a:rPr>
-              <a:t>PENFS (n=30, kontrolsüz): %80 yanıt</a:t>
+              <a:t>PENFS (n=30, kontrolsüz): %80 yanıt</a:t>
             </a:r>
             <a:r>
               <a:rPr lang="en-US" sz="2200" baseline="30000" dirty="0">
@@ -22810,7 +22900,7 @@
                   <a:schemeClr val="accent4"/>
                 </a:solidFill>
               </a:rPr>
-              <a:t>[78]</a:t>
+              <a:t>⁠[78]</a:t>
             </a:r>
             <a:endParaRPr lang="en-US" sz="2200" dirty="0"/>
           </a:p>
@@ -22828,7 +22918,7 @@
                   <a:schemeClr val="tx1"/>
                 </a:solidFill>
               </a:rPr>
-              <a:t>Katamenial SKS: düşük östrojenli OKS/medroksiprogesteron (UZMAN)</a:t>
+              <a:t>Katamenial SKS: düşük östrojenli OKS/medroksiprogesteron (UZMAN)</a:t>
             </a:r>
             <a:r>
               <a:rPr lang="en-US" sz="2200" baseline="30000" dirty="0">
@@ -22836,7 +22926,7 @@
                   <a:schemeClr val="accent4"/>
                 </a:solidFill>
               </a:rPr>
-              <a:t>[26]</a:t>
+              <a:t>⁠[26]</a:t>
             </a:r>
             <a:endParaRPr lang="en-US" sz="2200" dirty="0"/>
           </a:p>
@@ -22985,7 +23075,7 @@
         </p:nvSpPr>
         <p:spPr>
           <a:xfrm>
-            <a:off x="548640" y="6382512"/>
+            <a:off x="548640" y="6272784"/>
             <a:ext cx="10241280" cy="274320"/>
           </a:xfrm>
           <a:prstGeom prst="rect">
@@ -23002,14 +23092,14 @@
               <a:buNone/>
             </a:pPr>
             <a:r>
-              <a:rPr lang="en-US" sz="1000" dirty="0">
+              <a:rPr lang="en-US" sz="1100" dirty="0">
                 <a:solidFill>
                   <a:schemeClr val="accent4"/>
                 </a:solidFill>
               </a:rPr>
               <a:t>Kaynak no: 26,73,75–78 · tam liste sondaki kaynak slaytlarında</a:t>
             </a:r>
-            <a:endParaRPr lang="en-US" sz="1000" dirty="0"/>
+            <a:endParaRPr lang="en-US" sz="1100" dirty="0"/>
           </a:p>
         </p:txBody>
       </p:sp>
@@ -23025,7 +23115,7 @@
         </p:nvSpPr>
         <p:spPr>
           <a:xfrm>
-            <a:off x="11109960" y="6382512"/>
+            <a:off x="11109960" y="6272784"/>
             <a:ext cx="548640" cy="274320"/>
           </a:xfrm>
           <a:prstGeom prst="rect">
@@ -23041,7 +23131,7 @@
           <a:bodyPr/>
           <a:lstStyle>
             <a:lvl1pPr>
-              <a:defRPr sz="1000">
+              <a:defRPr sz="1100">
                 <a:solidFill>
                   <a:srgbClr val="5B6B73"/>
                 </a:solidFill>
@@ -23093,7 +23183,7 @@
         </p:nvSpPr>
         <p:spPr>
           <a:xfrm>
-            <a:off x="548640" y="228600"/>
+            <a:off x="548640" y="365760"/>
             <a:ext cx="8229600" cy="292608"/>
           </a:xfrm>
           <a:prstGeom prst="rect">
@@ -23131,7 +23221,7 @@
         </p:nvSpPr>
         <p:spPr>
           <a:xfrm>
-            <a:off x="548640" y="530352"/>
+            <a:off x="548640" y="640080"/>
             <a:ext cx="11091672" cy="914400"/>
           </a:xfrm>
           <a:prstGeom prst="rect">
@@ -23193,7 +23283,7 @@
                   <a:schemeClr val="tx1"/>
                 </a:solidFill>
               </a:rPr>
-              <a:t>Mekanizmayı açıkla, güvence ver: %23 yalnız danışmanlıkla düzeldi</a:t>
+              <a:t>Mekanizmayı açıkla, güvence ver: %23 yalnız danışmanlıkla düzeldi</a:t>
             </a:r>
             <a:r>
               <a:rPr lang="en-US" sz="2200" baseline="30000" dirty="0">
@@ -23201,7 +23291,7 @@
                   <a:schemeClr val="accent4"/>
                 </a:solidFill>
               </a:rPr>
-              <a:t>[8]</a:t>
+              <a:t>⁠[8]</a:t>
             </a:r>
             <a:endParaRPr lang="en-US" sz="2200" dirty="0"/>
           </a:p>
@@ -23219,7 +23309,7 @@
                   <a:schemeClr val="tx1"/>
                 </a:solidFill>
               </a:rPr>
-              <a:t>Diyafragmatik solunum birinci basamak</a:t>
+              <a:t>Diyafragmatik solunum birinci basamak</a:t>
             </a:r>
             <a:r>
               <a:rPr lang="en-US" sz="2200" baseline="30000" dirty="0">
@@ -23227,7 +23317,7 @@
                   <a:schemeClr val="accent4"/>
                 </a:solidFill>
               </a:rPr>
-              <a:t>[8]</a:t>
+              <a:t>⁠[8]</a:t>
             </a:r>
             <a:r>
               <a:rPr lang="en-US" sz="2200" dirty="0">
@@ -23235,7 +23325,7 @@
                   <a:schemeClr val="tx1"/>
                 </a:solidFill>
               </a:rPr>
-              <a:t>; pediatrik etkinlik verisi sınırlı</a:t>
+              <a:t>; pediatrik etkinlik verisi sınırlı</a:t>
             </a:r>
             <a:r>
               <a:rPr lang="en-US" sz="2200" baseline="30000" dirty="0">
@@ -23243,7 +23333,7 @@
                   <a:schemeClr val="accent4"/>
                 </a:solidFill>
               </a:rPr>
-              <a:t>[79]</a:t>
+              <a:t>⁠[79]</a:t>
             </a:r>
             <a:endParaRPr lang="en-US" sz="2200" dirty="0"/>
           </a:p>
@@ -23261,7 +23351,7 @@
                   <a:schemeClr val="tx1"/>
                 </a:solidFill>
               </a:rPr>
-              <a:t>Ayaktan BDT (8–18 y): %87 düzelme, %73,9 tam çözülme</a:t>
+              <a:t>Ayaktan BDT (8–⁠18 y): %87 düzelme, %73,9 tam çözülme</a:t>
             </a:r>
             <a:r>
               <a:rPr lang="en-US" sz="2200" baseline="30000" dirty="0">
@@ -23269,7 +23359,7 @@
                   <a:schemeClr val="accent4"/>
                 </a:solidFill>
               </a:rPr>
-              <a:t>[80]</a:t>
+              <a:t>⁠[80]</a:t>
             </a:r>
             <a:endParaRPr lang="en-US" sz="2200" dirty="0"/>
           </a:p>
@@ -23287,7 +23377,7 @@
                   <a:schemeClr val="tx1"/>
                 </a:solidFill>
               </a:rPr>
-              <a:t>Baklofen ek tedavi olabilir (retrospektif, ~%50)</a:t>
+              <a:t>Baklofen ek tedavi olabilir (retrospektif, ~%50)</a:t>
             </a:r>
             <a:r>
               <a:rPr lang="en-US" sz="2200" baseline="30000" dirty="0">
@@ -23295,7 +23385,7 @@
                   <a:schemeClr val="accent4"/>
                 </a:solidFill>
               </a:rPr>
-              <a:t>[8]</a:t>
+              <a:t>⁠[8]</a:t>
             </a:r>
             <a:endParaRPr lang="en-US" sz="2200" dirty="0"/>
           </a:p>
@@ -23436,7 +23526,7 @@
                   <a:schemeClr val="accent4"/>
                 </a:solidFill>
               </a:rPr>
-              <a:t>[81]</a:t>
+              <a:t>⁠[81]</a:t>
             </a:r>
             <a:r>
               <a:rPr lang="en-US" sz="1100" i="1" dirty="0">
@@ -23444,7 +23534,7 @@
                   <a:schemeClr val="accent4"/>
                 </a:solidFill>
               </a:rPr>
-              <a:t> ve baklofen</a:t>
+              <a:t> ve baklofen</a:t>
             </a:r>
             <a:r>
               <a:rPr lang="en-US" sz="1100" i="1" baseline="30000" dirty="0">
@@ -23452,7 +23542,7 @@
                   <a:schemeClr val="accent4"/>
                 </a:solidFill>
               </a:rPr>
-              <a:t>[82]</a:t>
+              <a:t>⁠[82]</a:t>
             </a:r>
             <a:r>
               <a:rPr lang="en-US" sz="1100" i="1" dirty="0">
@@ -23460,7 +23550,7 @@
                   <a:schemeClr val="accent4"/>
                 </a:solidFill>
               </a:rPr>
-              <a:t> RCT'leri ERİŞKİN; anti-reflü cerrahi ve botulinum rutin önerilmez</a:t>
+              <a:t> RCT'leri ERİŞKİN; anti-reflü cerrahi ve botulinum rutin önerilmez</a:t>
             </a:r>
             <a:r>
               <a:rPr lang="en-US" sz="1100" i="1" baseline="30000" dirty="0">
@@ -23468,7 +23558,7 @@
                   <a:schemeClr val="accent4"/>
                 </a:solidFill>
               </a:rPr>
-              <a:t>[8]</a:t>
+              <a:t>⁠[8]</a:t>
             </a:r>
             <a:r>
               <a:rPr lang="en-US" sz="1100" i="1" dirty="0">
@@ -23492,7 +23582,7 @@
         </p:nvSpPr>
         <p:spPr>
           <a:xfrm>
-            <a:off x="548640" y="6382512"/>
+            <a:off x="548640" y="6272784"/>
             <a:ext cx="10241280" cy="274320"/>
           </a:xfrm>
           <a:prstGeom prst="rect">
@@ -23509,14 +23599,14 @@
               <a:buNone/>
             </a:pPr>
             <a:r>
-              <a:rPr lang="en-US" sz="1000" dirty="0">
+              <a:rPr lang="en-US" sz="1100" dirty="0">
                 <a:solidFill>
                   <a:schemeClr val="accent4"/>
                 </a:solidFill>
               </a:rPr>
               <a:t>Kaynak no: 8,79–82 · tam liste sondaki kaynak slaytlarında</a:t>
             </a:r>
-            <a:endParaRPr lang="en-US" sz="1000" dirty="0"/>
+            <a:endParaRPr lang="en-US" sz="1100" dirty="0"/>
           </a:p>
         </p:txBody>
       </p:sp>
@@ -23532,7 +23622,7 @@
         </p:nvSpPr>
         <p:spPr>
           <a:xfrm>
-            <a:off x="11109960" y="6382512"/>
+            <a:off x="11109960" y="6272784"/>
             <a:ext cx="548640" cy="274320"/>
           </a:xfrm>
           <a:prstGeom prst="rect">
@@ -23548,7 +23638,7 @@
           <a:bodyPr/>
           <a:lstStyle>
             <a:lvl1pPr>
-              <a:defRPr sz="1000">
+              <a:defRPr sz="1100">
                 <a:solidFill>
                   <a:srgbClr val="5B6B73"/>
                 </a:solidFill>
@@ -23600,7 +23690,7 @@
         </p:nvSpPr>
         <p:spPr>
           <a:xfrm>
-            <a:off x="548640" y="228600"/>
+            <a:off x="548640" y="365760"/>
             <a:ext cx="8229600" cy="292608"/>
           </a:xfrm>
           <a:prstGeom prst="rect">
@@ -23638,7 +23728,7 @@
         </p:nvSpPr>
         <p:spPr>
           <a:xfrm>
-            <a:off x="548640" y="530352"/>
+            <a:off x="548640" y="640080"/>
             <a:ext cx="11091672" cy="914400"/>
           </a:xfrm>
           <a:prstGeom prst="rect">
@@ -23700,7 +23790,7 @@
                   <a:schemeClr val="tx1"/>
                 </a:solidFill>
               </a:rPr>
-              <a:t>4 ülke, n=7718 (bakım veren anketi): DGBI %28,0; üst GİS DGBI %8,7</a:t>
+              <a:t>4 ülke, n=7718 (bakım veren anketi): DGBI %28,0; üst GİS DGBI %8,7</a:t>
             </a:r>
             <a:r>
               <a:rPr lang="en-US" sz="2200" baseline="30000" dirty="0">
@@ -23708,7 +23798,7 @@
                   <a:schemeClr val="accent4"/>
                 </a:solidFill>
               </a:rPr>
-              <a:t>[4]</a:t>
+              <a:t>⁠[4]</a:t>
             </a:r>
             <a:endParaRPr lang="en-US" sz="2200" dirty="0"/>
           </a:p>
@@ -23726,7 +23816,7 @@
                   <a:schemeClr val="tx1"/>
                 </a:solidFill>
               </a:rPr>
-              <a:t>SKS: Türkiye okul taraması %1,9</a:t>
+              <a:t>SKS: Türkiye okul taraması %1,9</a:t>
             </a:r>
             <a:r>
               <a:rPr lang="en-US" sz="2200" baseline="30000" dirty="0">
@@ -23734,7 +23824,7 @@
                   <a:schemeClr val="accent4"/>
                 </a:solidFill>
               </a:rPr>
-              <a:t>[5]</a:t>
+              <a:t>⁠[5]</a:t>
             </a:r>
             <a:r>
               <a:rPr lang="en-US" sz="2200" dirty="0">
@@ -23742,7 +23832,7 @@
                   <a:schemeClr val="tx1"/>
                 </a:solidFill>
               </a:rPr>
-              <a:t>; Rome V anketi ≈%1</a:t>
+              <a:t>; Rome V anketi ≈%1</a:t>
             </a:r>
             <a:r>
               <a:rPr lang="en-US" sz="2200" baseline="30000" dirty="0">
@@ -23750,7 +23840,7 @@
                   <a:schemeClr val="accent4"/>
                 </a:solidFill>
               </a:rPr>
-              <a:t>[4]</a:t>
+              <a:t>⁠[4]</a:t>
             </a:r>
             <a:endParaRPr lang="en-US" sz="2200" dirty="0"/>
           </a:p>
@@ -23768,7 +23858,7 @@
                   <a:schemeClr val="tx1"/>
                 </a:solidFill>
               </a:rPr>
-              <a:t>Tanıya kadar: ort. 2 ± 1,8 yıl (İran)</a:t>
+              <a:t>Tanıya kadar: ort. 2 ± 1,8 yıl (İran)</a:t>
             </a:r>
             <a:r>
               <a:rPr lang="en-US" sz="2200" baseline="30000" dirty="0">
@@ -23776,7 +23866,7 @@
                   <a:schemeClr val="accent4"/>
                 </a:solidFill>
               </a:rPr>
-              <a:t>[6]</a:t>
+              <a:t>⁠[6]</a:t>
             </a:r>
             <a:r>
               <a:rPr lang="en-US" sz="2200" dirty="0">
@@ -23784,7 +23874,7 @@
                   <a:schemeClr val="tx1"/>
                 </a:solidFill>
               </a:rPr>
-              <a:t> · medyan 1,2 yıl (Hindistan)</a:t>
+              <a:t> · medyan 1,2 yıl (Hindistan)</a:t>
             </a:r>
             <a:r>
               <a:rPr lang="en-US" sz="2200" baseline="30000" dirty="0">
@@ -23792,7 +23882,7 @@
                   <a:schemeClr val="accent4"/>
                 </a:solidFill>
               </a:rPr>
-              <a:t>[7]</a:t>
+              <a:t>⁠[7]</a:t>
             </a:r>
             <a:endParaRPr lang="en-US" sz="2200" dirty="0"/>
           </a:p>
@@ -23941,7 +24031,7 @@
         </p:nvSpPr>
         <p:spPr>
           <a:xfrm>
-            <a:off x="548640" y="6382512"/>
+            <a:off x="548640" y="6272784"/>
             <a:ext cx="10241280" cy="274320"/>
           </a:xfrm>
           <a:prstGeom prst="rect">
@@ -23958,14 +24048,14 @@
               <a:buNone/>
             </a:pPr>
             <a:r>
-              <a:rPr lang="en-US" sz="1000" dirty="0">
+              <a:rPr lang="en-US" sz="1100" dirty="0">
                 <a:solidFill>
                   <a:schemeClr val="accent4"/>
                 </a:solidFill>
               </a:rPr>
               <a:t>Kaynak no: 4–7 · tam liste sondaki kaynak slaytlarında</a:t>
             </a:r>
-            <a:endParaRPr lang="en-US" sz="1000" dirty="0"/>
+            <a:endParaRPr lang="en-US" sz="1100" dirty="0"/>
           </a:p>
         </p:txBody>
       </p:sp>
@@ -23981,7 +24071,7 @@
         </p:nvSpPr>
         <p:spPr>
           <a:xfrm>
-            <a:off x="11109960" y="6382512"/>
+            <a:off x="11109960" y="6272784"/>
             <a:ext cx="548640" cy="274320"/>
           </a:xfrm>
           <a:prstGeom prst="rect">
@@ -23997,7 +24087,7 @@
           <a:bodyPr/>
           <a:lstStyle>
             <a:lvl1pPr>
-              <a:defRPr sz="1000">
+              <a:defRPr sz="1100">
                 <a:solidFill>
                   <a:srgbClr val="5B6B73"/>
                 </a:solidFill>
@@ -24049,7 +24139,7 @@
         </p:nvSpPr>
         <p:spPr>
           <a:xfrm>
-            <a:off x="548640" y="228600"/>
+            <a:off x="548640" y="365760"/>
             <a:ext cx="8229600" cy="292608"/>
           </a:xfrm>
           <a:prstGeom prst="rect">
@@ -24087,7 +24177,7 @@
         </p:nvSpPr>
         <p:spPr>
           <a:xfrm>
-            <a:off x="548640" y="530352"/>
+            <a:off x="548640" y="640080"/>
             <a:ext cx="11091672" cy="914400"/>
           </a:xfrm>
           <a:prstGeom prst="rect">
@@ -24149,7 +24239,7 @@
                   <a:schemeClr val="tx1"/>
                 </a:solidFill>
               </a:rPr>
-              <a:t>Pediatrik FD/kronik bulantıda ilaç lehine RCT kanıtı yok (SR)</a:t>
+              <a:t>Pediatrik FD/kronik bulantıda ilaç lehine RCT kanıtı yok (SR)</a:t>
             </a:r>
             <a:r>
               <a:rPr lang="en-US" sz="2200" baseline="30000" dirty="0">
@@ -24157,7 +24247,7 @@
                   <a:schemeClr val="accent4"/>
                 </a:solidFill>
               </a:rPr>
-              <a:t>[83]</a:t>
+              <a:t>⁠[83]</a:t>
             </a:r>
             <a:endParaRPr lang="en-US" sz="2200" dirty="0"/>
           </a:p>
@@ -24175,7 +24265,7 @@
                   <a:schemeClr val="tx1"/>
                 </a:solidFill>
               </a:rPr>
-              <a:t>Amitriptilin (n=90) plaseboya üstün değil</a:t>
+              <a:t>Amitriptilin (n=90) plaseboya üstün değil</a:t>
             </a:r>
             <a:r>
               <a:rPr lang="en-US" sz="2200" baseline="30000" dirty="0">
@@ -24183,7 +24273,7 @@
                   <a:schemeClr val="accent4"/>
                 </a:solidFill>
               </a:rPr>
-              <a:t>[84]</a:t>
+              <a:t>⁠[84]</a:t>
             </a:r>
             <a:endParaRPr lang="en-US" sz="2200" dirty="0"/>
           </a:p>
@@ -24201,7 +24291,7 @@
                   <a:schemeClr val="tx1"/>
                 </a:solidFill>
               </a:rPr>
-              <a:t>Hipnoterapi (n=100): 12. ayda %60 vs %55; fonksiyonel bulantıda üstün</a:t>
+              <a:t>Hipnoterapi (n=100): 12. ayda %60 vs %55; fonksiyonel bulantıda üstün</a:t>
             </a:r>
             <a:r>
               <a:rPr lang="en-US" sz="2200" baseline="30000" dirty="0">
@@ -24209,7 +24299,7 @@
                   <a:schemeClr val="accent4"/>
                 </a:solidFill>
               </a:rPr>
-              <a:t>[85]</a:t>
+              <a:t>⁠[85]</a:t>
             </a:r>
             <a:endParaRPr lang="en-US" sz="2200" dirty="0"/>
           </a:p>
@@ -24227,7 +24317,7 @@
                   <a:schemeClr val="tx1"/>
                 </a:solidFill>
               </a:rPr>
-              <a:t>Dirençli olguda mirtazapin (retrospektif %82)</a:t>
+              <a:t>Dirençli olguda mirtazapin (retrospektif %82)</a:t>
             </a:r>
             <a:r>
               <a:rPr lang="en-US" sz="2200" baseline="30000" dirty="0">
@@ -24235,7 +24325,7 @@
                   <a:schemeClr val="accent4"/>
                 </a:solidFill>
               </a:rPr>
-              <a:t>[86]</a:t>
+              <a:t>⁠[86]</a:t>
             </a:r>
             <a:r>
               <a:rPr lang="en-US" sz="2200" dirty="0">
@@ -24243,7 +24333,7 @@
                   <a:schemeClr val="tx1"/>
                 </a:solidFill>
               </a:rPr>
-              <a:t>; POTS'ta sıvı, tuz, uyku, egzersiz</a:t>
+              <a:t>; POTS'ta sıvı, tuz, uyku, egzersiz</a:t>
             </a:r>
             <a:r>
               <a:rPr lang="en-US" sz="2200" baseline="30000" dirty="0">
@@ -24251,7 +24341,7 @@
                   <a:schemeClr val="accent4"/>
                 </a:solidFill>
               </a:rPr>
-              <a:t>[8]</a:t>
+              <a:t>⁠[8]</a:t>
             </a:r>
             <a:endParaRPr lang="en-US" sz="2200" dirty="0"/>
           </a:p>
@@ -24364,7 +24454,7 @@
         </p:nvSpPr>
         <p:spPr>
           <a:xfrm>
-            <a:off x="548640" y="6382512"/>
+            <a:off x="548640" y="6272784"/>
             <a:ext cx="10241280" cy="274320"/>
           </a:xfrm>
           <a:prstGeom prst="rect">
@@ -24381,14 +24471,14 @@
               <a:buNone/>
             </a:pPr>
             <a:r>
-              <a:rPr lang="en-US" sz="1000" dirty="0">
+              <a:rPr lang="en-US" sz="1100" dirty="0">
                 <a:solidFill>
                   <a:schemeClr val="accent4"/>
                 </a:solidFill>
               </a:rPr>
               <a:t>Kaynak no: 8,83–86 · tam liste sondaki kaynak slaytlarında</a:t>
             </a:r>
-            <a:endParaRPr lang="en-US" sz="1000" dirty="0"/>
+            <a:endParaRPr lang="en-US" sz="1100" dirty="0"/>
           </a:p>
         </p:txBody>
       </p:sp>
@@ -24404,7 +24494,7 @@
         </p:nvSpPr>
         <p:spPr>
           <a:xfrm>
-            <a:off x="11109960" y="6382512"/>
+            <a:off x="11109960" y="6272784"/>
             <a:ext cx="548640" cy="274320"/>
           </a:xfrm>
           <a:prstGeom prst="rect">
@@ -24420,7 +24510,7 @@
           <a:bodyPr/>
           <a:lstStyle>
             <a:lvl1pPr>
-              <a:defRPr sz="1000">
+              <a:defRPr sz="1100">
                 <a:solidFill>
                   <a:srgbClr val="5B6B73"/>
                 </a:solidFill>
@@ -24472,7 +24562,7 @@
         </p:nvSpPr>
         <p:spPr>
           <a:xfrm>
-            <a:off x="548640" y="228600"/>
+            <a:off x="548640" y="365760"/>
             <a:ext cx="8229600" cy="292608"/>
           </a:xfrm>
           <a:prstGeom prst="rect">
@@ -24510,7 +24600,7 @@
         </p:nvSpPr>
         <p:spPr>
           <a:xfrm>
-            <a:off x="548640" y="530352"/>
+            <a:off x="548640" y="640080"/>
             <a:ext cx="11091672" cy="914400"/>
           </a:xfrm>
           <a:prstGeom prst="rect">
@@ -24572,7 +24662,7 @@
                   <a:schemeClr val="tx1"/>
                 </a:solidFill>
               </a:rPr>
-              <a:t>Doğrulanmış yatış kriteri yok. Öngördürücü: erkek, küçük yaş, &gt;24 sa gecikme, antiemetik öncesi bekleme</a:t>
+              <a:t>Doğrulanmış yatış kriteri yok. Öngördürücü: erkek, küçük yaş, &gt;24 sa gecikme, antiemetik öncesi bekleme</a:t>
             </a:r>
             <a:r>
               <a:rPr lang="en-US" sz="2200" baseline="30000" dirty="0">
@@ -24580,7 +24670,7 @@
                   <a:schemeClr val="accent4"/>
                 </a:solidFill>
               </a:rPr>
-              <a:t>[87]</a:t>
+              <a:t>⁠[87]</a:t>
             </a:r>
             <a:endParaRPr lang="en-US" sz="2200" dirty="0"/>
           </a:p>
@@ -24598,7 +24688,7 @@
                   <a:schemeClr val="tx1"/>
                 </a:solidFill>
               </a:rPr>
-              <a:t>Rome V (SKS): bayrak ya da 2 ayda yanıtsızlıkta testle destekle</a:t>
+              <a:t>Rome V (SKS): bayrak ya da 2 ayda yanıtsızlıkta testle destekle</a:t>
             </a:r>
             <a:r>
               <a:rPr lang="en-US" sz="2200" baseline="30000" dirty="0">
@@ -24606,7 +24696,7 @@
                   <a:schemeClr val="accent4"/>
                 </a:solidFill>
               </a:rPr>
-              <a:t>[8]</a:t>
+              <a:t>⁠[8]</a:t>
             </a:r>
             <a:endParaRPr lang="en-US" sz="2200" dirty="0"/>
           </a:p>
@@ -24624,7 +24714,7 @@
                   <a:schemeClr val="tx1"/>
                 </a:solidFill>
               </a:rPr>
-              <a:t>18 yaş, erişkin Rome V: PDS 2 gün/hafta; ruminasyonda öğürme dışlanır; KHS ayrı kod</a:t>
+              <a:t>18 yaş, erişkin Rome V: PDS 2 gün/hafta; ruminasyonda öğürme dışlanır; KHS ayrı kod</a:t>
             </a:r>
             <a:r>
               <a:rPr lang="en-US" sz="2200" baseline="30000" dirty="0">
@@ -24632,7 +24722,7 @@
                   <a:schemeClr val="accent4"/>
                 </a:solidFill>
               </a:rPr>
-              <a:t>[70]</a:t>
+              <a:t>⁠[70]</a:t>
             </a:r>
             <a:endParaRPr lang="en-US" sz="2200" dirty="0"/>
           </a:p>
@@ -24729,7 +24819,7 @@
         <p:spPr>
           <a:xfrm>
             <a:off x="8001000" y="4114800"/>
-            <a:ext cx="3639312" cy="822960"/>
+            <a:ext cx="3639312" cy="868680"/>
           </a:xfrm>
           <a:prstGeom prst="rect">
             <a:avLst/>
@@ -24740,7 +24830,7 @@
           <a:ln/>
         </p:spPr>
         <p:txBody>
-          <a:bodyPr wrap="square" lIns="76200" tIns="76200" rIns="76200" bIns="76200" rtlCol="0" anchor="t"/>
+          <a:bodyPr wrap="square" lIns="127000" tIns="127000" rIns="127000" bIns="127000" rtlCol="0" anchor="t"/>
           <a:lstStyle/>
           <a:p>
             <a:pPr indent="0" marL="0">
@@ -24768,7 +24858,7 @@
         </p:nvSpPr>
         <p:spPr>
           <a:xfrm>
-            <a:off x="548640" y="6382512"/>
+            <a:off x="548640" y="6272784"/>
             <a:ext cx="10241280" cy="274320"/>
           </a:xfrm>
           <a:prstGeom prst="rect">
@@ -24785,14 +24875,14 @@
               <a:buNone/>
             </a:pPr>
             <a:r>
-              <a:rPr lang="en-US" sz="1000" dirty="0">
+              <a:rPr lang="en-US" sz="1100" dirty="0">
                 <a:solidFill>
                   <a:schemeClr val="accent4"/>
                 </a:solidFill>
               </a:rPr>
               <a:t>Kaynak no: 8,70,87 · tam liste sondaki kaynak slaytlarında</a:t>
             </a:r>
-            <a:endParaRPr lang="en-US" sz="1000" dirty="0"/>
+            <a:endParaRPr lang="en-US" sz="1100" dirty="0"/>
           </a:p>
         </p:txBody>
       </p:sp>
@@ -24808,7 +24898,7 @@
         </p:nvSpPr>
         <p:spPr>
           <a:xfrm>
-            <a:off x="11109960" y="6382512"/>
+            <a:off x="11109960" y="6272784"/>
             <a:ext cx="548640" cy="274320"/>
           </a:xfrm>
           <a:prstGeom prst="rect">
@@ -24824,7 +24914,7 @@
           <a:bodyPr/>
           <a:lstStyle>
             <a:lvl1pPr>
-              <a:defRPr sz="1000">
+              <a:defRPr sz="1100">
                 <a:solidFill>
                   <a:srgbClr val="5B6B73"/>
                 </a:solidFill>
@@ -24876,7 +24966,7 @@
         </p:nvSpPr>
         <p:spPr>
           <a:xfrm>
-            <a:off x="548640" y="228600"/>
+            <a:off x="548640" y="365760"/>
             <a:ext cx="8229600" cy="292608"/>
           </a:xfrm>
           <a:prstGeom prst="rect">
@@ -24914,7 +25004,7 @@
         </p:nvSpPr>
         <p:spPr>
           <a:xfrm>
-            <a:off x="548640" y="530352"/>
+            <a:off x="548640" y="640080"/>
             <a:ext cx="11091672" cy="914400"/>
           </a:xfrm>
           <a:prstGeom prst="rect">
@@ -26496,7 +26586,7 @@
         </p:nvSpPr>
         <p:spPr>
           <a:xfrm>
-            <a:off x="548640" y="6382512"/>
+            <a:off x="548640" y="6272784"/>
             <a:ext cx="10241280" cy="274320"/>
           </a:xfrm>
           <a:prstGeom prst="rect">
@@ -26513,14 +26603,14 @@
               <a:buNone/>
             </a:pPr>
             <a:r>
-              <a:rPr lang="en-US" sz="1000" dirty="0">
+              <a:rPr lang="en-US" sz="1100" dirty="0">
                 <a:solidFill>
                   <a:schemeClr val="accent4"/>
                 </a:solidFill>
               </a:rPr>
               <a:t>Kaynak no: 12,55,72,73,88 · tam liste sondaki kaynak slaytlarında</a:t>
             </a:r>
-            <a:endParaRPr lang="en-US" sz="1000" dirty="0"/>
+            <a:endParaRPr lang="en-US" sz="1100" dirty="0"/>
           </a:p>
         </p:txBody>
       </p:sp>
@@ -26536,7 +26626,7 @@
         </p:nvSpPr>
         <p:spPr>
           <a:xfrm>
-            <a:off x="11109960" y="6382512"/>
+            <a:off x="11109960" y="6272784"/>
             <a:ext cx="548640" cy="274320"/>
           </a:xfrm>
           <a:prstGeom prst="rect">
@@ -26552,7 +26642,7 @@
           <a:bodyPr/>
           <a:lstStyle>
             <a:lvl1pPr>
-              <a:defRPr sz="1000">
+              <a:defRPr sz="1100">
                 <a:solidFill>
                   <a:srgbClr val="5B6B73"/>
                 </a:solidFill>
@@ -27037,7 +27127,7 @@
         </p:nvSpPr>
         <p:spPr>
           <a:xfrm>
-            <a:off x="548640" y="320040"/>
+            <a:off x="548640" y="640080"/>
             <a:ext cx="11091672" cy="548640"/>
           </a:xfrm>
           <a:prstGeom prst="rect">
@@ -27073,8 +27163,8 @@
         </p:nvSpPr>
         <p:spPr>
           <a:xfrm>
-            <a:off x="548640" y="960120"/>
-            <a:ext cx="5440680" cy="5349240"/>
+            <a:off x="548640" y="1325880"/>
+            <a:ext cx="5440680" cy="4846320"/>
           </a:xfrm>
           <a:prstGeom prst="rect">
             <a:avLst/>
@@ -27265,8 +27355,8 @@
         </p:nvSpPr>
         <p:spPr>
           <a:xfrm>
-            <a:off x="6217920" y="960120"/>
-            <a:ext cx="5440680" cy="5349240"/>
+            <a:off x="6217920" y="1325880"/>
+            <a:ext cx="5440680" cy="4846320"/>
           </a:xfrm>
           <a:prstGeom prst="rect">
             <a:avLst/>
@@ -27461,7 +27551,7 @@
         </p:nvSpPr>
         <p:spPr>
           <a:xfrm>
-            <a:off x="11109960" y="6382512"/>
+            <a:off x="11109960" y="6272784"/>
             <a:ext cx="548640" cy="274320"/>
           </a:xfrm>
           <a:prstGeom prst="rect">
@@ -27477,7 +27567,7 @@
           <a:bodyPr/>
           <a:lstStyle>
             <a:lvl1pPr>
-              <a:defRPr sz="1000">
+              <a:defRPr sz="1100">
                 <a:solidFill>
                   <a:srgbClr val="5B6B73"/>
                 </a:solidFill>
@@ -27529,7 +27619,7 @@
         </p:nvSpPr>
         <p:spPr>
           <a:xfrm>
-            <a:off x="548640" y="320040"/>
+            <a:off x="548640" y="640080"/>
             <a:ext cx="11091672" cy="548640"/>
           </a:xfrm>
           <a:prstGeom prst="rect">
@@ -27565,8 +27655,8 @@
         </p:nvSpPr>
         <p:spPr>
           <a:xfrm>
-            <a:off x="548640" y="960120"/>
-            <a:ext cx="5440680" cy="5349240"/>
+            <a:off x="548640" y="1325880"/>
+            <a:ext cx="5440680" cy="4846320"/>
           </a:xfrm>
           <a:prstGeom prst="rect">
             <a:avLst/>
@@ -27757,8 +27847,8 @@
         </p:nvSpPr>
         <p:spPr>
           <a:xfrm>
-            <a:off x="6217920" y="960120"/>
-            <a:ext cx="5440680" cy="5349240"/>
+            <a:off x="6217920" y="1325880"/>
+            <a:ext cx="5440680" cy="4846320"/>
           </a:xfrm>
           <a:prstGeom prst="rect">
             <a:avLst/>
@@ -27953,7 +28043,7 @@
         </p:nvSpPr>
         <p:spPr>
           <a:xfrm>
-            <a:off x="11109960" y="6382512"/>
+            <a:off x="11109960" y="6272784"/>
             <a:ext cx="548640" cy="274320"/>
           </a:xfrm>
           <a:prstGeom prst="rect">
@@ -27969,7 +28059,7 @@
           <a:bodyPr/>
           <a:lstStyle>
             <a:lvl1pPr>
-              <a:defRPr sz="1000">
+              <a:defRPr sz="1100">
                 <a:solidFill>
                   <a:srgbClr val="5B6B73"/>
                 </a:solidFill>
@@ -28021,7 +28111,7 @@
         </p:nvSpPr>
         <p:spPr>
           <a:xfrm>
-            <a:off x="548640" y="320040"/>
+            <a:off x="548640" y="640080"/>
             <a:ext cx="11091672" cy="548640"/>
           </a:xfrm>
           <a:prstGeom prst="rect">
@@ -28057,8 +28147,8 @@
         </p:nvSpPr>
         <p:spPr>
           <a:xfrm>
-            <a:off x="548640" y="960120"/>
-            <a:ext cx="5440680" cy="5349240"/>
+            <a:off x="548640" y="1325880"/>
+            <a:ext cx="5440680" cy="4846320"/>
           </a:xfrm>
           <a:prstGeom prst="rect">
             <a:avLst/>
@@ -28249,8 +28339,8 @@
         </p:nvSpPr>
         <p:spPr>
           <a:xfrm>
-            <a:off x="6217920" y="960120"/>
-            <a:ext cx="5440680" cy="5349240"/>
+            <a:off x="6217920" y="1325880"/>
+            <a:ext cx="5440680" cy="4846320"/>
           </a:xfrm>
           <a:prstGeom prst="rect">
             <a:avLst/>
@@ -28445,7 +28535,7 @@
         </p:nvSpPr>
         <p:spPr>
           <a:xfrm>
-            <a:off x="11109960" y="6382512"/>
+            <a:off x="11109960" y="6272784"/>
             <a:ext cx="548640" cy="274320"/>
           </a:xfrm>
           <a:prstGeom prst="rect">
@@ -28461,7 +28551,7 @@
           <a:bodyPr/>
           <a:lstStyle>
             <a:lvl1pPr>
-              <a:defRPr sz="1000">
+              <a:defRPr sz="1100">
                 <a:solidFill>
                   <a:srgbClr val="5B6B73"/>
                 </a:solidFill>
@@ -28513,7 +28603,7 @@
         </p:nvSpPr>
         <p:spPr>
           <a:xfrm>
-            <a:off x="548640" y="320040"/>
+            <a:off x="548640" y="640080"/>
             <a:ext cx="11091672" cy="548640"/>
           </a:xfrm>
           <a:prstGeom prst="rect">
@@ -28549,8 +28639,8 @@
         </p:nvSpPr>
         <p:spPr>
           <a:xfrm>
-            <a:off x="548640" y="960120"/>
-            <a:ext cx="5440680" cy="5349240"/>
+            <a:off x="548640" y="1325880"/>
+            <a:ext cx="5440680" cy="4846320"/>
           </a:xfrm>
           <a:prstGeom prst="rect">
             <a:avLst/>
@@ -28741,8 +28831,8 @@
         </p:nvSpPr>
         <p:spPr>
           <a:xfrm>
-            <a:off x="6217920" y="960120"/>
-            <a:ext cx="5440680" cy="5349240"/>
+            <a:off x="6217920" y="1325880"/>
+            <a:ext cx="5440680" cy="4846320"/>
           </a:xfrm>
           <a:prstGeom prst="rect">
             <a:avLst/>
@@ -28937,7 +29027,7 @@
         </p:nvSpPr>
         <p:spPr>
           <a:xfrm>
-            <a:off x="11109960" y="6382512"/>
+            <a:off x="11109960" y="6272784"/>
             <a:ext cx="548640" cy="274320"/>
           </a:xfrm>
           <a:prstGeom prst="rect">
@@ -28953,7 +29043,7 @@
           <a:bodyPr/>
           <a:lstStyle>
             <a:lvl1pPr>
-              <a:defRPr sz="1000">
+              <a:defRPr sz="1100">
                 <a:solidFill>
                   <a:srgbClr val="5B6B73"/>
                 </a:solidFill>
@@ -29005,7 +29095,7 @@
         </p:nvSpPr>
         <p:spPr>
           <a:xfrm>
-            <a:off x="548640" y="320040"/>
+            <a:off x="548640" y="640080"/>
             <a:ext cx="11091672" cy="548640"/>
           </a:xfrm>
           <a:prstGeom prst="rect">
@@ -29041,8 +29131,8 @@
         </p:nvSpPr>
         <p:spPr>
           <a:xfrm>
-            <a:off x="548640" y="960120"/>
-            <a:ext cx="5440680" cy="5349240"/>
+            <a:off x="548640" y="1325880"/>
+            <a:ext cx="5440680" cy="4846320"/>
           </a:xfrm>
           <a:prstGeom prst="rect">
             <a:avLst/>
@@ -29203,7 +29293,7 @@
         </p:nvSpPr>
         <p:spPr>
           <a:xfrm>
-            <a:off x="11109960" y="6382512"/>
+            <a:off x="11109960" y="6272784"/>
             <a:ext cx="548640" cy="274320"/>
           </a:xfrm>
           <a:prstGeom prst="rect">
@@ -29219,7 +29309,7 @@
           <a:bodyPr/>
           <a:lstStyle>
             <a:lvl1pPr>
-              <a:defRPr sz="1000">
+              <a:defRPr sz="1100">
                 <a:solidFill>
                   <a:srgbClr val="5B6B73"/>
                 </a:solidFill>
@@ -29271,8 +29361,8 @@
         </p:nvSpPr>
         <p:spPr>
           <a:xfrm>
-            <a:off x="548640" y="457200"/>
-            <a:ext cx="11091672" cy="822960"/>
+            <a:off x="731520" y="1737360"/>
+            <a:ext cx="10698480" cy="1737360"/>
           </a:xfrm>
           <a:prstGeom prst="rect">
             <a:avLst/>
@@ -29281,34 +29371,72 @@
           <a:ln/>
         </p:spPr>
         <p:txBody>
+          <a:bodyPr wrap="square" lIns="0" tIns="0" rIns="0" bIns="0" rtlCol="0" anchor="b"/>
+          <a:lstStyle/>
+          <a:p>
+            <a:pPr algn="l" indent="0" marL="0">
+              <a:buNone/>
+            </a:pPr>
+            <a:r>
+              <a:rPr lang="en-US" sz="4000" b="1" dirty="0">
+                <a:solidFill>
+                  <a:schemeClr val="bg1"/>
+                </a:solidFill>
+              </a:rPr>
+              <a:t>Teşekkürler</a:t>
+            </a:r>
+            <a:endParaRPr lang="en-US" sz="4000" dirty="0"/>
+          </a:p>
+        </p:txBody>
+      </p:sp>
+      <p:sp>
+        <p:nvSpPr>
+          <p:cNvPr id="3" name="Text 0"/>
+          <p:cNvSpPr/>
+          <p:nvPr>
+            <p:ph idx="101" type="body" hasCustomPrompt="1"/>
+          </p:nvPr>
+        </p:nvSpPr>
+        <p:spPr>
+          <a:xfrm>
+            <a:off x="731520" y="3657600"/>
+            <a:ext cx="10698480" cy="640080"/>
+          </a:xfrm>
+          <a:prstGeom prst="rect">
+            <a:avLst/>
+          </a:prstGeom>
+          <a:noFill/>
+          <a:ln/>
+        </p:spPr>
+        <p:txBody>
           <a:bodyPr wrap="square" lIns="0" tIns="0" rIns="0" bIns="0" rtlCol="0"/>
           <a:lstStyle/>
           <a:p>
-            <a:pPr algn="l" indent="0" marL="0">
-              <a:buNone/>
-            </a:pPr>
-            <a:r>
-              <a:rPr lang="en-US" sz="3000" b="1" dirty="0">
-                <a:solidFill>
-                  <a:schemeClr val="bg1"/>
-                </a:solidFill>
-              </a:rPr>
-              <a:t>Teşekkürler</a:t>
-            </a:r>
-            <a:endParaRPr lang="en-US" sz="3000" dirty="0"/>
-          </a:p>
-        </p:txBody>
-      </p:sp>
-      <p:sp>
-        <p:nvSpPr>
-          <p:cNvPr id="3" name="not-264"/>
+            <a:pPr indent="0" marL="0">
+              <a:buNone/>
+            </a:pPr>
+            <a:r>
+              <a:rPr lang="en-US" sz="2200" dirty="0">
+                <a:solidFill>
+                  <a:schemeClr val="accent5"/>
+                </a:solidFill>
+              </a:rPr>
+              <a:t>Sorular ve tartışma</a:t>
+            </a:r>
+            <a:endParaRPr lang="en-US" sz="2200" dirty="0"/>
+          </a:p>
+        </p:txBody>
+      </p:sp>
+      <p:sp>
+        <p:nvSpPr>
+          <p:cNvPr id="4" name="not-264"/>
           <p:cNvSpPr txBox="1"/>
           <p:nvPr/>
         </p:nvSpPr>
         <p:spPr>
           <a:xfrm>
-            <a:off x="548640" y="1554480"/>
-            <a:ext cx="11091672" cy="822960"/>
+            <a:off x="548640" y="6035040"/>
+            <a:ext cx="914400" cy="274320"/>
           </a:xfrm>
           <a:prstGeom prst="rect">
             <a:avLst/>
@@ -29324,14 +29452,44 @@
               <a:buNone/>
             </a:pPr>
             <a:r>
-              <a:rPr lang="en-US" sz="2400" dirty="0">
+              <a:rPr lang="en-US" sz="1000" dirty="0">
                 <a:solidFill>
                   <a:schemeClr val="accent5"/>
                 </a:solidFill>
               </a:rPr>
-              <a:t>Sorular ve tartışma</a:t>
-            </a:r>
-            <a:endParaRPr lang="en-US" sz="2400" dirty="0"/>
+              <a:t> </a:t>
+            </a:r>
+            <a:endParaRPr lang="en-US" sz="1000" dirty="0"/>
+          </a:p>
+        </p:txBody>
+      </p:sp>
+      <p:sp>
+        <p:nvSpPr>
+          <p:cNvPr id="5" name="Text 0"/>
+          <p:cNvSpPr/>
+          <p:nvPr>
+            <p:ph idx="102" type="body" hasCustomPrompt="1"/>
+          </p:nvPr>
+        </p:nvSpPr>
+        <p:spPr>
+          <a:xfrm>
+            <a:off x="731520" y="5120640"/>
+            <a:ext cx="10698480" cy="822960"/>
+          </a:xfrm>
+          <a:prstGeom prst="rect">
+            <a:avLst/>
+          </a:prstGeom>
+          <a:noFill/>
+          <a:ln/>
+        </p:spPr>
+        <p:txBody>
+          <a:bodyPr wrap="square" lIns="0" tIns="0" rIns="0" bIns="0" rtlCol="0"/>
+          <a:lstStyle/>
+          <a:p>
+            <a:pPr indent="0" marL="0">
+              <a:buNone/>
+            </a:pPr>
+            <a:endParaRPr lang="en-US" sz="1600" dirty="0"/>
           </a:p>
         </p:txBody>
       </p:sp>
@@ -29370,7 +29528,7 @@
         </p:nvSpPr>
         <p:spPr>
           <a:xfrm>
-            <a:off x="548640" y="228600"/>
+            <a:off x="548640" y="365760"/>
             <a:ext cx="8229600" cy="292608"/>
           </a:xfrm>
           <a:prstGeom prst="rect">
@@ -29408,7 +29566,7 @@
         </p:nvSpPr>
         <p:spPr>
           <a:xfrm>
-            <a:off x="548640" y="530352"/>
+            <a:off x="548640" y="640080"/>
             <a:ext cx="11091672" cy="914400"/>
           </a:xfrm>
           <a:prstGeom prst="rect">
@@ -29470,7 +29628,7 @@
                   <a:schemeClr val="tx1"/>
                 </a:solidFill>
               </a:rPr>
-              <a:t>Kusma aktif bir süreçtir, çoğu zaman bulantı önce gelir; regürjitasyon pasif geri akıştır</a:t>
+              <a:t>Kusma aktif bir süreçtir, çoğu zaman bulantı önce gelir; regürjitasyon pasif geri akıştır</a:t>
             </a:r>
             <a:r>
               <a:rPr lang="en-US" sz="2200" baseline="30000" dirty="0">
@@ -29478,7 +29636,7 @@
                   <a:schemeClr val="accent4"/>
                 </a:solidFill>
               </a:rPr>
-              <a:t>[2]</a:t>
+              <a:t>⁠[2]</a:t>
             </a:r>
             <a:endParaRPr lang="en-US" sz="2200" dirty="0"/>
           </a:p>
@@ -29496,7 +29654,7 @@
                   <a:schemeClr val="tx1"/>
                 </a:solidFill>
               </a:rPr>
-              <a:t>Ruminasyon: yemek sırasında/hemen sonra, görünüşte zahmetsiz; uykuda olmaz</a:t>
+              <a:t>Ruminasyon: yemek sırasında/hemen sonra, görünüşte zahmetsiz; uykuda olmaz</a:t>
             </a:r>
             <a:r>
               <a:rPr lang="en-US" sz="2200" baseline="30000" dirty="0">
@@ -29504,7 +29662,7 @@
                   <a:schemeClr val="accent4"/>
                 </a:solidFill>
               </a:rPr>
-              <a:t>[8]</a:t>
+              <a:t>⁠[8]</a:t>
             </a:r>
             <a:endParaRPr lang="en-US" sz="2200" dirty="0"/>
           </a:p>
@@ -29522,7 +29680,7 @@
                   <a:schemeClr val="tx1"/>
                 </a:solidFill>
               </a:rPr>
-              <a:t>Disfaji + kusma + kilo kaybı → akalazya: kusma %53,2; tanıya medyan 11 ay</a:t>
+              <a:t>Disfaji + kusma + kilo kaybı → akalazya: kusma %53,2; tanıya medyan 11 ay</a:t>
             </a:r>
             <a:r>
               <a:rPr lang="en-US" sz="2200" baseline="30000" dirty="0">
@@ -29530,7 +29688,7 @@
                   <a:schemeClr val="accent4"/>
                 </a:solidFill>
               </a:rPr>
-              <a:t>[9]</a:t>
+              <a:t>⁠[9]</a:t>
             </a:r>
             <a:endParaRPr lang="en-US" sz="2200" dirty="0"/>
           </a:p>
@@ -29642,7 +29800,7 @@
         <p:spPr>
           <a:xfrm>
             <a:off x="8001000" y="4114800"/>
-            <a:ext cx="3639312" cy="822960"/>
+            <a:ext cx="3639312" cy="868680"/>
           </a:xfrm>
           <a:prstGeom prst="rect">
             <a:avLst/>
@@ -29653,7 +29811,7 @@
           <a:ln/>
         </p:spPr>
         <p:txBody>
-          <a:bodyPr wrap="square" lIns="76200" tIns="76200" rIns="76200" bIns="76200" rtlCol="0" anchor="t"/>
+          <a:bodyPr wrap="square" lIns="127000" tIns="127000" rIns="127000" bIns="127000" rtlCol="0" anchor="t"/>
           <a:lstStyle/>
           <a:p>
             <a:pPr indent="0" marL="0">
@@ -29681,7 +29839,7 @@
         </p:nvSpPr>
         <p:spPr>
           <a:xfrm>
-            <a:off x="548640" y="6382512"/>
+            <a:off x="548640" y="6272784"/>
             <a:ext cx="10241280" cy="274320"/>
           </a:xfrm>
           <a:prstGeom prst="rect">
@@ -29698,14 +29856,14 @@
               <a:buNone/>
             </a:pPr>
             <a:r>
-              <a:rPr lang="en-US" sz="1000" dirty="0">
+              <a:rPr lang="en-US" sz="1100" dirty="0">
                 <a:solidFill>
                   <a:schemeClr val="accent4"/>
                 </a:solidFill>
               </a:rPr>
               <a:t>Kaynak no: 2,8,9 · tam liste sondaki kaynak slaytlarında</a:t>
             </a:r>
-            <a:endParaRPr lang="en-US" sz="1000" dirty="0"/>
+            <a:endParaRPr lang="en-US" sz="1100" dirty="0"/>
           </a:p>
         </p:txBody>
       </p:sp>
@@ -29721,7 +29879,7 @@
         </p:nvSpPr>
         <p:spPr>
           <a:xfrm>
-            <a:off x="11109960" y="6382512"/>
+            <a:off x="11109960" y="6272784"/>
             <a:ext cx="548640" cy="274320"/>
           </a:xfrm>
           <a:prstGeom prst="rect">
@@ -29737,7 +29895,7 @@
           <a:bodyPr/>
           <a:lstStyle>
             <a:lvl1pPr>
-              <a:defRPr sz="1000">
+              <a:defRPr sz="1100">
                 <a:solidFill>
                   <a:srgbClr val="5B6B73"/>
                 </a:solidFill>
@@ -29789,7 +29947,7 @@
         </p:nvSpPr>
         <p:spPr>
           <a:xfrm>
-            <a:off x="548640" y="228600"/>
+            <a:off x="548640" y="365760"/>
             <a:ext cx="8229600" cy="292608"/>
           </a:xfrm>
           <a:prstGeom prst="rect">
@@ -29827,7 +29985,7 @@
         </p:nvSpPr>
         <p:spPr>
           <a:xfrm>
-            <a:off x="548640" y="530352"/>
+            <a:off x="548640" y="640080"/>
             <a:ext cx="11091672" cy="914400"/>
           </a:xfrm>
           <a:prstGeom prst="rect">
@@ -29889,7 +30047,7 @@
                   <a:schemeClr val="tx1"/>
                 </a:solidFill>
               </a:rPr>
-              <a:t>Sevkli 106 çocuk: bu eşiklerle siklik (n=34) ve kronik (n=72) patern ayrıldı</a:t>
+              <a:t>Sevkli 106 çocuk: bu eşiklerle siklik (n=34) ve kronik (n=72) patern ayrıldı</a:t>
             </a:r>
             <a:r>
               <a:rPr lang="en-US" sz="1700" baseline="30000" dirty="0">
@@ -29897,7 +30055,7 @@
                   <a:schemeClr val="accent4"/>
                 </a:solidFill>
               </a:rPr>
-              <a:t>[3]</a:t>
+              <a:t>⁠[3]</a:t>
             </a:r>
             <a:endParaRPr lang="en-US" sz="1700" dirty="0"/>
           </a:p>
@@ -29933,7 +30091,7 @@
                   <a:schemeClr val="tx1"/>
                 </a:solidFill>
               </a:rPr>
-              <a:t>Prospektif tek merkez: en iyi eşik 12 ayda 4–10 atak, süre &gt;2 saat</a:t>
+              <a:t>Prospektif tek merkez: en iyi eşik 12 ayda 4–⁠10 atak, süre &gt;2 saat</a:t>
             </a:r>
             <a:r>
               <a:rPr lang="en-US" sz="1700" baseline="30000" dirty="0">
@@ -29941,7 +30099,7 @@
                   <a:schemeClr val="accent4"/>
                 </a:solidFill>
               </a:rPr>
-              <a:t>[10]</a:t>
+              <a:t>⁠[10]</a:t>
             </a:r>
             <a:endParaRPr lang="en-US" sz="1700" dirty="0"/>
           </a:p>
@@ -30017,7 +30175,7 @@
         </p:nvSpPr>
         <p:spPr>
           <a:xfrm>
-            <a:off x="548640" y="6382512"/>
+            <a:off x="548640" y="6272784"/>
             <a:ext cx="10241280" cy="274320"/>
           </a:xfrm>
           <a:prstGeom prst="rect">
@@ -30034,14 +30192,14 @@
               <a:buNone/>
             </a:pPr>
             <a:r>
-              <a:rPr lang="en-US" sz="1000" dirty="0">
+              <a:rPr lang="en-US" sz="1100" dirty="0">
                 <a:solidFill>
                   <a:schemeClr val="accent4"/>
                 </a:solidFill>
               </a:rPr>
               <a:t>Kaynak no: 3,10 · tam liste sondaki kaynak slaytlarında</a:t>
             </a:r>
-            <a:endParaRPr lang="en-US" sz="1000" dirty="0"/>
+            <a:endParaRPr lang="en-US" sz="1100" dirty="0"/>
           </a:p>
         </p:txBody>
       </p:sp>
@@ -30057,7 +30215,7 @@
         </p:nvSpPr>
         <p:spPr>
           <a:xfrm>
-            <a:off x="11109960" y="6382512"/>
+            <a:off x="11109960" y="6272784"/>
             <a:ext cx="548640" cy="274320"/>
           </a:xfrm>
           <a:prstGeom prst="rect">
@@ -30073,7 +30231,7 @@
           <a:bodyPr/>
           <a:lstStyle>
             <a:lvl1pPr>
-              <a:defRPr sz="1000">
+              <a:defRPr sz="1100">
                 <a:solidFill>
                   <a:srgbClr val="5B6B73"/>
                 </a:solidFill>
@@ -30125,7 +30283,7 @@
         </p:nvSpPr>
         <p:spPr>
           <a:xfrm>
-            <a:off x="548640" y="228600"/>
+            <a:off x="548640" y="365760"/>
             <a:ext cx="8229600" cy="292608"/>
           </a:xfrm>
           <a:prstGeom prst="rect">
@@ -30163,7 +30321,7 @@
         </p:nvSpPr>
         <p:spPr>
           <a:xfrm>
-            <a:off x="548640" y="530352"/>
+            <a:off x="548640" y="640080"/>
             <a:ext cx="11091672" cy="914400"/>
           </a:xfrm>
           <a:prstGeom prst="rect">
@@ -30225,7 +30383,7 @@
                   <a:schemeClr val="tx1"/>
                 </a:solidFill>
               </a:rPr>
-              <a:t>Siklik paternle gelen 225 çocuğun %88'i idiyopatik SKS</a:t>
+              <a:t>Siklik paternle gelen 225 çocuğun %88'i idiyopatik SKS</a:t>
             </a:r>
             <a:r>
               <a:rPr lang="en-US" sz="2200" baseline="30000" dirty="0">
@@ -30233,7 +30391,7 @@
                   <a:schemeClr val="accent4"/>
                 </a:solidFill>
               </a:rPr>
-              <a:t>[11]</a:t>
+              <a:t>⁠[11]</a:t>
             </a:r>
             <a:endParaRPr lang="en-US" sz="2200" dirty="0"/>
           </a:p>
@@ -30251,7 +30409,7 @@
                   <a:schemeClr val="tx1"/>
                 </a:solidFill>
               </a:rPr>
-              <a:t>Geri kalan ~%12: malrotasyon, akut hidronefroz, SSS tümörü, Addison hastalığı, YAOB</a:t>
+              <a:t>Geri kalan ~%12: malrotasyon, akut hidronefroz, SSS tümörü, Addison hastalığı, YAOB</a:t>
             </a:r>
             <a:r>
               <a:rPr lang="en-US" sz="2200" baseline="30000" dirty="0">
@@ -30259,7 +30417,7 @@
                   <a:schemeClr val="accent4"/>
                 </a:solidFill>
               </a:rPr>
-              <a:t>[11]</a:t>
+              <a:t>⁠[11]</a:t>
             </a:r>
             <a:endParaRPr lang="en-US" sz="2200" dirty="0"/>
           </a:p>
@@ -30277,7 +30435,7 @@
                   <a:schemeClr val="tx1"/>
                 </a:solidFill>
               </a:rPr>
-              <a:t>NASPGHAN 2008: "av tüfeği" tetkik yerine bayraklara göre hedefe yönelik tetkik</a:t>
+              <a:t>NASPGHAN 2008: "av tüfeği" tetkik yerine bayraklara göre hedefe yönelik tetkik</a:t>
             </a:r>
             <a:r>
               <a:rPr lang="en-US" sz="2200" baseline="30000" dirty="0">
@@ -30285,7 +30443,7 @@
                   <a:schemeClr val="accent4"/>
                 </a:solidFill>
               </a:rPr>
-              <a:t>[12]</a:t>
+              <a:t>⁠[12]</a:t>
             </a:r>
             <a:endParaRPr lang="en-US" sz="2200" dirty="0"/>
           </a:p>
@@ -30434,7 +30592,7 @@
         </p:nvSpPr>
         <p:spPr>
           <a:xfrm>
-            <a:off x="548640" y="6382512"/>
+            <a:off x="548640" y="6272784"/>
             <a:ext cx="10241280" cy="274320"/>
           </a:xfrm>
           <a:prstGeom prst="rect">
@@ -30451,14 +30609,14 @@
               <a:buNone/>
             </a:pPr>
             <a:r>
-              <a:rPr lang="en-US" sz="1000" dirty="0">
+              <a:rPr lang="en-US" sz="1100" dirty="0">
                 <a:solidFill>
                   <a:schemeClr val="accent4"/>
                 </a:solidFill>
               </a:rPr>
               <a:t>Kaynak no: 11,12 · tam liste sondaki kaynak slaytlarında</a:t>
             </a:r>
-            <a:endParaRPr lang="en-US" sz="1000" dirty="0"/>
+            <a:endParaRPr lang="en-US" sz="1100" dirty="0"/>
           </a:p>
         </p:txBody>
       </p:sp>
@@ -30474,7 +30632,7 @@
         </p:nvSpPr>
         <p:spPr>
           <a:xfrm>
-            <a:off x="11109960" y="6382512"/>
+            <a:off x="11109960" y="6272784"/>
             <a:ext cx="548640" cy="274320"/>
           </a:xfrm>
           <a:prstGeom prst="rect">
@@ -30490,7 +30648,7 @@
           <a:bodyPr/>
           <a:lstStyle>
             <a:lvl1pPr>
-              <a:defRPr sz="1000">
+              <a:defRPr sz="1100">
                 <a:solidFill>
                   <a:srgbClr val="5B6B73"/>
                 </a:solidFill>
@@ -30542,7 +30700,7 @@
         </p:nvSpPr>
         <p:spPr>
           <a:xfrm>
-            <a:off x="548640" y="228600"/>
+            <a:off x="548640" y="365760"/>
             <a:ext cx="8229600" cy="292608"/>
           </a:xfrm>
           <a:prstGeom prst="rect">
@@ -30580,7 +30738,7 @@
         </p:nvSpPr>
         <p:spPr>
           <a:xfrm>
-            <a:off x="548640" y="530352"/>
+            <a:off x="548640" y="640080"/>
             <a:ext cx="11091672" cy="914400"/>
           </a:xfrm>
           <a:prstGeom prst="rect">
@@ -30642,7 +30800,7 @@
                   <a:schemeClr val="tx1"/>
                 </a:solidFill>
               </a:rPr>
-              <a:t>Üçüncü basamak SKS merkezinde 100 çocuğun %40'ında adolesanda disotonomi semptomları; kronik semptom başlangıcı medyan 14 yaş</a:t>
+              <a:t>Üçüncü basamak SKS merkezinde 100 çocuğun %40'ında adolesanda disotonomi semptomları; kronik semptom başlangıcı medyan 14 yaş</a:t>
             </a:r>
             <a:r>
               <a:rPr lang="en-US" sz="2200" baseline="30000" dirty="0">
@@ -30650,7 +30808,7 @@
                   <a:schemeClr val="accent4"/>
                 </a:solidFill>
               </a:rPr>
-              <a:t>[13]</a:t>
+              <a:t>⁠[13]</a:t>
             </a:r>
             <a:endParaRPr lang="en-US" sz="2200" dirty="0"/>
           </a:p>
@@ -30668,7 +30826,7 @@
                   <a:schemeClr val="tx1"/>
                 </a:solidFill>
               </a:rPr>
-              <a:t>İrlanda kohortu: 9 ayda 22 çocuğun 17'si hâlâ kusuyor, ancak sıklık ve şiddet azaldı</a:t>
+              <a:t>İrlanda kohortu: 9 ayda 22 çocuğun 17'si hâlâ kusuyor, ancak sıklık ve şiddet azaldı</a:t>
             </a:r>
             <a:r>
               <a:rPr lang="en-US" sz="2200" baseline="30000" dirty="0">
@@ -30676,7 +30834,7 @@
                   <a:schemeClr val="accent4"/>
                 </a:solidFill>
               </a:rPr>
-              <a:t>[14]</a:t>
+              <a:t>⁠[14]</a:t>
             </a:r>
             <a:endParaRPr lang="en-US" sz="2200" dirty="0"/>
           </a:p>
@@ -30694,7 +30852,7 @@
                   <a:schemeClr val="tx1"/>
                 </a:solidFill>
               </a:rPr>
-              <a:t>Tanılı 41 çocuğun izleminde %61'inde kusma geçmiş</a:t>
+              <a:t>Tanılı 41 çocuğun izleminde %61'inde kusma geçmiş</a:t>
             </a:r>
             <a:r>
               <a:rPr lang="en-US" sz="2200" baseline="30000" dirty="0">
@@ -30702,7 +30860,7 @@
                   <a:schemeClr val="accent4"/>
                 </a:solidFill>
               </a:rPr>
-              <a:t>[15]</a:t>
+              <a:t>⁠[15]</a:t>
             </a:r>
             <a:endParaRPr lang="en-US" sz="2200" dirty="0"/>
           </a:p>
@@ -30851,7 +31009,7 @@
         </p:nvSpPr>
         <p:spPr>
           <a:xfrm>
-            <a:off x="548640" y="6382512"/>
+            <a:off x="548640" y="6272784"/>
             <a:ext cx="10241280" cy="274320"/>
           </a:xfrm>
           <a:prstGeom prst="rect">
@@ -30868,14 +31026,14 @@
               <a:buNone/>
             </a:pPr>
             <a:r>
-              <a:rPr lang="en-US" sz="1000" dirty="0">
+              <a:rPr lang="en-US" sz="1100" dirty="0">
                 <a:solidFill>
                   <a:schemeClr val="accent4"/>
                 </a:solidFill>
               </a:rPr>
               <a:t>Kaynak no: 13–15 · tam liste sondaki kaynak slaytlarında</a:t>
             </a:r>
-            <a:endParaRPr lang="en-US" sz="1000" dirty="0"/>
+            <a:endParaRPr lang="en-US" sz="1100" dirty="0"/>
           </a:p>
         </p:txBody>
       </p:sp>
@@ -30891,7 +31049,7 @@
         </p:nvSpPr>
         <p:spPr>
           <a:xfrm>
-            <a:off x="11109960" y="6382512"/>
+            <a:off x="11109960" y="6272784"/>
             <a:ext cx="548640" cy="274320"/>
           </a:xfrm>
           <a:prstGeom prst="rect">
@@ -30907,7 +31065,7 @@
           <a:bodyPr/>
           <a:lstStyle>
             <a:lvl1pPr>
-              <a:defRPr sz="1000">
+              <a:defRPr sz="1100">
                 <a:solidFill>
                   <a:srgbClr val="5B6B73"/>
                 </a:solidFill>
@@ -30959,7 +31117,7 @@
         </p:nvSpPr>
         <p:spPr>
           <a:xfrm>
-            <a:off x="548640" y="228600"/>
+            <a:off x="548640" y="365760"/>
             <a:ext cx="8229600" cy="292608"/>
           </a:xfrm>
           <a:prstGeom prst="rect">
@@ -30997,7 +31155,7 @@
         </p:nvSpPr>
         <p:spPr>
           <a:xfrm>
-            <a:off x="548640" y="530352"/>
+            <a:off x="548640" y="640080"/>
             <a:ext cx="11091672" cy="914400"/>
           </a:xfrm>
           <a:prstGeom prst="rect">
@@ -31138,7 +31296,7 @@
                   <a:schemeClr val="tx1"/>
                 </a:solidFill>
               </a:rPr>
-              <a:t>&gt;6 ay başlangıç ya da &gt;12 ay süreklilik alternatif tanı düşündürür</a:t>
+              <a:t>&gt;6 ay başlangıç ya da &gt;12 ay süreklilik alternatif tanı düşündürür</a:t>
             </a:r>
             <a:r>
               <a:rPr lang="en-US" sz="1700" baseline="30000" dirty="0">
@@ -31146,7 +31304,7 @@
                   <a:schemeClr val="accent4"/>
                 </a:solidFill>
               </a:rPr>
-              <a:t>[16]</a:t>
+              <a:t>⁠[16]</a:t>
             </a:r>
             <a:endParaRPr lang="en-US" sz="1700" dirty="0"/>
           </a:p>
@@ -31164,7 +31322,7 @@
                   <a:schemeClr val="tx1"/>
                 </a:solidFill>
               </a:rPr>
-              <a:t>İSPA GÖRH'ten ayırt edilemeyebilir</a:t>
+              <a:t>İSPA GÖRH'ten ayırt edilemeyebilir</a:t>
             </a:r>
             <a:r>
               <a:rPr lang="en-US" sz="1700" baseline="30000" dirty="0">
@@ -31172,7 +31330,7 @@
                   <a:schemeClr val="accent4"/>
                 </a:solidFill>
               </a:rPr>
-              <a:t>[16]</a:t>
+              <a:t>⁠[16]</a:t>
             </a:r>
             <a:endParaRPr lang="en-US" sz="1700" dirty="0"/>
           </a:p>
@@ -31190,7 +31348,7 @@
                   <a:schemeClr val="tx1"/>
                 </a:solidFill>
               </a:rPr>
-              <a:t>&lt;2 yaşta EoE'nin en sık başvurusu kusma</a:t>
+              <a:t>&lt;2 yaşta EoE'nin en sık başvurusu kusma</a:t>
             </a:r>
             <a:r>
               <a:rPr lang="en-US" sz="1700" baseline="30000" dirty="0">
@@ -31198,7 +31356,7 @@
                   <a:schemeClr val="accent4"/>
                 </a:solidFill>
               </a:rPr>
-              <a:t>[17]</a:t>
+              <a:t>⁠[17]</a:t>
             </a:r>
             <a:endParaRPr lang="en-US" sz="1700" dirty="0"/>
           </a:p>
@@ -31299,7 +31457,7 @@
                   <a:schemeClr val="tx1"/>
                 </a:solidFill>
               </a:rPr>
-              <a:t>SKS ort. başlangıç 5,3–5,8 yaş</a:t>
+              <a:t>SKS ort. başlangıç 5,3–⁠5,8 yaş</a:t>
             </a:r>
             <a:r>
               <a:rPr lang="en-US" sz="1700" baseline="30000" dirty="0">
@@ -31307,7 +31465,7 @@
                   <a:schemeClr val="accent4"/>
                 </a:solidFill>
               </a:rPr>
-              <a:t>[15,18]</a:t>
+              <a:t>⁠[15,18]</a:t>
             </a:r>
             <a:endParaRPr lang="en-US" sz="1700" dirty="0"/>
           </a:p>
@@ -31325,7 +31483,7 @@
                   <a:schemeClr val="tx1"/>
                 </a:solidFill>
               </a:rPr>
-              <a:t>Panayiotopoulos sendromu ~3–6 yaş</a:t>
+              <a:t>Panayiotopoulos sendromu ~3–⁠6 yaş</a:t>
             </a:r>
             <a:r>
               <a:rPr lang="en-US" sz="1700" baseline="30000" dirty="0">
@@ -31333,7 +31491,7 @@
                   <a:schemeClr val="accent4"/>
                 </a:solidFill>
               </a:rPr>
-              <a:t>[19]</a:t>
+              <a:t>⁠[19]</a:t>
             </a:r>
             <a:endParaRPr lang="en-US" sz="1700" dirty="0"/>
           </a:p>
@@ -31434,7 +31592,7 @@
                   <a:schemeClr val="tx1"/>
                 </a:solidFill>
               </a:rPr>
-              <a:t>KHS (SKS'den daha büyük yaş)</a:t>
+              <a:t>KHS (SKS'den daha büyük yaş)</a:t>
             </a:r>
             <a:r>
               <a:rPr lang="en-US" sz="1700" baseline="30000" dirty="0">
@@ -31442,7 +31600,7 @@
                   <a:schemeClr val="accent4"/>
                 </a:solidFill>
               </a:rPr>
-              <a:t>[20]</a:t>
+              <a:t>⁠[20]</a:t>
             </a:r>
             <a:endParaRPr lang="en-US" sz="1700" dirty="0"/>
           </a:p>
@@ -31460,7 +31618,7 @@
                   <a:schemeClr val="tx1"/>
                 </a:solidFill>
               </a:rPr>
-              <a:t>Ruminasyon + yeme bozukluğu</a:t>
+              <a:t>Ruminasyon + yeme bozukluğu</a:t>
             </a:r>
             <a:r>
               <a:rPr lang="en-US" sz="1700" baseline="30000" dirty="0">
@@ -31468,7 +31626,7 @@
                   <a:schemeClr val="accent4"/>
                 </a:solidFill>
               </a:rPr>
-              <a:t>[21]</a:t>
+              <a:t>⁠[21]</a:t>
             </a:r>
             <a:endParaRPr lang="en-US" sz="1700" dirty="0"/>
           </a:p>
@@ -31494,7 +31652,7 @@
                   <a:schemeClr val="accent4"/>
                 </a:solidFill>
               </a:rPr>
-              <a:t>[13]</a:t>
+              <a:t>⁠[13]</a:t>
             </a:r>
             <a:endParaRPr lang="en-US" sz="1700" dirty="0"/>
           </a:p>
@@ -31522,7 +31680,7 @@
           <a:ln/>
         </p:spPr>
         <p:txBody>
-          <a:bodyPr wrap="square" lIns="50800" tIns="177800" rIns="177800" bIns="50800" rtlCol="0" anchor="ctr"/>
+          <a:bodyPr wrap="square" lIns="177800" tIns="50800" rIns="177800" bIns="50800" rtlCol="0" anchor="ctr"/>
           <a:lstStyle/>
           <a:p>
             <a:pPr indent="0" marL="0">
@@ -31542,7 +31700,7 @@
                   <a:schemeClr val="bg1"/>
                 </a:solidFill>
               </a:rPr>
-              <a:t> safralı kusma aksi kanıtlanana dek obstrüksiyon</a:t>
+              <a:t> safralı kusma aksi kanıtlanana dek obstrüksiyon</a:t>
             </a:r>
             <a:r>
               <a:rPr lang="en-US" sz="1700" baseline="30000" dirty="0">
@@ -31550,7 +31708,7 @@
                   <a:schemeClr val="bg1"/>
                 </a:solidFill>
               </a:rPr>
-              <a:t>[22]</a:t>
+              <a:t>⁠[22]</a:t>
             </a:r>
             <a:endParaRPr lang="en-US" sz="1700" dirty="0"/>
           </a:p>
@@ -31602,7 +31760,7 @@
         </p:nvSpPr>
         <p:spPr>
           <a:xfrm>
-            <a:off x="548640" y="6382512"/>
+            <a:off x="548640" y="6272784"/>
             <a:ext cx="10241280" cy="274320"/>
           </a:xfrm>
           <a:prstGeom prst="rect">
@@ -31619,14 +31777,14 @@
               <a:buNone/>
             </a:pPr>
             <a:r>
-              <a:rPr lang="en-US" sz="1000" dirty="0">
+              <a:rPr lang="en-US" sz="1100" dirty="0">
                 <a:solidFill>
                   <a:schemeClr val="accent4"/>
                 </a:solidFill>
               </a:rPr>
               <a:t>Kaynak no: 13,15–22 · tam liste sondaki kaynak slaytlarında</a:t>
             </a:r>
-            <a:endParaRPr lang="en-US" sz="1000" dirty="0"/>
+            <a:endParaRPr lang="en-US" sz="1100" dirty="0"/>
           </a:p>
         </p:txBody>
       </p:sp>
@@ -31642,7 +31800,7 @@
         </p:nvSpPr>
         <p:spPr>
           <a:xfrm>
-            <a:off x="11109960" y="6382512"/>
+            <a:off x="11109960" y="6272784"/>
             <a:ext cx="548640" cy="274320"/>
           </a:xfrm>
           <a:prstGeom prst="rect">
@@ -31658,7 +31816,7 @@
           <a:bodyPr/>
           <a:lstStyle>
             <a:lvl1pPr>
-              <a:defRPr sz="1000">
+              <a:defRPr sz="1100">
                 <a:solidFill>
                   <a:srgbClr val="5B6B73"/>
                 </a:solidFill>
